--- a/GTM/board-meeting-q3-2026/deck/eduface-board-q3-2026-bewerkbaar.pptx
+++ b/GTM/board-meeting-q3-2026/deck/eduface-board-q3-2026-bewerkbaar.pptx
@@ -9544,7 +9544,7 @@
               </a:lnSpc>
             </a:pPr>
             <a:r>
-              <a:rPr sz="1150" b="0">
+              <a:rPr sz="1100" b="0">
                 <a:solidFill>
                   <a:srgbClr val="5B7480"/>
                 </a:solidFill>
@@ -9563,8 +9563,8 @@
         </p:nvSpPr>
         <p:spPr>
           <a:xfrm>
-            <a:off x="762000" y="1651000"/>
-            <a:ext cx="4826000" cy="190500"/>
+            <a:off x="762000" y="1638300"/>
+            <a:ext cx="3048000" cy="177800"/>
           </a:xfrm>
           <a:prstGeom prst="rect">
             <a:avLst/>
@@ -9602,8 +9602,8 @@
         </p:nvSpPr>
         <p:spPr>
           <a:xfrm>
-            <a:off x="5715000" y="1651000"/>
-            <a:ext cx="2540000" cy="190500"/>
+            <a:off x="3937000" y="1638300"/>
+            <a:ext cx="444500" cy="177800"/>
           </a:xfrm>
           <a:prstGeom prst="rect">
             <a:avLst/>
@@ -9628,7 +9628,7 @@
                 </a:solidFill>
                 <a:latin typeface="Inter"/>
               </a:rPr>
-              <a:t>Markt / segment</a:t>
+              <a:t>Land</a:t>
             </a:r>
           </a:p>
         </p:txBody>
@@ -9641,8 +9641,86 @@
         </p:nvSpPr>
         <p:spPr>
           <a:xfrm>
-            <a:off x="8445500" y="1651000"/>
-            <a:ext cx="1587500" cy="190500"/>
+            <a:off x="4508500" y="1638300"/>
+            <a:ext cx="825500" cy="177800"/>
+          </a:xfrm>
+          <a:prstGeom prst="rect">
+            <a:avLst/>
+          </a:prstGeom>
+          <a:noFill/>
+        </p:spPr>
+        <p:txBody>
+          <a:bodyPr wrap="square" lIns="0" rIns="0" tIns="0" bIns="0">
+            <a:spAutoFit/>
+          </a:bodyPr>
+          <a:lstStyle/>
+          <a:p>
+            <a:pPr algn="l">
+              <a:lnSpc>
+                <a:spcPct val="115000"/>
+              </a:lnSpc>
+            </a:pPr>
+            <a:r>
+              <a:rPr sz="850" b="1">
+                <a:solidFill>
+                  <a:srgbClr val="5B7480"/>
+                </a:solidFill>
+                <a:latin typeface="Inter"/>
+              </a:rPr>
+              <a:t>Privé</a:t>
+            </a:r>
+          </a:p>
+        </p:txBody>
+      </p:sp>
+      <p:sp>
+        <p:nvSpPr>
+          <p:cNvPr id="7" name="TextBox 6"/>
+          <p:cNvSpPr txBox="1"/>
+          <p:nvPr/>
+        </p:nvSpPr>
+        <p:spPr>
+          <a:xfrm>
+            <a:off x="5461000" y="1638300"/>
+            <a:ext cx="571500" cy="177800"/>
+          </a:xfrm>
+          <a:prstGeom prst="rect">
+            <a:avLst/>
+          </a:prstGeom>
+          <a:noFill/>
+        </p:spPr>
+        <p:txBody>
+          <a:bodyPr wrap="square" lIns="0" rIns="0" tIns="0" bIns="0">
+            <a:spAutoFit/>
+          </a:bodyPr>
+          <a:lstStyle/>
+          <a:p>
+            <a:pPr algn="l">
+              <a:lnSpc>
+                <a:spcPct val="115000"/>
+              </a:lnSpc>
+            </a:pPr>
+            <a:r>
+              <a:rPr sz="850" b="1">
+                <a:solidFill>
+                  <a:srgbClr val="5B7480"/>
+                </a:solidFill>
+                <a:latin typeface="Inter"/>
+              </a:rPr>
+              <a:t>Q3</a:t>
+            </a:r>
+          </a:p>
+        </p:txBody>
+      </p:sp>
+      <p:sp>
+        <p:nvSpPr>
+          <p:cNvPr id="8" name="TextBox 7"/>
+          <p:cNvSpPr txBox="1"/>
+          <p:nvPr/>
+        </p:nvSpPr>
+        <p:spPr>
+          <a:xfrm>
+            <a:off x="8572500" y="1638300"/>
+            <a:ext cx="1460500" cy="177800"/>
           </a:xfrm>
           <a:prstGeom prst="rect">
             <a:avLst/>
@@ -9674,14 +9752,14 @@
       </p:sp>
       <p:sp>
         <p:nvSpPr>
-          <p:cNvPr id="7" name="TextBox 6"/>
-          <p:cNvSpPr txBox="1"/>
-          <p:nvPr/>
-        </p:nvSpPr>
-        <p:spPr>
-          <a:xfrm>
-            <a:off x="10160000" y="1651000"/>
-            <a:ext cx="1270000" cy="190500"/>
+          <p:cNvPr id="9" name="TextBox 8"/>
+          <p:cNvSpPr txBox="1"/>
+          <p:nvPr/>
+        </p:nvSpPr>
+        <p:spPr>
+          <a:xfrm>
+            <a:off x="10223500" y="1638300"/>
+            <a:ext cx="1206500" cy="177800"/>
           </a:xfrm>
           <a:prstGeom prst="rect">
             <a:avLst/>
@@ -9713,13 +9791,13 @@
       </p:sp>
       <p:sp>
         <p:nvSpPr>
-          <p:cNvPr id="8" name="Rectangle 7"/>
+          <p:cNvPr id="10" name="Rectangle 9"/>
           <p:cNvSpPr/>
           <p:nvPr/>
         </p:nvSpPr>
         <p:spPr>
           <a:xfrm>
-            <a:off x="762000" y="1841500"/>
+            <a:off x="762000" y="1816100"/>
             <a:ext cx="10668000" cy="12700"/>
           </a:xfrm>
           <a:prstGeom prst="rect">
@@ -9757,14 +9835,14 @@
       </p:sp>
       <p:sp>
         <p:nvSpPr>
-          <p:cNvPr id="9" name="TextBox 8"/>
-          <p:cNvSpPr txBox="1"/>
-          <p:nvPr/>
-        </p:nvSpPr>
-        <p:spPr>
-          <a:xfrm>
-            <a:off x="762000" y="1930400"/>
-            <a:ext cx="4826000" cy="127000"/>
+          <p:cNvPr id="11" name="TextBox 10"/>
+          <p:cNvSpPr txBox="1"/>
+          <p:nvPr/>
+        </p:nvSpPr>
+        <p:spPr>
+          <a:xfrm>
+            <a:off x="762000" y="1892300"/>
+            <a:ext cx="3048000" cy="152400"/>
           </a:xfrm>
           <a:prstGeom prst="rect">
             <a:avLst/>
@@ -9796,14 +9874,14 @@
       </p:sp>
       <p:sp>
         <p:nvSpPr>
-          <p:cNvPr id="10" name="TextBox 9"/>
-          <p:cNvSpPr txBox="1"/>
-          <p:nvPr/>
-        </p:nvSpPr>
-        <p:spPr>
-          <a:xfrm>
-            <a:off x="5715000" y="1930400"/>
-            <a:ext cx="2540000" cy="127000"/>
+          <p:cNvPr id="12" name="TextBox 11"/>
+          <p:cNvSpPr txBox="1"/>
+          <p:nvPr/>
+        </p:nvSpPr>
+        <p:spPr>
+          <a:xfrm>
+            <a:off x="3937000" y="1892300"/>
+            <a:ext cx="444500" cy="152400"/>
           </a:xfrm>
           <a:prstGeom prst="rect">
             <a:avLst/>
@@ -9824,25 +9902,234 @@
             <a:r>
               <a:rPr sz="950" b="0">
                 <a:solidFill>
+                  <a:srgbClr val="5B7480"/>
+                </a:solidFill>
+                <a:latin typeface="Inter"/>
+              </a:rPr>
+              <a:t>US</a:t>
+            </a:r>
+          </a:p>
+        </p:txBody>
+      </p:sp>
+      <p:sp>
+        <p:nvSpPr>
+          <p:cNvPr id="13" name="Rounded Rectangle 12"/>
+          <p:cNvSpPr/>
+          <p:nvPr/>
+        </p:nvSpPr>
+        <p:spPr>
+          <a:xfrm>
+            <a:off x="4508500" y="1885950"/>
+            <a:ext cx="495300" cy="139700"/>
+          </a:xfrm>
+          <a:prstGeom prst="roundRect">
+            <a:avLst>
+              <a:gd name="adj" fmla="val 27272"/>
+            </a:avLst>
+          </a:prstGeom>
+          <a:solidFill>
+            <a:srgbClr val="E2FBEF"/>
+          </a:solidFill>
+          <a:ln>
+            <a:noFill/>
+          </a:ln>
+          <a:effectLst/>
+        </p:spPr>
+        <p:style>
+          <a:lnRef idx="1">
+            <a:schemeClr val="accent1"/>
+          </a:lnRef>
+          <a:fillRef idx="3">
+            <a:schemeClr val="accent1"/>
+          </a:fillRef>
+          <a:effectRef idx="2">
+            <a:schemeClr val="accent1"/>
+          </a:effectRef>
+          <a:fontRef idx="minor">
+            <a:schemeClr val="lt1"/>
+          </a:fontRef>
+        </p:style>
+        <p:txBody>
+          <a:bodyPr rtlCol="0" anchor="ctr"/>
+          <a:lstStyle/>
+          <a:p>
+            <a:pPr algn="ctr"/>
+          </a:p>
+        </p:txBody>
+      </p:sp>
+      <p:sp>
+        <p:nvSpPr>
+          <p:cNvPr id="14" name="TextBox 13"/>
+          <p:cNvSpPr txBox="1"/>
+          <p:nvPr/>
+        </p:nvSpPr>
+        <p:spPr>
+          <a:xfrm>
+            <a:off x="4508500" y="1898650"/>
+            <a:ext cx="495300" cy="114300"/>
+          </a:xfrm>
+          <a:prstGeom prst="rect">
+            <a:avLst/>
+          </a:prstGeom>
+          <a:noFill/>
+        </p:spPr>
+        <p:txBody>
+          <a:bodyPr wrap="square" lIns="0" rIns="0" tIns="0" bIns="0">
+            <a:spAutoFit/>
+          </a:bodyPr>
+          <a:lstStyle/>
+          <a:p>
+            <a:pPr algn="ctr">
+              <a:lnSpc>
+                <a:spcPct val="115000"/>
+              </a:lnSpc>
+            </a:pPr>
+            <a:r>
+              <a:rPr sz="650" b="1">
+                <a:solidFill>
+                  <a:srgbClr val="007B54"/>
+                </a:solidFill>
+                <a:latin typeface="Inter"/>
+              </a:rPr>
+              <a:t>PRIVÉ</a:t>
+            </a:r>
+          </a:p>
+        </p:txBody>
+      </p:sp>
+      <p:sp>
+        <p:nvSpPr>
+          <p:cNvPr id="15" name="Rounded Rectangle 14"/>
+          <p:cNvSpPr/>
+          <p:nvPr/>
+        </p:nvSpPr>
+        <p:spPr>
+          <a:xfrm>
+            <a:off x="5461000" y="1885950"/>
+            <a:ext cx="330200" cy="139700"/>
+          </a:xfrm>
+          <a:prstGeom prst="roundRect">
+            <a:avLst>
+              <a:gd name="adj" fmla="val 27272"/>
+            </a:avLst>
+          </a:prstGeom>
+          <a:solidFill>
+            <a:srgbClr val="FDF0DF"/>
+          </a:solidFill>
+          <a:ln>
+            <a:noFill/>
+          </a:ln>
+          <a:effectLst/>
+        </p:spPr>
+        <p:style>
+          <a:lnRef idx="1">
+            <a:schemeClr val="accent1"/>
+          </a:lnRef>
+          <a:fillRef idx="3">
+            <a:schemeClr val="accent1"/>
+          </a:fillRef>
+          <a:effectRef idx="2">
+            <a:schemeClr val="accent1"/>
+          </a:effectRef>
+          <a:fontRef idx="minor">
+            <a:schemeClr val="lt1"/>
+          </a:fontRef>
+        </p:style>
+        <p:txBody>
+          <a:bodyPr rtlCol="0" anchor="ctr"/>
+          <a:lstStyle/>
+          <a:p>
+            <a:pPr algn="ctr"/>
+          </a:p>
+        </p:txBody>
+      </p:sp>
+      <p:sp>
+        <p:nvSpPr>
+          <p:cNvPr id="16" name="TextBox 15"/>
+          <p:cNvSpPr txBox="1"/>
+          <p:nvPr/>
+        </p:nvSpPr>
+        <p:spPr>
+          <a:xfrm>
+            <a:off x="5461000" y="1898650"/>
+            <a:ext cx="330200" cy="114300"/>
+          </a:xfrm>
+          <a:prstGeom prst="rect">
+            <a:avLst/>
+          </a:prstGeom>
+          <a:noFill/>
+        </p:spPr>
+        <p:txBody>
+          <a:bodyPr wrap="square" lIns="0" rIns="0" tIns="0" bIns="0">
+            <a:spAutoFit/>
+          </a:bodyPr>
+          <a:lstStyle/>
+          <a:p>
+            <a:pPr algn="ctr">
+              <a:lnSpc>
+                <a:spcPct val="115000"/>
+              </a:lnSpc>
+            </a:pPr>
+            <a:r>
+              <a:rPr sz="650" b="1">
+                <a:solidFill>
+                  <a:srgbClr val="E07B00"/>
+                </a:solidFill>
+                <a:latin typeface="Inter"/>
+              </a:rPr>
+              <a:t>Q3</a:t>
+            </a:r>
+          </a:p>
+        </p:txBody>
+      </p:sp>
+      <p:sp>
+        <p:nvSpPr>
+          <p:cNvPr id="17" name="TextBox 16"/>
+          <p:cNvSpPr txBox="1"/>
+          <p:nvPr/>
+        </p:nvSpPr>
+        <p:spPr>
+          <a:xfrm>
+            <a:off x="8572500" y="1892300"/>
+            <a:ext cx="1460500" cy="152400"/>
+          </a:xfrm>
+          <a:prstGeom prst="rect">
+            <a:avLst/>
+          </a:prstGeom>
+          <a:noFill/>
+        </p:spPr>
+        <p:txBody>
+          <a:bodyPr wrap="square" lIns="0" rIns="0" tIns="0" bIns="0">
+            <a:spAutoFit/>
+          </a:bodyPr>
+          <a:lstStyle/>
+          <a:p>
+            <a:pPr algn="r">
+              <a:lnSpc>
+                <a:spcPct val="115000"/>
+              </a:lnSpc>
+            </a:pPr>
+            <a:r>
+              <a:rPr sz="950" b="0">
+                <a:solidFill>
                   <a:srgbClr val="002333"/>
                 </a:solidFill>
                 <a:latin typeface="Inter"/>
               </a:rPr>
-              <a:t>US, privaat</a:t>
-            </a:r>
-          </a:p>
-        </p:txBody>
-      </p:sp>
-      <p:sp>
-        <p:nvSpPr>
-          <p:cNvPr id="11" name="TextBox 10"/>
-          <p:cNvSpPr txBox="1"/>
-          <p:nvPr/>
-        </p:nvSpPr>
-        <p:spPr>
-          <a:xfrm>
-            <a:off x="8445500" y="1930400"/>
-            <a:ext cx="1587500" cy="127000"/>
+              <a:t>€400.000</a:t>
+            </a:r>
+          </a:p>
+        </p:txBody>
+      </p:sp>
+      <p:sp>
+        <p:nvSpPr>
+          <p:cNvPr id="18" name="TextBox 17"/>
+          <p:cNvSpPr txBox="1"/>
+          <p:nvPr/>
+        </p:nvSpPr>
+        <p:spPr>
+          <a:xfrm>
+            <a:off x="10223500" y="1892300"/>
+            <a:ext cx="1206500" cy="152400"/>
           </a:xfrm>
           <a:prstGeom prst="rect">
             <a:avLst/>
@@ -9867,6 +10154,247 @@
                 </a:solidFill>
                 <a:latin typeface="Inter"/>
               </a:rPr>
+              <a:t>50%</a:t>
+            </a:r>
+          </a:p>
+        </p:txBody>
+      </p:sp>
+      <p:sp>
+        <p:nvSpPr>
+          <p:cNvPr id="19" name="TextBox 18"/>
+          <p:cNvSpPr txBox="1"/>
+          <p:nvPr/>
+        </p:nvSpPr>
+        <p:spPr>
+          <a:xfrm>
+            <a:off x="762000" y="2057400"/>
+            <a:ext cx="3048000" cy="152400"/>
+          </a:xfrm>
+          <a:prstGeom prst="rect">
+            <a:avLst/>
+          </a:prstGeom>
+          <a:noFill/>
+        </p:spPr>
+        <p:txBody>
+          <a:bodyPr wrap="square" lIns="0" rIns="0" tIns="0" bIns="0">
+            <a:spAutoFit/>
+          </a:bodyPr>
+          <a:lstStyle/>
+          <a:p>
+            <a:pPr algn="l">
+              <a:lnSpc>
+                <a:spcPct val="115000"/>
+              </a:lnSpc>
+            </a:pPr>
+            <a:r>
+              <a:rPr sz="950" b="0">
+                <a:solidFill>
+                  <a:srgbClr val="002333"/>
+                </a:solidFill>
+                <a:latin typeface="Inter"/>
+              </a:rPr>
+              <a:t>BPP</a:t>
+            </a:r>
+          </a:p>
+        </p:txBody>
+      </p:sp>
+      <p:sp>
+        <p:nvSpPr>
+          <p:cNvPr id="20" name="TextBox 19"/>
+          <p:cNvSpPr txBox="1"/>
+          <p:nvPr/>
+        </p:nvSpPr>
+        <p:spPr>
+          <a:xfrm>
+            <a:off x="3937000" y="2057400"/>
+            <a:ext cx="444500" cy="152400"/>
+          </a:xfrm>
+          <a:prstGeom prst="rect">
+            <a:avLst/>
+          </a:prstGeom>
+          <a:noFill/>
+        </p:spPr>
+        <p:txBody>
+          <a:bodyPr wrap="square" lIns="0" rIns="0" tIns="0" bIns="0">
+            <a:spAutoFit/>
+          </a:bodyPr>
+          <a:lstStyle/>
+          <a:p>
+            <a:pPr algn="l">
+              <a:lnSpc>
+                <a:spcPct val="115000"/>
+              </a:lnSpc>
+            </a:pPr>
+            <a:r>
+              <a:rPr sz="950" b="0">
+                <a:solidFill>
+                  <a:srgbClr val="5B7480"/>
+                </a:solidFill>
+                <a:latin typeface="Inter"/>
+              </a:rPr>
+              <a:t>UK</a:t>
+            </a:r>
+          </a:p>
+        </p:txBody>
+      </p:sp>
+      <p:sp>
+        <p:nvSpPr>
+          <p:cNvPr id="21" name="Rounded Rectangle 20"/>
+          <p:cNvSpPr/>
+          <p:nvPr/>
+        </p:nvSpPr>
+        <p:spPr>
+          <a:xfrm>
+            <a:off x="4508500" y="2051050"/>
+            <a:ext cx="495300" cy="139700"/>
+          </a:xfrm>
+          <a:prstGeom prst="roundRect">
+            <a:avLst>
+              <a:gd name="adj" fmla="val 27272"/>
+            </a:avLst>
+          </a:prstGeom>
+          <a:solidFill>
+            <a:srgbClr val="E2FBEF"/>
+          </a:solidFill>
+          <a:ln>
+            <a:noFill/>
+          </a:ln>
+          <a:effectLst/>
+        </p:spPr>
+        <p:style>
+          <a:lnRef idx="1">
+            <a:schemeClr val="accent1"/>
+          </a:lnRef>
+          <a:fillRef idx="3">
+            <a:schemeClr val="accent1"/>
+          </a:fillRef>
+          <a:effectRef idx="2">
+            <a:schemeClr val="accent1"/>
+          </a:effectRef>
+          <a:fontRef idx="minor">
+            <a:schemeClr val="lt1"/>
+          </a:fontRef>
+        </p:style>
+        <p:txBody>
+          <a:bodyPr rtlCol="0" anchor="ctr"/>
+          <a:lstStyle/>
+          <a:p>
+            <a:pPr algn="ctr"/>
+          </a:p>
+        </p:txBody>
+      </p:sp>
+      <p:sp>
+        <p:nvSpPr>
+          <p:cNvPr id="22" name="TextBox 21"/>
+          <p:cNvSpPr txBox="1"/>
+          <p:nvPr/>
+        </p:nvSpPr>
+        <p:spPr>
+          <a:xfrm>
+            <a:off x="4508500" y="2063750"/>
+            <a:ext cx="495300" cy="114300"/>
+          </a:xfrm>
+          <a:prstGeom prst="rect">
+            <a:avLst/>
+          </a:prstGeom>
+          <a:noFill/>
+        </p:spPr>
+        <p:txBody>
+          <a:bodyPr wrap="square" lIns="0" rIns="0" tIns="0" bIns="0">
+            <a:spAutoFit/>
+          </a:bodyPr>
+          <a:lstStyle/>
+          <a:p>
+            <a:pPr algn="ctr">
+              <a:lnSpc>
+                <a:spcPct val="115000"/>
+              </a:lnSpc>
+            </a:pPr>
+            <a:r>
+              <a:rPr sz="650" b="1">
+                <a:solidFill>
+                  <a:srgbClr val="007B54"/>
+                </a:solidFill>
+                <a:latin typeface="Inter"/>
+              </a:rPr>
+              <a:t>PRIVÉ</a:t>
+            </a:r>
+          </a:p>
+        </p:txBody>
+      </p:sp>
+      <p:sp>
+        <p:nvSpPr>
+          <p:cNvPr id="23" name="TextBox 22"/>
+          <p:cNvSpPr txBox="1"/>
+          <p:nvPr/>
+        </p:nvSpPr>
+        <p:spPr>
+          <a:xfrm>
+            <a:off x="5461000" y="2057400"/>
+            <a:ext cx="571500" cy="152400"/>
+          </a:xfrm>
+          <a:prstGeom prst="rect">
+            <a:avLst/>
+          </a:prstGeom>
+          <a:noFill/>
+        </p:spPr>
+        <p:txBody>
+          <a:bodyPr wrap="square" lIns="0" rIns="0" tIns="0" bIns="0">
+            <a:spAutoFit/>
+          </a:bodyPr>
+          <a:lstStyle/>
+          <a:p>
+            <a:pPr algn="l">
+              <a:lnSpc>
+                <a:spcPct val="115000"/>
+              </a:lnSpc>
+            </a:pPr>
+            <a:r>
+              <a:rPr sz="800" b="0">
+                <a:solidFill>
+                  <a:srgbClr val="5B7480"/>
+                </a:solidFill>
+                <a:latin typeface="Inter"/>
+              </a:rPr>
+              <a:t>n.b.</a:t>
+            </a:r>
+          </a:p>
+        </p:txBody>
+      </p:sp>
+      <p:sp>
+        <p:nvSpPr>
+          <p:cNvPr id="24" name="TextBox 23"/>
+          <p:cNvSpPr txBox="1"/>
+          <p:nvPr/>
+        </p:nvSpPr>
+        <p:spPr>
+          <a:xfrm>
+            <a:off x="8572500" y="2057400"/>
+            <a:ext cx="1460500" cy="152400"/>
+          </a:xfrm>
+          <a:prstGeom prst="rect">
+            <a:avLst/>
+          </a:prstGeom>
+          <a:noFill/>
+        </p:spPr>
+        <p:txBody>
+          <a:bodyPr wrap="square" lIns="0" rIns="0" tIns="0" bIns="0">
+            <a:spAutoFit/>
+          </a:bodyPr>
+          <a:lstStyle/>
+          <a:p>
+            <a:pPr algn="r">
+              <a:lnSpc>
+                <a:spcPct val="115000"/>
+              </a:lnSpc>
+            </a:pPr>
+            <a:r>
+              <a:rPr sz="950" b="0">
+                <a:solidFill>
+                  <a:srgbClr val="002333"/>
+                </a:solidFill>
+                <a:latin typeface="Inter"/>
+              </a:rPr>
               <a:t>€400.000</a:t>
             </a:r>
           </a:p>
@@ -9874,14 +10402,14 @@
       </p:sp>
       <p:sp>
         <p:nvSpPr>
-          <p:cNvPr id="12" name="TextBox 11"/>
-          <p:cNvSpPr txBox="1"/>
-          <p:nvPr/>
-        </p:nvSpPr>
-        <p:spPr>
-          <a:xfrm>
-            <a:off x="10160000" y="1930400"/>
-            <a:ext cx="1270000" cy="127000"/>
+          <p:cNvPr id="25" name="TextBox 24"/>
+          <p:cNvSpPr txBox="1"/>
+          <p:nvPr/>
+        </p:nvSpPr>
+        <p:spPr>
+          <a:xfrm>
+            <a:off x="10223500" y="2057400"/>
+            <a:ext cx="1206500" cy="152400"/>
           </a:xfrm>
           <a:prstGeom prst="rect">
             <a:avLst/>
@@ -9906,6 +10434,1732 @@
                 </a:solidFill>
                 <a:latin typeface="Inter"/>
               </a:rPr>
+              <a:t>10%</a:t>
+            </a:r>
+          </a:p>
+        </p:txBody>
+      </p:sp>
+      <p:sp>
+        <p:nvSpPr>
+          <p:cNvPr id="26" name="TextBox 25"/>
+          <p:cNvSpPr txBox="1"/>
+          <p:nvPr/>
+        </p:nvSpPr>
+        <p:spPr>
+          <a:xfrm>
+            <a:off x="762000" y="2222500"/>
+            <a:ext cx="3048000" cy="152400"/>
+          </a:xfrm>
+          <a:prstGeom prst="rect">
+            <a:avLst/>
+          </a:prstGeom>
+          <a:noFill/>
+        </p:spPr>
+        <p:txBody>
+          <a:bodyPr wrap="square" lIns="0" rIns="0" tIns="0" bIns="0">
+            <a:spAutoFit/>
+          </a:bodyPr>
+          <a:lstStyle/>
+          <a:p>
+            <a:pPr algn="l">
+              <a:lnSpc>
+                <a:spcPct val="115000"/>
+              </a:lnSpc>
+            </a:pPr>
+            <a:r>
+              <a:rPr sz="950" b="0">
+                <a:solidFill>
+                  <a:srgbClr val="002333"/>
+                </a:solidFill>
+                <a:latin typeface="Inter"/>
+              </a:rPr>
+              <a:t>Rijksuniversiteit Groningen</a:t>
+            </a:r>
+          </a:p>
+        </p:txBody>
+      </p:sp>
+      <p:sp>
+        <p:nvSpPr>
+          <p:cNvPr id="27" name="TextBox 26"/>
+          <p:cNvSpPr txBox="1"/>
+          <p:nvPr/>
+        </p:nvSpPr>
+        <p:spPr>
+          <a:xfrm>
+            <a:off x="3937000" y="2222500"/>
+            <a:ext cx="444500" cy="152400"/>
+          </a:xfrm>
+          <a:prstGeom prst="rect">
+            <a:avLst/>
+          </a:prstGeom>
+          <a:noFill/>
+        </p:spPr>
+        <p:txBody>
+          <a:bodyPr wrap="square" lIns="0" rIns="0" tIns="0" bIns="0">
+            <a:spAutoFit/>
+          </a:bodyPr>
+          <a:lstStyle/>
+          <a:p>
+            <a:pPr algn="l">
+              <a:lnSpc>
+                <a:spcPct val="115000"/>
+              </a:lnSpc>
+            </a:pPr>
+            <a:r>
+              <a:rPr sz="950" b="0">
+                <a:solidFill>
+                  <a:srgbClr val="5B7480"/>
+                </a:solidFill>
+                <a:latin typeface="Inter"/>
+              </a:rPr>
+              <a:t>NL</a:t>
+            </a:r>
+          </a:p>
+        </p:txBody>
+      </p:sp>
+      <p:sp>
+        <p:nvSpPr>
+          <p:cNvPr id="28" name="Rounded Rectangle 27"/>
+          <p:cNvSpPr/>
+          <p:nvPr/>
+        </p:nvSpPr>
+        <p:spPr>
+          <a:xfrm>
+            <a:off x="5461000" y="2216150"/>
+            <a:ext cx="330200" cy="139700"/>
+          </a:xfrm>
+          <a:prstGeom prst="roundRect">
+            <a:avLst>
+              <a:gd name="adj" fmla="val 27272"/>
+            </a:avLst>
+          </a:prstGeom>
+          <a:solidFill>
+            <a:srgbClr val="FDF0DF"/>
+          </a:solidFill>
+          <a:ln>
+            <a:noFill/>
+          </a:ln>
+          <a:effectLst/>
+        </p:spPr>
+        <p:style>
+          <a:lnRef idx="1">
+            <a:schemeClr val="accent1"/>
+          </a:lnRef>
+          <a:fillRef idx="3">
+            <a:schemeClr val="accent1"/>
+          </a:fillRef>
+          <a:effectRef idx="2">
+            <a:schemeClr val="accent1"/>
+          </a:effectRef>
+          <a:fontRef idx="minor">
+            <a:schemeClr val="lt1"/>
+          </a:fontRef>
+        </p:style>
+        <p:txBody>
+          <a:bodyPr rtlCol="0" anchor="ctr"/>
+          <a:lstStyle/>
+          <a:p>
+            <a:pPr algn="ctr"/>
+          </a:p>
+        </p:txBody>
+      </p:sp>
+      <p:sp>
+        <p:nvSpPr>
+          <p:cNvPr id="29" name="TextBox 28"/>
+          <p:cNvSpPr txBox="1"/>
+          <p:nvPr/>
+        </p:nvSpPr>
+        <p:spPr>
+          <a:xfrm>
+            <a:off x="5461000" y="2228850"/>
+            <a:ext cx="330200" cy="114300"/>
+          </a:xfrm>
+          <a:prstGeom prst="rect">
+            <a:avLst/>
+          </a:prstGeom>
+          <a:noFill/>
+        </p:spPr>
+        <p:txBody>
+          <a:bodyPr wrap="square" lIns="0" rIns="0" tIns="0" bIns="0">
+            <a:spAutoFit/>
+          </a:bodyPr>
+          <a:lstStyle/>
+          <a:p>
+            <a:pPr algn="ctr">
+              <a:lnSpc>
+                <a:spcPct val="115000"/>
+              </a:lnSpc>
+            </a:pPr>
+            <a:r>
+              <a:rPr sz="650" b="1">
+                <a:solidFill>
+                  <a:srgbClr val="E07B00"/>
+                </a:solidFill>
+                <a:latin typeface="Inter"/>
+              </a:rPr>
+              <a:t>Q3</a:t>
+            </a:r>
+          </a:p>
+        </p:txBody>
+      </p:sp>
+      <p:sp>
+        <p:nvSpPr>
+          <p:cNvPr id="30" name="TextBox 29"/>
+          <p:cNvSpPr txBox="1"/>
+          <p:nvPr/>
+        </p:nvSpPr>
+        <p:spPr>
+          <a:xfrm>
+            <a:off x="8572500" y="2222500"/>
+            <a:ext cx="1460500" cy="152400"/>
+          </a:xfrm>
+          <a:prstGeom prst="rect">
+            <a:avLst/>
+          </a:prstGeom>
+          <a:noFill/>
+        </p:spPr>
+        <p:txBody>
+          <a:bodyPr wrap="square" lIns="0" rIns="0" tIns="0" bIns="0">
+            <a:spAutoFit/>
+          </a:bodyPr>
+          <a:lstStyle/>
+          <a:p>
+            <a:pPr algn="r">
+              <a:lnSpc>
+                <a:spcPct val="115000"/>
+              </a:lnSpc>
+            </a:pPr>
+            <a:r>
+              <a:rPr sz="950" b="0">
+                <a:solidFill>
+                  <a:srgbClr val="002333"/>
+                </a:solidFill>
+                <a:latin typeface="Inter"/>
+              </a:rPr>
+              <a:t>€300.000</a:t>
+            </a:r>
+          </a:p>
+        </p:txBody>
+      </p:sp>
+      <p:sp>
+        <p:nvSpPr>
+          <p:cNvPr id="31" name="TextBox 30"/>
+          <p:cNvSpPr txBox="1"/>
+          <p:nvPr/>
+        </p:nvSpPr>
+        <p:spPr>
+          <a:xfrm>
+            <a:off x="10223500" y="2222500"/>
+            <a:ext cx="1206500" cy="152400"/>
+          </a:xfrm>
+          <a:prstGeom prst="rect">
+            <a:avLst/>
+          </a:prstGeom>
+          <a:noFill/>
+        </p:spPr>
+        <p:txBody>
+          <a:bodyPr wrap="square" lIns="0" rIns="0" tIns="0" bIns="0">
+            <a:spAutoFit/>
+          </a:bodyPr>
+          <a:lstStyle/>
+          <a:p>
+            <a:pPr algn="r">
+              <a:lnSpc>
+                <a:spcPct val="115000"/>
+              </a:lnSpc>
+            </a:pPr>
+            <a:r>
+              <a:rPr sz="950" b="0">
+                <a:solidFill>
+                  <a:srgbClr val="002333"/>
+                </a:solidFill>
+                <a:latin typeface="Inter"/>
+              </a:rPr>
+              <a:t>20%</a:t>
+            </a:r>
+          </a:p>
+        </p:txBody>
+      </p:sp>
+      <p:sp>
+        <p:nvSpPr>
+          <p:cNvPr id="32" name="TextBox 31"/>
+          <p:cNvSpPr txBox="1"/>
+          <p:nvPr/>
+        </p:nvSpPr>
+        <p:spPr>
+          <a:xfrm>
+            <a:off x="762000" y="2387600"/>
+            <a:ext cx="3048000" cy="152400"/>
+          </a:xfrm>
+          <a:prstGeom prst="rect">
+            <a:avLst/>
+          </a:prstGeom>
+          <a:noFill/>
+        </p:spPr>
+        <p:txBody>
+          <a:bodyPr wrap="square" lIns="0" rIns="0" tIns="0" bIns="0">
+            <a:spAutoFit/>
+          </a:bodyPr>
+          <a:lstStyle/>
+          <a:p>
+            <a:pPr algn="l">
+              <a:lnSpc>
+                <a:spcPct val="115000"/>
+              </a:lnSpc>
+            </a:pPr>
+            <a:r>
+              <a:rPr sz="950" b="0">
+                <a:solidFill>
+                  <a:srgbClr val="002333"/>
+                </a:solidFill>
+                <a:latin typeface="Inter"/>
+              </a:rPr>
+              <a:t>UADE</a:t>
+            </a:r>
+          </a:p>
+        </p:txBody>
+      </p:sp>
+      <p:sp>
+        <p:nvSpPr>
+          <p:cNvPr id="33" name="TextBox 32"/>
+          <p:cNvSpPr txBox="1"/>
+          <p:nvPr/>
+        </p:nvSpPr>
+        <p:spPr>
+          <a:xfrm>
+            <a:off x="3937000" y="2387600"/>
+            <a:ext cx="444500" cy="152400"/>
+          </a:xfrm>
+          <a:prstGeom prst="rect">
+            <a:avLst/>
+          </a:prstGeom>
+          <a:noFill/>
+        </p:spPr>
+        <p:txBody>
+          <a:bodyPr wrap="square" lIns="0" rIns="0" tIns="0" bIns="0">
+            <a:spAutoFit/>
+          </a:bodyPr>
+          <a:lstStyle/>
+          <a:p>
+            <a:pPr algn="l">
+              <a:lnSpc>
+                <a:spcPct val="115000"/>
+              </a:lnSpc>
+            </a:pPr>
+            <a:r>
+              <a:rPr sz="950" b="0">
+                <a:solidFill>
+                  <a:srgbClr val="5B7480"/>
+                </a:solidFill>
+                <a:latin typeface="Inter"/>
+              </a:rPr>
+              <a:t>AR</a:t>
+            </a:r>
+          </a:p>
+        </p:txBody>
+      </p:sp>
+      <p:sp>
+        <p:nvSpPr>
+          <p:cNvPr id="34" name="Rounded Rectangle 33"/>
+          <p:cNvSpPr/>
+          <p:nvPr/>
+        </p:nvSpPr>
+        <p:spPr>
+          <a:xfrm>
+            <a:off x="4508500" y="2381250"/>
+            <a:ext cx="495300" cy="139700"/>
+          </a:xfrm>
+          <a:prstGeom prst="roundRect">
+            <a:avLst>
+              <a:gd name="adj" fmla="val 27272"/>
+            </a:avLst>
+          </a:prstGeom>
+          <a:solidFill>
+            <a:srgbClr val="E2FBEF"/>
+          </a:solidFill>
+          <a:ln>
+            <a:noFill/>
+          </a:ln>
+          <a:effectLst/>
+        </p:spPr>
+        <p:style>
+          <a:lnRef idx="1">
+            <a:schemeClr val="accent1"/>
+          </a:lnRef>
+          <a:fillRef idx="3">
+            <a:schemeClr val="accent1"/>
+          </a:fillRef>
+          <a:effectRef idx="2">
+            <a:schemeClr val="accent1"/>
+          </a:effectRef>
+          <a:fontRef idx="minor">
+            <a:schemeClr val="lt1"/>
+          </a:fontRef>
+        </p:style>
+        <p:txBody>
+          <a:bodyPr rtlCol="0" anchor="ctr"/>
+          <a:lstStyle/>
+          <a:p>
+            <a:pPr algn="ctr"/>
+          </a:p>
+        </p:txBody>
+      </p:sp>
+      <p:sp>
+        <p:nvSpPr>
+          <p:cNvPr id="35" name="TextBox 34"/>
+          <p:cNvSpPr txBox="1"/>
+          <p:nvPr/>
+        </p:nvSpPr>
+        <p:spPr>
+          <a:xfrm>
+            <a:off x="4508500" y="2393950"/>
+            <a:ext cx="495300" cy="114300"/>
+          </a:xfrm>
+          <a:prstGeom prst="rect">
+            <a:avLst/>
+          </a:prstGeom>
+          <a:noFill/>
+        </p:spPr>
+        <p:txBody>
+          <a:bodyPr wrap="square" lIns="0" rIns="0" tIns="0" bIns="0">
+            <a:spAutoFit/>
+          </a:bodyPr>
+          <a:lstStyle/>
+          <a:p>
+            <a:pPr algn="ctr">
+              <a:lnSpc>
+                <a:spcPct val="115000"/>
+              </a:lnSpc>
+            </a:pPr>
+            <a:r>
+              <a:rPr sz="650" b="1">
+                <a:solidFill>
+                  <a:srgbClr val="007B54"/>
+                </a:solidFill>
+                <a:latin typeface="Inter"/>
+              </a:rPr>
+              <a:t>PRIVÉ</a:t>
+            </a:r>
+          </a:p>
+        </p:txBody>
+      </p:sp>
+      <p:sp>
+        <p:nvSpPr>
+          <p:cNvPr id="36" name="Rounded Rectangle 35"/>
+          <p:cNvSpPr/>
+          <p:nvPr/>
+        </p:nvSpPr>
+        <p:spPr>
+          <a:xfrm>
+            <a:off x="5461000" y="2381250"/>
+            <a:ext cx="330200" cy="139700"/>
+          </a:xfrm>
+          <a:prstGeom prst="roundRect">
+            <a:avLst>
+              <a:gd name="adj" fmla="val 27272"/>
+            </a:avLst>
+          </a:prstGeom>
+          <a:solidFill>
+            <a:srgbClr val="FDF0DF"/>
+          </a:solidFill>
+          <a:ln>
+            <a:noFill/>
+          </a:ln>
+          <a:effectLst/>
+        </p:spPr>
+        <p:style>
+          <a:lnRef idx="1">
+            <a:schemeClr val="accent1"/>
+          </a:lnRef>
+          <a:fillRef idx="3">
+            <a:schemeClr val="accent1"/>
+          </a:fillRef>
+          <a:effectRef idx="2">
+            <a:schemeClr val="accent1"/>
+          </a:effectRef>
+          <a:fontRef idx="minor">
+            <a:schemeClr val="lt1"/>
+          </a:fontRef>
+        </p:style>
+        <p:txBody>
+          <a:bodyPr rtlCol="0" anchor="ctr"/>
+          <a:lstStyle/>
+          <a:p>
+            <a:pPr algn="ctr"/>
+          </a:p>
+        </p:txBody>
+      </p:sp>
+      <p:sp>
+        <p:nvSpPr>
+          <p:cNvPr id="37" name="TextBox 36"/>
+          <p:cNvSpPr txBox="1"/>
+          <p:nvPr/>
+        </p:nvSpPr>
+        <p:spPr>
+          <a:xfrm>
+            <a:off x="5461000" y="2393950"/>
+            <a:ext cx="330200" cy="114300"/>
+          </a:xfrm>
+          <a:prstGeom prst="rect">
+            <a:avLst/>
+          </a:prstGeom>
+          <a:noFill/>
+        </p:spPr>
+        <p:txBody>
+          <a:bodyPr wrap="square" lIns="0" rIns="0" tIns="0" bIns="0">
+            <a:spAutoFit/>
+          </a:bodyPr>
+          <a:lstStyle/>
+          <a:p>
+            <a:pPr algn="ctr">
+              <a:lnSpc>
+                <a:spcPct val="115000"/>
+              </a:lnSpc>
+            </a:pPr>
+            <a:r>
+              <a:rPr sz="650" b="1">
+                <a:solidFill>
+                  <a:srgbClr val="E07B00"/>
+                </a:solidFill>
+                <a:latin typeface="Inter"/>
+              </a:rPr>
+              <a:t>Q3</a:t>
+            </a:r>
+          </a:p>
+        </p:txBody>
+      </p:sp>
+      <p:sp>
+        <p:nvSpPr>
+          <p:cNvPr id="38" name="TextBox 37"/>
+          <p:cNvSpPr txBox="1"/>
+          <p:nvPr/>
+        </p:nvSpPr>
+        <p:spPr>
+          <a:xfrm>
+            <a:off x="8572500" y="2387600"/>
+            <a:ext cx="1460500" cy="152400"/>
+          </a:xfrm>
+          <a:prstGeom prst="rect">
+            <a:avLst/>
+          </a:prstGeom>
+          <a:noFill/>
+        </p:spPr>
+        <p:txBody>
+          <a:bodyPr wrap="square" lIns="0" rIns="0" tIns="0" bIns="0">
+            <a:spAutoFit/>
+          </a:bodyPr>
+          <a:lstStyle/>
+          <a:p>
+            <a:pPr algn="r">
+              <a:lnSpc>
+                <a:spcPct val="115000"/>
+              </a:lnSpc>
+            </a:pPr>
+            <a:r>
+              <a:rPr sz="950" b="0">
+                <a:solidFill>
+                  <a:srgbClr val="002333"/>
+                </a:solidFill>
+                <a:latin typeface="Inter"/>
+              </a:rPr>
+              <a:t>€250.000</a:t>
+            </a:r>
+          </a:p>
+        </p:txBody>
+      </p:sp>
+      <p:sp>
+        <p:nvSpPr>
+          <p:cNvPr id="39" name="TextBox 38"/>
+          <p:cNvSpPr txBox="1"/>
+          <p:nvPr/>
+        </p:nvSpPr>
+        <p:spPr>
+          <a:xfrm>
+            <a:off x="10223500" y="2387600"/>
+            <a:ext cx="1206500" cy="152400"/>
+          </a:xfrm>
+          <a:prstGeom prst="rect">
+            <a:avLst/>
+          </a:prstGeom>
+          <a:noFill/>
+        </p:spPr>
+        <p:txBody>
+          <a:bodyPr wrap="square" lIns="0" rIns="0" tIns="0" bIns="0">
+            <a:spAutoFit/>
+          </a:bodyPr>
+          <a:lstStyle/>
+          <a:p>
+            <a:pPr algn="r">
+              <a:lnSpc>
+                <a:spcPct val="115000"/>
+              </a:lnSpc>
+            </a:pPr>
+            <a:r>
+              <a:rPr sz="950" b="0">
+                <a:solidFill>
+                  <a:srgbClr val="002333"/>
+                </a:solidFill>
+                <a:latin typeface="Inter"/>
+              </a:rPr>
+              <a:t>20%</a:t>
+            </a:r>
+          </a:p>
+        </p:txBody>
+      </p:sp>
+      <p:sp>
+        <p:nvSpPr>
+          <p:cNvPr id="40" name="TextBox 39"/>
+          <p:cNvSpPr txBox="1"/>
+          <p:nvPr/>
+        </p:nvSpPr>
+        <p:spPr>
+          <a:xfrm>
+            <a:off x="762000" y="2552700"/>
+            <a:ext cx="3048000" cy="152400"/>
+          </a:xfrm>
+          <a:prstGeom prst="rect">
+            <a:avLst/>
+          </a:prstGeom>
+          <a:noFill/>
+        </p:spPr>
+        <p:txBody>
+          <a:bodyPr wrap="square" lIns="0" rIns="0" tIns="0" bIns="0">
+            <a:spAutoFit/>
+          </a:bodyPr>
+          <a:lstStyle/>
+          <a:p>
+            <a:pPr algn="l">
+              <a:lnSpc>
+                <a:spcPct val="115000"/>
+              </a:lnSpc>
+            </a:pPr>
+            <a:r>
+              <a:rPr sz="950" b="0">
+                <a:solidFill>
+                  <a:srgbClr val="002333"/>
+                </a:solidFill>
+                <a:latin typeface="Inter"/>
+              </a:rPr>
+              <a:t>Windesheim</a:t>
+            </a:r>
+          </a:p>
+        </p:txBody>
+      </p:sp>
+      <p:sp>
+        <p:nvSpPr>
+          <p:cNvPr id="41" name="TextBox 40"/>
+          <p:cNvSpPr txBox="1"/>
+          <p:nvPr/>
+        </p:nvSpPr>
+        <p:spPr>
+          <a:xfrm>
+            <a:off x="3937000" y="2552700"/>
+            <a:ext cx="444500" cy="152400"/>
+          </a:xfrm>
+          <a:prstGeom prst="rect">
+            <a:avLst/>
+          </a:prstGeom>
+          <a:noFill/>
+        </p:spPr>
+        <p:txBody>
+          <a:bodyPr wrap="square" lIns="0" rIns="0" tIns="0" bIns="0">
+            <a:spAutoFit/>
+          </a:bodyPr>
+          <a:lstStyle/>
+          <a:p>
+            <a:pPr algn="l">
+              <a:lnSpc>
+                <a:spcPct val="115000"/>
+              </a:lnSpc>
+            </a:pPr>
+            <a:r>
+              <a:rPr sz="950" b="0">
+                <a:solidFill>
+                  <a:srgbClr val="5B7480"/>
+                </a:solidFill>
+                <a:latin typeface="Inter"/>
+              </a:rPr>
+              <a:t>NL</a:t>
+            </a:r>
+          </a:p>
+        </p:txBody>
+      </p:sp>
+      <p:sp>
+        <p:nvSpPr>
+          <p:cNvPr id="42" name="Rounded Rectangle 41"/>
+          <p:cNvSpPr/>
+          <p:nvPr/>
+        </p:nvSpPr>
+        <p:spPr>
+          <a:xfrm>
+            <a:off x="5461000" y="2546350"/>
+            <a:ext cx="330200" cy="139700"/>
+          </a:xfrm>
+          <a:prstGeom prst="roundRect">
+            <a:avLst>
+              <a:gd name="adj" fmla="val 27272"/>
+            </a:avLst>
+          </a:prstGeom>
+          <a:solidFill>
+            <a:srgbClr val="FDF0DF"/>
+          </a:solidFill>
+          <a:ln>
+            <a:noFill/>
+          </a:ln>
+          <a:effectLst/>
+        </p:spPr>
+        <p:style>
+          <a:lnRef idx="1">
+            <a:schemeClr val="accent1"/>
+          </a:lnRef>
+          <a:fillRef idx="3">
+            <a:schemeClr val="accent1"/>
+          </a:fillRef>
+          <a:effectRef idx="2">
+            <a:schemeClr val="accent1"/>
+          </a:effectRef>
+          <a:fontRef idx="minor">
+            <a:schemeClr val="lt1"/>
+          </a:fontRef>
+        </p:style>
+        <p:txBody>
+          <a:bodyPr rtlCol="0" anchor="ctr"/>
+          <a:lstStyle/>
+          <a:p>
+            <a:pPr algn="ctr"/>
+          </a:p>
+        </p:txBody>
+      </p:sp>
+      <p:sp>
+        <p:nvSpPr>
+          <p:cNvPr id="43" name="TextBox 42"/>
+          <p:cNvSpPr txBox="1"/>
+          <p:nvPr/>
+        </p:nvSpPr>
+        <p:spPr>
+          <a:xfrm>
+            <a:off x="5461000" y="2559050"/>
+            <a:ext cx="330200" cy="114300"/>
+          </a:xfrm>
+          <a:prstGeom prst="rect">
+            <a:avLst/>
+          </a:prstGeom>
+          <a:noFill/>
+        </p:spPr>
+        <p:txBody>
+          <a:bodyPr wrap="square" lIns="0" rIns="0" tIns="0" bIns="0">
+            <a:spAutoFit/>
+          </a:bodyPr>
+          <a:lstStyle/>
+          <a:p>
+            <a:pPr algn="ctr">
+              <a:lnSpc>
+                <a:spcPct val="115000"/>
+              </a:lnSpc>
+            </a:pPr>
+            <a:r>
+              <a:rPr sz="650" b="1">
+                <a:solidFill>
+                  <a:srgbClr val="E07B00"/>
+                </a:solidFill>
+                <a:latin typeface="Inter"/>
+              </a:rPr>
+              <a:t>Q3</a:t>
+            </a:r>
+          </a:p>
+        </p:txBody>
+      </p:sp>
+      <p:sp>
+        <p:nvSpPr>
+          <p:cNvPr id="44" name="TextBox 43"/>
+          <p:cNvSpPr txBox="1"/>
+          <p:nvPr/>
+        </p:nvSpPr>
+        <p:spPr>
+          <a:xfrm>
+            <a:off x="8572500" y="2552700"/>
+            <a:ext cx="1460500" cy="152400"/>
+          </a:xfrm>
+          <a:prstGeom prst="rect">
+            <a:avLst/>
+          </a:prstGeom>
+          <a:noFill/>
+        </p:spPr>
+        <p:txBody>
+          <a:bodyPr wrap="square" lIns="0" rIns="0" tIns="0" bIns="0">
+            <a:spAutoFit/>
+          </a:bodyPr>
+          <a:lstStyle/>
+          <a:p>
+            <a:pPr algn="r">
+              <a:lnSpc>
+                <a:spcPct val="115000"/>
+              </a:lnSpc>
+            </a:pPr>
+            <a:r>
+              <a:rPr sz="950" b="0">
+                <a:solidFill>
+                  <a:srgbClr val="002333"/>
+                </a:solidFill>
+                <a:latin typeface="Inter"/>
+              </a:rPr>
+              <a:t>€200.000</a:t>
+            </a:r>
+          </a:p>
+        </p:txBody>
+      </p:sp>
+      <p:sp>
+        <p:nvSpPr>
+          <p:cNvPr id="45" name="TextBox 44"/>
+          <p:cNvSpPr txBox="1"/>
+          <p:nvPr/>
+        </p:nvSpPr>
+        <p:spPr>
+          <a:xfrm>
+            <a:off x="10223500" y="2552700"/>
+            <a:ext cx="1206500" cy="152400"/>
+          </a:xfrm>
+          <a:prstGeom prst="rect">
+            <a:avLst/>
+          </a:prstGeom>
+          <a:noFill/>
+        </p:spPr>
+        <p:txBody>
+          <a:bodyPr wrap="square" lIns="0" rIns="0" tIns="0" bIns="0">
+            <a:spAutoFit/>
+          </a:bodyPr>
+          <a:lstStyle/>
+          <a:p>
+            <a:pPr algn="r">
+              <a:lnSpc>
+                <a:spcPct val="115000"/>
+              </a:lnSpc>
+            </a:pPr>
+            <a:r>
+              <a:rPr sz="950" b="0">
+                <a:solidFill>
+                  <a:srgbClr val="002333"/>
+                </a:solidFill>
+                <a:latin typeface="Inter"/>
+              </a:rPr>
+              <a:t>10%</a:t>
+            </a:r>
+          </a:p>
+        </p:txBody>
+      </p:sp>
+      <p:sp>
+        <p:nvSpPr>
+          <p:cNvPr id="46" name="TextBox 45"/>
+          <p:cNvSpPr txBox="1"/>
+          <p:nvPr/>
+        </p:nvSpPr>
+        <p:spPr>
+          <a:xfrm>
+            <a:off x="762000" y="2717800"/>
+            <a:ext cx="3048000" cy="152400"/>
+          </a:xfrm>
+          <a:prstGeom prst="rect">
+            <a:avLst/>
+          </a:prstGeom>
+          <a:noFill/>
+        </p:spPr>
+        <p:txBody>
+          <a:bodyPr wrap="square" lIns="0" rIns="0" tIns="0" bIns="0">
+            <a:spAutoFit/>
+          </a:bodyPr>
+          <a:lstStyle/>
+          <a:p>
+            <a:pPr algn="l">
+              <a:lnSpc>
+                <a:spcPct val="115000"/>
+              </a:lnSpc>
+            </a:pPr>
+            <a:r>
+              <a:rPr sz="950" b="0">
+                <a:solidFill>
+                  <a:srgbClr val="002333"/>
+                </a:solidFill>
+                <a:latin typeface="Inter"/>
+              </a:rPr>
+              <a:t>Bristol University</a:t>
+            </a:r>
+          </a:p>
+        </p:txBody>
+      </p:sp>
+      <p:sp>
+        <p:nvSpPr>
+          <p:cNvPr id="47" name="TextBox 46"/>
+          <p:cNvSpPr txBox="1"/>
+          <p:nvPr/>
+        </p:nvSpPr>
+        <p:spPr>
+          <a:xfrm>
+            <a:off x="3937000" y="2717800"/>
+            <a:ext cx="444500" cy="152400"/>
+          </a:xfrm>
+          <a:prstGeom prst="rect">
+            <a:avLst/>
+          </a:prstGeom>
+          <a:noFill/>
+        </p:spPr>
+        <p:txBody>
+          <a:bodyPr wrap="square" lIns="0" rIns="0" tIns="0" bIns="0">
+            <a:spAutoFit/>
+          </a:bodyPr>
+          <a:lstStyle/>
+          <a:p>
+            <a:pPr algn="l">
+              <a:lnSpc>
+                <a:spcPct val="115000"/>
+              </a:lnSpc>
+            </a:pPr>
+            <a:r>
+              <a:rPr sz="950" b="0">
+                <a:solidFill>
+                  <a:srgbClr val="5B7480"/>
+                </a:solidFill>
+                <a:latin typeface="Inter"/>
+              </a:rPr>
+              <a:t>UK</a:t>
+            </a:r>
+          </a:p>
+        </p:txBody>
+      </p:sp>
+      <p:sp>
+        <p:nvSpPr>
+          <p:cNvPr id="48" name="Rounded Rectangle 47"/>
+          <p:cNvSpPr/>
+          <p:nvPr/>
+        </p:nvSpPr>
+        <p:spPr>
+          <a:xfrm>
+            <a:off x="5461000" y="2711450"/>
+            <a:ext cx="330200" cy="139700"/>
+          </a:xfrm>
+          <a:prstGeom prst="roundRect">
+            <a:avLst>
+              <a:gd name="adj" fmla="val 27272"/>
+            </a:avLst>
+          </a:prstGeom>
+          <a:solidFill>
+            <a:srgbClr val="FDF0DF"/>
+          </a:solidFill>
+          <a:ln>
+            <a:noFill/>
+          </a:ln>
+          <a:effectLst/>
+        </p:spPr>
+        <p:style>
+          <a:lnRef idx="1">
+            <a:schemeClr val="accent1"/>
+          </a:lnRef>
+          <a:fillRef idx="3">
+            <a:schemeClr val="accent1"/>
+          </a:fillRef>
+          <a:effectRef idx="2">
+            <a:schemeClr val="accent1"/>
+          </a:effectRef>
+          <a:fontRef idx="minor">
+            <a:schemeClr val="lt1"/>
+          </a:fontRef>
+        </p:style>
+        <p:txBody>
+          <a:bodyPr rtlCol="0" anchor="ctr"/>
+          <a:lstStyle/>
+          <a:p>
+            <a:pPr algn="ctr"/>
+          </a:p>
+        </p:txBody>
+      </p:sp>
+      <p:sp>
+        <p:nvSpPr>
+          <p:cNvPr id="49" name="TextBox 48"/>
+          <p:cNvSpPr txBox="1"/>
+          <p:nvPr/>
+        </p:nvSpPr>
+        <p:spPr>
+          <a:xfrm>
+            <a:off x="5461000" y="2724150"/>
+            <a:ext cx="330200" cy="114300"/>
+          </a:xfrm>
+          <a:prstGeom prst="rect">
+            <a:avLst/>
+          </a:prstGeom>
+          <a:noFill/>
+        </p:spPr>
+        <p:txBody>
+          <a:bodyPr wrap="square" lIns="0" rIns="0" tIns="0" bIns="0">
+            <a:spAutoFit/>
+          </a:bodyPr>
+          <a:lstStyle/>
+          <a:p>
+            <a:pPr algn="ctr">
+              <a:lnSpc>
+                <a:spcPct val="115000"/>
+              </a:lnSpc>
+            </a:pPr>
+            <a:r>
+              <a:rPr sz="650" b="1">
+                <a:solidFill>
+                  <a:srgbClr val="E07B00"/>
+                </a:solidFill>
+                <a:latin typeface="Inter"/>
+              </a:rPr>
+              <a:t>Q3</a:t>
+            </a:r>
+          </a:p>
+        </p:txBody>
+      </p:sp>
+      <p:sp>
+        <p:nvSpPr>
+          <p:cNvPr id="50" name="TextBox 49"/>
+          <p:cNvSpPr txBox="1"/>
+          <p:nvPr/>
+        </p:nvSpPr>
+        <p:spPr>
+          <a:xfrm>
+            <a:off x="8572500" y="2717800"/>
+            <a:ext cx="1460500" cy="152400"/>
+          </a:xfrm>
+          <a:prstGeom prst="rect">
+            <a:avLst/>
+          </a:prstGeom>
+          <a:noFill/>
+        </p:spPr>
+        <p:txBody>
+          <a:bodyPr wrap="square" lIns="0" rIns="0" tIns="0" bIns="0">
+            <a:spAutoFit/>
+          </a:bodyPr>
+          <a:lstStyle/>
+          <a:p>
+            <a:pPr algn="r">
+              <a:lnSpc>
+                <a:spcPct val="115000"/>
+              </a:lnSpc>
+            </a:pPr>
+            <a:r>
+              <a:rPr sz="950" b="0">
+                <a:solidFill>
+                  <a:srgbClr val="002333"/>
+                </a:solidFill>
+                <a:latin typeface="Inter"/>
+              </a:rPr>
+              <a:t>€200.000</a:t>
+            </a:r>
+          </a:p>
+        </p:txBody>
+      </p:sp>
+      <p:sp>
+        <p:nvSpPr>
+          <p:cNvPr id="51" name="TextBox 50"/>
+          <p:cNvSpPr txBox="1"/>
+          <p:nvPr/>
+        </p:nvSpPr>
+        <p:spPr>
+          <a:xfrm>
+            <a:off x="10223500" y="2717800"/>
+            <a:ext cx="1206500" cy="152400"/>
+          </a:xfrm>
+          <a:prstGeom prst="rect">
+            <a:avLst/>
+          </a:prstGeom>
+          <a:noFill/>
+        </p:spPr>
+        <p:txBody>
+          <a:bodyPr wrap="square" lIns="0" rIns="0" tIns="0" bIns="0">
+            <a:spAutoFit/>
+          </a:bodyPr>
+          <a:lstStyle/>
+          <a:p>
+            <a:pPr algn="r">
+              <a:lnSpc>
+                <a:spcPct val="115000"/>
+              </a:lnSpc>
+            </a:pPr>
+            <a:r>
+              <a:rPr sz="950" b="0">
+                <a:solidFill>
+                  <a:srgbClr val="002333"/>
+                </a:solidFill>
+                <a:latin typeface="Inter"/>
+              </a:rPr>
+              <a:t>10%</a:t>
+            </a:r>
+          </a:p>
+        </p:txBody>
+      </p:sp>
+      <p:sp>
+        <p:nvSpPr>
+          <p:cNvPr id="52" name="TextBox 51"/>
+          <p:cNvSpPr txBox="1"/>
+          <p:nvPr/>
+        </p:nvSpPr>
+        <p:spPr>
+          <a:xfrm>
+            <a:off x="762000" y="2882900"/>
+            <a:ext cx="3048000" cy="152400"/>
+          </a:xfrm>
+          <a:prstGeom prst="rect">
+            <a:avLst/>
+          </a:prstGeom>
+          <a:noFill/>
+        </p:spPr>
+        <p:txBody>
+          <a:bodyPr wrap="square" lIns="0" rIns="0" tIns="0" bIns="0">
+            <a:spAutoFit/>
+          </a:bodyPr>
+          <a:lstStyle/>
+          <a:p>
+            <a:pPr algn="l">
+              <a:lnSpc>
+                <a:spcPct val="115000"/>
+              </a:lnSpc>
+            </a:pPr>
+            <a:r>
+              <a:rPr sz="950" b="0">
+                <a:solidFill>
+                  <a:srgbClr val="002333"/>
+                </a:solidFill>
+                <a:latin typeface="Inter"/>
+              </a:rPr>
+              <a:t>Concorde Career College</a:t>
+            </a:r>
+          </a:p>
+        </p:txBody>
+      </p:sp>
+      <p:sp>
+        <p:nvSpPr>
+          <p:cNvPr id="53" name="TextBox 52"/>
+          <p:cNvSpPr txBox="1"/>
+          <p:nvPr/>
+        </p:nvSpPr>
+        <p:spPr>
+          <a:xfrm>
+            <a:off x="3937000" y="2882900"/>
+            <a:ext cx="444500" cy="152400"/>
+          </a:xfrm>
+          <a:prstGeom prst="rect">
+            <a:avLst/>
+          </a:prstGeom>
+          <a:noFill/>
+        </p:spPr>
+        <p:txBody>
+          <a:bodyPr wrap="square" lIns="0" rIns="0" tIns="0" bIns="0">
+            <a:spAutoFit/>
+          </a:bodyPr>
+          <a:lstStyle/>
+          <a:p>
+            <a:pPr algn="l">
+              <a:lnSpc>
+                <a:spcPct val="115000"/>
+              </a:lnSpc>
+            </a:pPr>
+            <a:r>
+              <a:rPr sz="950" b="0">
+                <a:solidFill>
+                  <a:srgbClr val="5B7480"/>
+                </a:solidFill>
+                <a:latin typeface="Inter"/>
+              </a:rPr>
+              <a:t>US</a:t>
+            </a:r>
+          </a:p>
+        </p:txBody>
+      </p:sp>
+      <p:sp>
+        <p:nvSpPr>
+          <p:cNvPr id="54" name="Rounded Rectangle 53"/>
+          <p:cNvSpPr/>
+          <p:nvPr/>
+        </p:nvSpPr>
+        <p:spPr>
+          <a:xfrm>
+            <a:off x="4508500" y="2876550"/>
+            <a:ext cx="495300" cy="139700"/>
+          </a:xfrm>
+          <a:prstGeom prst="roundRect">
+            <a:avLst>
+              <a:gd name="adj" fmla="val 27272"/>
+            </a:avLst>
+          </a:prstGeom>
+          <a:solidFill>
+            <a:srgbClr val="E2FBEF"/>
+          </a:solidFill>
+          <a:ln>
+            <a:noFill/>
+          </a:ln>
+          <a:effectLst/>
+        </p:spPr>
+        <p:style>
+          <a:lnRef idx="1">
+            <a:schemeClr val="accent1"/>
+          </a:lnRef>
+          <a:fillRef idx="3">
+            <a:schemeClr val="accent1"/>
+          </a:fillRef>
+          <a:effectRef idx="2">
+            <a:schemeClr val="accent1"/>
+          </a:effectRef>
+          <a:fontRef idx="minor">
+            <a:schemeClr val="lt1"/>
+          </a:fontRef>
+        </p:style>
+        <p:txBody>
+          <a:bodyPr rtlCol="0" anchor="ctr"/>
+          <a:lstStyle/>
+          <a:p>
+            <a:pPr algn="ctr"/>
+          </a:p>
+        </p:txBody>
+      </p:sp>
+      <p:sp>
+        <p:nvSpPr>
+          <p:cNvPr id="55" name="TextBox 54"/>
+          <p:cNvSpPr txBox="1"/>
+          <p:nvPr/>
+        </p:nvSpPr>
+        <p:spPr>
+          <a:xfrm>
+            <a:off x="4508500" y="2889250"/>
+            <a:ext cx="495300" cy="114300"/>
+          </a:xfrm>
+          <a:prstGeom prst="rect">
+            <a:avLst/>
+          </a:prstGeom>
+          <a:noFill/>
+        </p:spPr>
+        <p:txBody>
+          <a:bodyPr wrap="square" lIns="0" rIns="0" tIns="0" bIns="0">
+            <a:spAutoFit/>
+          </a:bodyPr>
+          <a:lstStyle/>
+          <a:p>
+            <a:pPr algn="ctr">
+              <a:lnSpc>
+                <a:spcPct val="115000"/>
+              </a:lnSpc>
+            </a:pPr>
+            <a:r>
+              <a:rPr sz="650" b="1">
+                <a:solidFill>
+                  <a:srgbClr val="007B54"/>
+                </a:solidFill>
+                <a:latin typeface="Inter"/>
+              </a:rPr>
+              <a:t>PRIVÉ</a:t>
+            </a:r>
+          </a:p>
+        </p:txBody>
+      </p:sp>
+      <p:sp>
+        <p:nvSpPr>
+          <p:cNvPr id="56" name="TextBox 55"/>
+          <p:cNvSpPr txBox="1"/>
+          <p:nvPr/>
+        </p:nvSpPr>
+        <p:spPr>
+          <a:xfrm>
+            <a:off x="5461000" y="2882900"/>
+            <a:ext cx="571500" cy="152400"/>
+          </a:xfrm>
+          <a:prstGeom prst="rect">
+            <a:avLst/>
+          </a:prstGeom>
+          <a:noFill/>
+        </p:spPr>
+        <p:txBody>
+          <a:bodyPr wrap="square" lIns="0" rIns="0" tIns="0" bIns="0">
+            <a:spAutoFit/>
+          </a:bodyPr>
+          <a:lstStyle/>
+          <a:p>
+            <a:pPr algn="l">
+              <a:lnSpc>
+                <a:spcPct val="115000"/>
+              </a:lnSpc>
+            </a:pPr>
+            <a:r>
+              <a:rPr sz="800" b="0">
+                <a:solidFill>
+                  <a:srgbClr val="5B7480"/>
+                </a:solidFill>
+                <a:latin typeface="Inter"/>
+              </a:rPr>
+              <a:t>n.b.</a:t>
+            </a:r>
+          </a:p>
+        </p:txBody>
+      </p:sp>
+      <p:sp>
+        <p:nvSpPr>
+          <p:cNvPr id="57" name="TextBox 56"/>
+          <p:cNvSpPr txBox="1"/>
+          <p:nvPr/>
+        </p:nvSpPr>
+        <p:spPr>
+          <a:xfrm>
+            <a:off x="8572500" y="2882900"/>
+            <a:ext cx="1460500" cy="152400"/>
+          </a:xfrm>
+          <a:prstGeom prst="rect">
+            <a:avLst/>
+          </a:prstGeom>
+          <a:noFill/>
+        </p:spPr>
+        <p:txBody>
+          <a:bodyPr wrap="square" lIns="0" rIns="0" tIns="0" bIns="0">
+            <a:spAutoFit/>
+          </a:bodyPr>
+          <a:lstStyle/>
+          <a:p>
+            <a:pPr algn="r">
+              <a:lnSpc>
+                <a:spcPct val="115000"/>
+              </a:lnSpc>
+            </a:pPr>
+            <a:r>
+              <a:rPr sz="950" b="0">
+                <a:solidFill>
+                  <a:srgbClr val="002333"/>
+                </a:solidFill>
+                <a:latin typeface="Inter"/>
+              </a:rPr>
+              <a:t>€200.000</a:t>
+            </a:r>
+          </a:p>
+        </p:txBody>
+      </p:sp>
+      <p:sp>
+        <p:nvSpPr>
+          <p:cNvPr id="58" name="TextBox 57"/>
+          <p:cNvSpPr txBox="1"/>
+          <p:nvPr/>
+        </p:nvSpPr>
+        <p:spPr>
+          <a:xfrm>
+            <a:off x="10223500" y="2882900"/>
+            <a:ext cx="1206500" cy="152400"/>
+          </a:xfrm>
+          <a:prstGeom prst="rect">
+            <a:avLst/>
+          </a:prstGeom>
+          <a:noFill/>
+        </p:spPr>
+        <p:txBody>
+          <a:bodyPr wrap="square" lIns="0" rIns="0" tIns="0" bIns="0">
+            <a:spAutoFit/>
+          </a:bodyPr>
+          <a:lstStyle/>
+          <a:p>
+            <a:pPr algn="r">
+              <a:lnSpc>
+                <a:spcPct val="115000"/>
+              </a:lnSpc>
+            </a:pPr>
+            <a:r>
+              <a:rPr sz="950" b="0">
+                <a:solidFill>
+                  <a:srgbClr val="002333"/>
+                </a:solidFill>
+                <a:latin typeface="Inter"/>
+              </a:rPr>
+              <a:t>15%</a:t>
+            </a:r>
+          </a:p>
+        </p:txBody>
+      </p:sp>
+      <p:sp>
+        <p:nvSpPr>
+          <p:cNvPr id="59" name="TextBox 58"/>
+          <p:cNvSpPr txBox="1"/>
+          <p:nvPr/>
+        </p:nvSpPr>
+        <p:spPr>
+          <a:xfrm>
+            <a:off x="762000" y="3048000"/>
+            <a:ext cx="3048000" cy="152400"/>
+          </a:xfrm>
+          <a:prstGeom prst="rect">
+            <a:avLst/>
+          </a:prstGeom>
+          <a:noFill/>
+        </p:spPr>
+        <p:txBody>
+          <a:bodyPr wrap="square" lIns="0" rIns="0" tIns="0" bIns="0">
+            <a:spAutoFit/>
+          </a:bodyPr>
+          <a:lstStyle/>
+          <a:p>
+            <a:pPr algn="l">
+              <a:lnSpc>
+                <a:spcPct val="115000"/>
+              </a:lnSpc>
+            </a:pPr>
+            <a:r>
+              <a:rPr sz="950" b="0">
+                <a:solidFill>
+                  <a:srgbClr val="002333"/>
+                </a:solidFill>
+                <a:latin typeface="Inter"/>
+              </a:rPr>
+              <a:t>Goldsmiths</a:t>
+            </a:r>
+          </a:p>
+        </p:txBody>
+      </p:sp>
+      <p:sp>
+        <p:nvSpPr>
+          <p:cNvPr id="60" name="TextBox 59"/>
+          <p:cNvSpPr txBox="1"/>
+          <p:nvPr/>
+        </p:nvSpPr>
+        <p:spPr>
+          <a:xfrm>
+            <a:off x="3937000" y="3048000"/>
+            <a:ext cx="444500" cy="152400"/>
+          </a:xfrm>
+          <a:prstGeom prst="rect">
+            <a:avLst/>
+          </a:prstGeom>
+          <a:noFill/>
+        </p:spPr>
+        <p:txBody>
+          <a:bodyPr wrap="square" lIns="0" rIns="0" tIns="0" bIns="0">
+            <a:spAutoFit/>
+          </a:bodyPr>
+          <a:lstStyle/>
+          <a:p>
+            <a:pPr algn="l">
+              <a:lnSpc>
+                <a:spcPct val="115000"/>
+              </a:lnSpc>
+            </a:pPr>
+            <a:r>
+              <a:rPr sz="950" b="0">
+                <a:solidFill>
+                  <a:srgbClr val="5B7480"/>
+                </a:solidFill>
+                <a:latin typeface="Inter"/>
+              </a:rPr>
+              <a:t>UK</a:t>
+            </a:r>
+          </a:p>
+        </p:txBody>
+      </p:sp>
+      <p:sp>
+        <p:nvSpPr>
+          <p:cNvPr id="61" name="Rounded Rectangle 60"/>
+          <p:cNvSpPr/>
+          <p:nvPr/>
+        </p:nvSpPr>
+        <p:spPr>
+          <a:xfrm>
+            <a:off x="5461000" y="3041650"/>
+            <a:ext cx="330200" cy="139700"/>
+          </a:xfrm>
+          <a:prstGeom prst="roundRect">
+            <a:avLst>
+              <a:gd name="adj" fmla="val 27272"/>
+            </a:avLst>
+          </a:prstGeom>
+          <a:solidFill>
+            <a:srgbClr val="FDF0DF"/>
+          </a:solidFill>
+          <a:ln>
+            <a:noFill/>
+          </a:ln>
+          <a:effectLst/>
+        </p:spPr>
+        <p:style>
+          <a:lnRef idx="1">
+            <a:schemeClr val="accent1"/>
+          </a:lnRef>
+          <a:fillRef idx="3">
+            <a:schemeClr val="accent1"/>
+          </a:fillRef>
+          <a:effectRef idx="2">
+            <a:schemeClr val="accent1"/>
+          </a:effectRef>
+          <a:fontRef idx="minor">
+            <a:schemeClr val="lt1"/>
+          </a:fontRef>
+        </p:style>
+        <p:txBody>
+          <a:bodyPr rtlCol="0" anchor="ctr"/>
+          <a:lstStyle/>
+          <a:p>
+            <a:pPr algn="ctr"/>
+          </a:p>
+        </p:txBody>
+      </p:sp>
+      <p:sp>
+        <p:nvSpPr>
+          <p:cNvPr id="62" name="TextBox 61"/>
+          <p:cNvSpPr txBox="1"/>
+          <p:nvPr/>
+        </p:nvSpPr>
+        <p:spPr>
+          <a:xfrm>
+            <a:off x="5461000" y="3054350"/>
+            <a:ext cx="330200" cy="114300"/>
+          </a:xfrm>
+          <a:prstGeom prst="rect">
+            <a:avLst/>
+          </a:prstGeom>
+          <a:noFill/>
+        </p:spPr>
+        <p:txBody>
+          <a:bodyPr wrap="square" lIns="0" rIns="0" tIns="0" bIns="0">
+            <a:spAutoFit/>
+          </a:bodyPr>
+          <a:lstStyle/>
+          <a:p>
+            <a:pPr algn="ctr">
+              <a:lnSpc>
+                <a:spcPct val="115000"/>
+              </a:lnSpc>
+            </a:pPr>
+            <a:r>
+              <a:rPr sz="650" b="1">
+                <a:solidFill>
+                  <a:srgbClr val="E07B00"/>
+                </a:solidFill>
+                <a:latin typeface="Inter"/>
+              </a:rPr>
+              <a:t>Q3</a:t>
+            </a:r>
+          </a:p>
+        </p:txBody>
+      </p:sp>
+      <p:sp>
+        <p:nvSpPr>
+          <p:cNvPr id="63" name="TextBox 62"/>
+          <p:cNvSpPr txBox="1"/>
+          <p:nvPr/>
+        </p:nvSpPr>
+        <p:spPr>
+          <a:xfrm>
+            <a:off x="8572500" y="3048000"/>
+            <a:ext cx="1460500" cy="152400"/>
+          </a:xfrm>
+          <a:prstGeom prst="rect">
+            <a:avLst/>
+          </a:prstGeom>
+          <a:noFill/>
+        </p:spPr>
+        <p:txBody>
+          <a:bodyPr wrap="square" lIns="0" rIns="0" tIns="0" bIns="0">
+            <a:spAutoFit/>
+          </a:bodyPr>
+          <a:lstStyle/>
+          <a:p>
+            <a:pPr algn="r">
+              <a:lnSpc>
+                <a:spcPct val="115000"/>
+              </a:lnSpc>
+            </a:pPr>
+            <a:r>
+              <a:rPr sz="950" b="0">
+                <a:solidFill>
+                  <a:srgbClr val="002333"/>
+                </a:solidFill>
+                <a:latin typeface="Inter"/>
+              </a:rPr>
+              <a:t>€60.000</a:t>
+            </a:r>
+          </a:p>
+        </p:txBody>
+      </p:sp>
+      <p:sp>
+        <p:nvSpPr>
+          <p:cNvPr id="64" name="TextBox 63"/>
+          <p:cNvSpPr txBox="1"/>
+          <p:nvPr/>
+        </p:nvSpPr>
+        <p:spPr>
+          <a:xfrm>
+            <a:off x="10223500" y="3048000"/>
+            <a:ext cx="1206500" cy="152400"/>
+          </a:xfrm>
+          <a:prstGeom prst="rect">
+            <a:avLst/>
+          </a:prstGeom>
+          <a:noFill/>
+        </p:spPr>
+        <p:txBody>
+          <a:bodyPr wrap="square" lIns="0" rIns="0" tIns="0" bIns="0">
+            <a:spAutoFit/>
+          </a:bodyPr>
+          <a:lstStyle/>
+          <a:p>
+            <a:pPr algn="r">
+              <a:lnSpc>
+                <a:spcPct val="115000"/>
+              </a:lnSpc>
+            </a:pPr>
+            <a:r>
+              <a:rPr sz="950" b="0">
+                <a:solidFill>
+                  <a:srgbClr val="002333"/>
+                </a:solidFill>
+                <a:latin typeface="Inter"/>
+              </a:rPr>
+              <a:t>30%</a:t>
+            </a:r>
+          </a:p>
+        </p:txBody>
+      </p:sp>
+      <p:sp>
+        <p:nvSpPr>
+          <p:cNvPr id="65" name="TextBox 64"/>
+          <p:cNvSpPr txBox="1"/>
+          <p:nvPr/>
+        </p:nvSpPr>
+        <p:spPr>
+          <a:xfrm>
+            <a:off x="762000" y="3213100"/>
+            <a:ext cx="3048000" cy="152400"/>
+          </a:xfrm>
+          <a:prstGeom prst="rect">
+            <a:avLst/>
+          </a:prstGeom>
+          <a:noFill/>
+        </p:spPr>
+        <p:txBody>
+          <a:bodyPr wrap="square" lIns="0" rIns="0" tIns="0" bIns="0">
+            <a:spAutoFit/>
+          </a:bodyPr>
+          <a:lstStyle/>
+          <a:p>
+            <a:pPr algn="l">
+              <a:lnSpc>
+                <a:spcPct val="115000"/>
+              </a:lnSpc>
+            </a:pPr>
+            <a:r>
+              <a:rPr sz="950" b="0">
+                <a:solidFill>
+                  <a:srgbClr val="002333"/>
+                </a:solidFill>
+                <a:latin typeface="Inter"/>
+              </a:rPr>
+              <a:t>Haagse Hogeschool</a:t>
+            </a:r>
+          </a:p>
+        </p:txBody>
+      </p:sp>
+      <p:sp>
+        <p:nvSpPr>
+          <p:cNvPr id="66" name="TextBox 65"/>
+          <p:cNvSpPr txBox="1"/>
+          <p:nvPr/>
+        </p:nvSpPr>
+        <p:spPr>
+          <a:xfrm>
+            <a:off x="3937000" y="3213100"/>
+            <a:ext cx="444500" cy="152400"/>
+          </a:xfrm>
+          <a:prstGeom prst="rect">
+            <a:avLst/>
+          </a:prstGeom>
+          <a:noFill/>
+        </p:spPr>
+        <p:txBody>
+          <a:bodyPr wrap="square" lIns="0" rIns="0" tIns="0" bIns="0">
+            <a:spAutoFit/>
+          </a:bodyPr>
+          <a:lstStyle/>
+          <a:p>
+            <a:pPr algn="l">
+              <a:lnSpc>
+                <a:spcPct val="115000"/>
+              </a:lnSpc>
+            </a:pPr>
+            <a:r>
+              <a:rPr sz="950" b="0">
+                <a:solidFill>
+                  <a:srgbClr val="5B7480"/>
+                </a:solidFill>
+                <a:latin typeface="Inter"/>
+              </a:rPr>
+              <a:t>NL</a:t>
+            </a:r>
+          </a:p>
+        </p:txBody>
+      </p:sp>
+      <p:sp>
+        <p:nvSpPr>
+          <p:cNvPr id="67" name="TextBox 66"/>
+          <p:cNvSpPr txBox="1"/>
+          <p:nvPr/>
+        </p:nvSpPr>
+        <p:spPr>
+          <a:xfrm>
+            <a:off x="8572500" y="3213100"/>
+            <a:ext cx="1460500" cy="152400"/>
+          </a:xfrm>
+          <a:prstGeom prst="rect">
+            <a:avLst/>
+          </a:prstGeom>
+          <a:noFill/>
+        </p:spPr>
+        <p:txBody>
+          <a:bodyPr wrap="square" lIns="0" rIns="0" tIns="0" bIns="0">
+            <a:spAutoFit/>
+          </a:bodyPr>
+          <a:lstStyle/>
+          <a:p>
+            <a:pPr algn="r">
+              <a:lnSpc>
+                <a:spcPct val="115000"/>
+              </a:lnSpc>
+            </a:pPr>
+            <a:r>
+              <a:rPr sz="950" b="0">
+                <a:solidFill>
+                  <a:srgbClr val="002333"/>
+                </a:solidFill>
+                <a:latin typeface="Inter"/>
+              </a:rPr>
+              <a:t>€20.000</a:t>
+            </a:r>
+          </a:p>
+        </p:txBody>
+      </p:sp>
+      <p:sp>
+        <p:nvSpPr>
+          <p:cNvPr id="68" name="TextBox 67"/>
+          <p:cNvSpPr txBox="1"/>
+          <p:nvPr/>
+        </p:nvSpPr>
+        <p:spPr>
+          <a:xfrm>
+            <a:off x="10223500" y="3213100"/>
+            <a:ext cx="1206500" cy="152400"/>
+          </a:xfrm>
+          <a:prstGeom prst="rect">
+            <a:avLst/>
+          </a:prstGeom>
+          <a:noFill/>
+        </p:spPr>
+        <p:txBody>
+          <a:bodyPr wrap="square" lIns="0" rIns="0" tIns="0" bIns="0">
+            <a:spAutoFit/>
+          </a:bodyPr>
+          <a:lstStyle/>
+          <a:p>
+            <a:pPr algn="r">
+              <a:lnSpc>
+                <a:spcPct val="115000"/>
+              </a:lnSpc>
+            </a:pPr>
+            <a:r>
+              <a:rPr sz="950" b="0">
+                <a:solidFill>
+                  <a:srgbClr val="002333"/>
+                </a:solidFill>
+                <a:latin typeface="Inter"/>
+              </a:rPr>
               <a:t>50%</a:t>
             </a:r>
           </a:p>
@@ -9913,14 +12167,14 @@
       </p:sp>
       <p:sp>
         <p:nvSpPr>
-          <p:cNvPr id="13" name="TextBox 12"/>
-          <p:cNvSpPr txBox="1"/>
-          <p:nvPr/>
-        </p:nvSpPr>
-        <p:spPr>
-          <a:xfrm>
-            <a:off x="762000" y="2095500"/>
-            <a:ext cx="4826000" cy="127000"/>
+          <p:cNvPr id="69" name="TextBox 68"/>
+          <p:cNvSpPr txBox="1"/>
+          <p:nvPr/>
+        </p:nvSpPr>
+        <p:spPr>
+          <a:xfrm>
+            <a:off x="762000" y="3378200"/>
+            <a:ext cx="3048000" cy="152400"/>
           </a:xfrm>
           <a:prstGeom prst="rect">
             <a:avLst/>
@@ -9945,21 +12199,21 @@
                 </a:solidFill>
                 <a:latin typeface="Inter"/>
               </a:rPr>
-              <a:t>BPP</a:t>
-            </a:r>
-          </a:p>
-        </p:txBody>
-      </p:sp>
-      <p:sp>
-        <p:nvSpPr>
-          <p:cNvPr id="14" name="TextBox 13"/>
-          <p:cNvSpPr txBox="1"/>
-          <p:nvPr/>
-        </p:nvSpPr>
-        <p:spPr>
-          <a:xfrm>
-            <a:off x="5715000" y="2095500"/>
-            <a:ext cx="2540000" cy="127000"/>
+              <a:t>Breederode Hogeschool</a:t>
+            </a:r>
+          </a:p>
+        </p:txBody>
+      </p:sp>
+      <p:sp>
+        <p:nvSpPr>
+          <p:cNvPr id="70" name="TextBox 69"/>
+          <p:cNvSpPr txBox="1"/>
+          <p:nvPr/>
+        </p:nvSpPr>
+        <p:spPr>
+          <a:xfrm>
+            <a:off x="3937000" y="3378200"/>
+            <a:ext cx="444500" cy="152400"/>
           </a:xfrm>
           <a:prstGeom prst="rect">
             <a:avLst/>
@@ -9980,25 +12234,234 @@
             <a:r>
               <a:rPr sz="950" b="0">
                 <a:solidFill>
+                  <a:srgbClr val="5B7480"/>
+                </a:solidFill>
+                <a:latin typeface="Inter"/>
+              </a:rPr>
+              <a:t>NL</a:t>
+            </a:r>
+          </a:p>
+        </p:txBody>
+      </p:sp>
+      <p:sp>
+        <p:nvSpPr>
+          <p:cNvPr id="71" name="Rounded Rectangle 70"/>
+          <p:cNvSpPr/>
+          <p:nvPr/>
+        </p:nvSpPr>
+        <p:spPr>
+          <a:xfrm>
+            <a:off x="4508500" y="3371850"/>
+            <a:ext cx="495300" cy="139700"/>
+          </a:xfrm>
+          <a:prstGeom prst="roundRect">
+            <a:avLst>
+              <a:gd name="adj" fmla="val 27272"/>
+            </a:avLst>
+          </a:prstGeom>
+          <a:solidFill>
+            <a:srgbClr val="E2FBEF"/>
+          </a:solidFill>
+          <a:ln>
+            <a:noFill/>
+          </a:ln>
+          <a:effectLst/>
+        </p:spPr>
+        <p:style>
+          <a:lnRef idx="1">
+            <a:schemeClr val="accent1"/>
+          </a:lnRef>
+          <a:fillRef idx="3">
+            <a:schemeClr val="accent1"/>
+          </a:fillRef>
+          <a:effectRef idx="2">
+            <a:schemeClr val="accent1"/>
+          </a:effectRef>
+          <a:fontRef idx="minor">
+            <a:schemeClr val="lt1"/>
+          </a:fontRef>
+        </p:style>
+        <p:txBody>
+          <a:bodyPr rtlCol="0" anchor="ctr"/>
+          <a:lstStyle/>
+          <a:p>
+            <a:pPr algn="ctr"/>
+          </a:p>
+        </p:txBody>
+      </p:sp>
+      <p:sp>
+        <p:nvSpPr>
+          <p:cNvPr id="72" name="TextBox 71"/>
+          <p:cNvSpPr txBox="1"/>
+          <p:nvPr/>
+        </p:nvSpPr>
+        <p:spPr>
+          <a:xfrm>
+            <a:off x="4508500" y="3384550"/>
+            <a:ext cx="495300" cy="114300"/>
+          </a:xfrm>
+          <a:prstGeom prst="rect">
+            <a:avLst/>
+          </a:prstGeom>
+          <a:noFill/>
+        </p:spPr>
+        <p:txBody>
+          <a:bodyPr wrap="square" lIns="0" rIns="0" tIns="0" bIns="0">
+            <a:spAutoFit/>
+          </a:bodyPr>
+          <a:lstStyle/>
+          <a:p>
+            <a:pPr algn="ctr">
+              <a:lnSpc>
+                <a:spcPct val="115000"/>
+              </a:lnSpc>
+            </a:pPr>
+            <a:r>
+              <a:rPr sz="650" b="1">
+                <a:solidFill>
+                  <a:srgbClr val="007B54"/>
+                </a:solidFill>
+                <a:latin typeface="Inter"/>
+              </a:rPr>
+              <a:t>PRIVÉ</a:t>
+            </a:r>
+          </a:p>
+        </p:txBody>
+      </p:sp>
+      <p:sp>
+        <p:nvSpPr>
+          <p:cNvPr id="73" name="Rounded Rectangle 72"/>
+          <p:cNvSpPr/>
+          <p:nvPr/>
+        </p:nvSpPr>
+        <p:spPr>
+          <a:xfrm>
+            <a:off x="5461000" y="3371850"/>
+            <a:ext cx="330200" cy="139700"/>
+          </a:xfrm>
+          <a:prstGeom prst="roundRect">
+            <a:avLst>
+              <a:gd name="adj" fmla="val 27272"/>
+            </a:avLst>
+          </a:prstGeom>
+          <a:solidFill>
+            <a:srgbClr val="FDF0DF"/>
+          </a:solidFill>
+          <a:ln>
+            <a:noFill/>
+          </a:ln>
+          <a:effectLst/>
+        </p:spPr>
+        <p:style>
+          <a:lnRef idx="1">
+            <a:schemeClr val="accent1"/>
+          </a:lnRef>
+          <a:fillRef idx="3">
+            <a:schemeClr val="accent1"/>
+          </a:fillRef>
+          <a:effectRef idx="2">
+            <a:schemeClr val="accent1"/>
+          </a:effectRef>
+          <a:fontRef idx="minor">
+            <a:schemeClr val="lt1"/>
+          </a:fontRef>
+        </p:style>
+        <p:txBody>
+          <a:bodyPr rtlCol="0" anchor="ctr"/>
+          <a:lstStyle/>
+          <a:p>
+            <a:pPr algn="ctr"/>
+          </a:p>
+        </p:txBody>
+      </p:sp>
+      <p:sp>
+        <p:nvSpPr>
+          <p:cNvPr id="74" name="TextBox 73"/>
+          <p:cNvSpPr txBox="1"/>
+          <p:nvPr/>
+        </p:nvSpPr>
+        <p:spPr>
+          <a:xfrm>
+            <a:off x="5461000" y="3384550"/>
+            <a:ext cx="330200" cy="114300"/>
+          </a:xfrm>
+          <a:prstGeom prst="rect">
+            <a:avLst/>
+          </a:prstGeom>
+          <a:noFill/>
+        </p:spPr>
+        <p:txBody>
+          <a:bodyPr wrap="square" lIns="0" rIns="0" tIns="0" bIns="0">
+            <a:spAutoFit/>
+          </a:bodyPr>
+          <a:lstStyle/>
+          <a:p>
+            <a:pPr algn="ctr">
+              <a:lnSpc>
+                <a:spcPct val="115000"/>
+              </a:lnSpc>
+            </a:pPr>
+            <a:r>
+              <a:rPr sz="650" b="1">
+                <a:solidFill>
+                  <a:srgbClr val="E07B00"/>
+                </a:solidFill>
+                <a:latin typeface="Inter"/>
+              </a:rPr>
+              <a:t>Q3</a:t>
+            </a:r>
+          </a:p>
+        </p:txBody>
+      </p:sp>
+      <p:sp>
+        <p:nvSpPr>
+          <p:cNvPr id="75" name="TextBox 74"/>
+          <p:cNvSpPr txBox="1"/>
+          <p:nvPr/>
+        </p:nvSpPr>
+        <p:spPr>
+          <a:xfrm>
+            <a:off x="8572500" y="3378200"/>
+            <a:ext cx="1460500" cy="152400"/>
+          </a:xfrm>
+          <a:prstGeom prst="rect">
+            <a:avLst/>
+          </a:prstGeom>
+          <a:noFill/>
+        </p:spPr>
+        <p:txBody>
+          <a:bodyPr wrap="square" lIns="0" rIns="0" tIns="0" bIns="0">
+            <a:spAutoFit/>
+          </a:bodyPr>
+          <a:lstStyle/>
+          <a:p>
+            <a:pPr algn="r">
+              <a:lnSpc>
+                <a:spcPct val="115000"/>
+              </a:lnSpc>
+            </a:pPr>
+            <a:r>
+              <a:rPr sz="950" b="0">
+                <a:solidFill>
                   <a:srgbClr val="002333"/>
                 </a:solidFill>
                 <a:latin typeface="Inter"/>
               </a:rPr>
-              <a:t>UK, privaat</a:t>
-            </a:r>
-          </a:p>
-        </p:txBody>
-      </p:sp>
-      <p:sp>
-        <p:nvSpPr>
-          <p:cNvPr id="15" name="TextBox 14"/>
-          <p:cNvSpPr txBox="1"/>
-          <p:nvPr/>
-        </p:nvSpPr>
-        <p:spPr>
-          <a:xfrm>
-            <a:off x="8445500" y="2095500"/>
-            <a:ext cx="1587500" cy="127000"/>
+              <a:t>€20.000</a:t>
+            </a:r>
+          </a:p>
+        </p:txBody>
+      </p:sp>
+      <p:sp>
+        <p:nvSpPr>
+          <p:cNvPr id="76" name="TextBox 75"/>
+          <p:cNvSpPr txBox="1"/>
+          <p:nvPr/>
+        </p:nvSpPr>
+        <p:spPr>
+          <a:xfrm>
+            <a:off x="10223500" y="3378200"/>
+            <a:ext cx="1206500" cy="152400"/>
           </a:xfrm>
           <a:prstGeom prst="rect">
             <a:avLst/>
@@ -10023,21 +12486,99 @@
                 </a:solidFill>
                 <a:latin typeface="Inter"/>
               </a:rPr>
-              <a:t>€400.000</a:t>
-            </a:r>
-          </a:p>
-        </p:txBody>
-      </p:sp>
-      <p:sp>
-        <p:nvSpPr>
-          <p:cNvPr id="16" name="TextBox 15"/>
-          <p:cNvSpPr txBox="1"/>
-          <p:nvPr/>
-        </p:nvSpPr>
-        <p:spPr>
-          <a:xfrm>
-            <a:off x="10160000" y="2095500"/>
-            <a:ext cx="1270000" cy="127000"/>
+              <a:t>70%</a:t>
+            </a:r>
+          </a:p>
+        </p:txBody>
+      </p:sp>
+      <p:sp>
+        <p:nvSpPr>
+          <p:cNvPr id="77" name="TextBox 76"/>
+          <p:cNvSpPr txBox="1"/>
+          <p:nvPr/>
+        </p:nvSpPr>
+        <p:spPr>
+          <a:xfrm>
+            <a:off x="762000" y="3543300"/>
+            <a:ext cx="3048000" cy="152400"/>
+          </a:xfrm>
+          <a:prstGeom prst="rect">
+            <a:avLst/>
+          </a:prstGeom>
+          <a:noFill/>
+        </p:spPr>
+        <p:txBody>
+          <a:bodyPr wrap="square" lIns="0" rIns="0" tIns="0" bIns="0">
+            <a:spAutoFit/>
+          </a:bodyPr>
+          <a:lstStyle/>
+          <a:p>
+            <a:pPr algn="l">
+              <a:lnSpc>
+                <a:spcPct val="115000"/>
+              </a:lnSpc>
+            </a:pPr>
+            <a:r>
+              <a:rPr sz="950" b="0">
+                <a:solidFill>
+                  <a:srgbClr val="002333"/>
+                </a:solidFill>
+                <a:latin typeface="Inter"/>
+              </a:rPr>
+              <a:t>Tilburg University</a:t>
+            </a:r>
+          </a:p>
+        </p:txBody>
+      </p:sp>
+      <p:sp>
+        <p:nvSpPr>
+          <p:cNvPr id="78" name="TextBox 77"/>
+          <p:cNvSpPr txBox="1"/>
+          <p:nvPr/>
+        </p:nvSpPr>
+        <p:spPr>
+          <a:xfrm>
+            <a:off x="3937000" y="3543300"/>
+            <a:ext cx="444500" cy="152400"/>
+          </a:xfrm>
+          <a:prstGeom prst="rect">
+            <a:avLst/>
+          </a:prstGeom>
+          <a:noFill/>
+        </p:spPr>
+        <p:txBody>
+          <a:bodyPr wrap="square" lIns="0" rIns="0" tIns="0" bIns="0">
+            <a:spAutoFit/>
+          </a:bodyPr>
+          <a:lstStyle/>
+          <a:p>
+            <a:pPr algn="l">
+              <a:lnSpc>
+                <a:spcPct val="115000"/>
+              </a:lnSpc>
+            </a:pPr>
+            <a:r>
+              <a:rPr sz="950" b="0">
+                <a:solidFill>
+                  <a:srgbClr val="5B7480"/>
+                </a:solidFill>
+                <a:latin typeface="Inter"/>
+              </a:rPr>
+              <a:t>NL</a:t>
+            </a:r>
+          </a:p>
+        </p:txBody>
+      </p:sp>
+      <p:sp>
+        <p:nvSpPr>
+          <p:cNvPr id="79" name="TextBox 78"/>
+          <p:cNvSpPr txBox="1"/>
+          <p:nvPr/>
+        </p:nvSpPr>
+        <p:spPr>
+          <a:xfrm>
+            <a:off x="8572500" y="3543300"/>
+            <a:ext cx="1460500" cy="152400"/>
           </a:xfrm>
           <a:prstGeom prst="rect">
             <a:avLst/>
@@ -10062,6 +12603,1165 @@
                 </a:solidFill>
                 <a:latin typeface="Inter"/>
               </a:rPr>
+              <a:t>€20.000</a:t>
+            </a:r>
+          </a:p>
+        </p:txBody>
+      </p:sp>
+      <p:sp>
+        <p:nvSpPr>
+          <p:cNvPr id="80" name="TextBox 79"/>
+          <p:cNvSpPr txBox="1"/>
+          <p:nvPr/>
+        </p:nvSpPr>
+        <p:spPr>
+          <a:xfrm>
+            <a:off x="10223500" y="3543300"/>
+            <a:ext cx="1206500" cy="152400"/>
+          </a:xfrm>
+          <a:prstGeom prst="rect">
+            <a:avLst/>
+          </a:prstGeom>
+          <a:noFill/>
+        </p:spPr>
+        <p:txBody>
+          <a:bodyPr wrap="square" lIns="0" rIns="0" tIns="0" bIns="0">
+            <a:spAutoFit/>
+          </a:bodyPr>
+          <a:lstStyle/>
+          <a:p>
+            <a:pPr algn="r">
+              <a:lnSpc>
+                <a:spcPct val="115000"/>
+              </a:lnSpc>
+            </a:pPr>
+            <a:r>
+              <a:rPr sz="950" b="0">
+                <a:solidFill>
+                  <a:srgbClr val="002333"/>
+                </a:solidFill>
+                <a:latin typeface="Inter"/>
+              </a:rPr>
+              <a:t>15%</a:t>
+            </a:r>
+          </a:p>
+        </p:txBody>
+      </p:sp>
+      <p:sp>
+        <p:nvSpPr>
+          <p:cNvPr id="81" name="TextBox 80"/>
+          <p:cNvSpPr txBox="1"/>
+          <p:nvPr/>
+        </p:nvSpPr>
+        <p:spPr>
+          <a:xfrm>
+            <a:off x="762000" y="3708400"/>
+            <a:ext cx="3048000" cy="152400"/>
+          </a:xfrm>
+          <a:prstGeom prst="rect">
+            <a:avLst/>
+          </a:prstGeom>
+          <a:noFill/>
+        </p:spPr>
+        <p:txBody>
+          <a:bodyPr wrap="square" lIns="0" rIns="0" tIns="0" bIns="0">
+            <a:spAutoFit/>
+          </a:bodyPr>
+          <a:lstStyle/>
+          <a:p>
+            <a:pPr algn="l">
+              <a:lnSpc>
+                <a:spcPct val="115000"/>
+              </a:lnSpc>
+            </a:pPr>
+            <a:r>
+              <a:rPr sz="950" b="0">
+                <a:solidFill>
+                  <a:srgbClr val="002333"/>
+                </a:solidFill>
+                <a:latin typeface="Inter"/>
+              </a:rPr>
+              <a:t>UMCG</a:t>
+            </a:r>
+          </a:p>
+        </p:txBody>
+      </p:sp>
+      <p:sp>
+        <p:nvSpPr>
+          <p:cNvPr id="82" name="TextBox 81"/>
+          <p:cNvSpPr txBox="1"/>
+          <p:nvPr/>
+        </p:nvSpPr>
+        <p:spPr>
+          <a:xfrm>
+            <a:off x="3937000" y="3708400"/>
+            <a:ext cx="444500" cy="152400"/>
+          </a:xfrm>
+          <a:prstGeom prst="rect">
+            <a:avLst/>
+          </a:prstGeom>
+          <a:noFill/>
+        </p:spPr>
+        <p:txBody>
+          <a:bodyPr wrap="square" lIns="0" rIns="0" tIns="0" bIns="0">
+            <a:spAutoFit/>
+          </a:bodyPr>
+          <a:lstStyle/>
+          <a:p>
+            <a:pPr algn="l">
+              <a:lnSpc>
+                <a:spcPct val="115000"/>
+              </a:lnSpc>
+            </a:pPr>
+            <a:r>
+              <a:rPr sz="950" b="0">
+                <a:solidFill>
+                  <a:srgbClr val="5B7480"/>
+                </a:solidFill>
+                <a:latin typeface="Inter"/>
+              </a:rPr>
+              <a:t>NL</a:t>
+            </a:r>
+          </a:p>
+        </p:txBody>
+      </p:sp>
+      <p:sp>
+        <p:nvSpPr>
+          <p:cNvPr id="83" name="TextBox 82"/>
+          <p:cNvSpPr txBox="1"/>
+          <p:nvPr/>
+        </p:nvSpPr>
+        <p:spPr>
+          <a:xfrm>
+            <a:off x="8572500" y="3708400"/>
+            <a:ext cx="1460500" cy="152400"/>
+          </a:xfrm>
+          <a:prstGeom prst="rect">
+            <a:avLst/>
+          </a:prstGeom>
+          <a:noFill/>
+        </p:spPr>
+        <p:txBody>
+          <a:bodyPr wrap="square" lIns="0" rIns="0" tIns="0" bIns="0">
+            <a:spAutoFit/>
+          </a:bodyPr>
+          <a:lstStyle/>
+          <a:p>
+            <a:pPr algn="r">
+              <a:lnSpc>
+                <a:spcPct val="115000"/>
+              </a:lnSpc>
+            </a:pPr>
+            <a:r>
+              <a:rPr sz="950" b="0">
+                <a:solidFill>
+                  <a:srgbClr val="002333"/>
+                </a:solidFill>
+                <a:latin typeface="Inter"/>
+              </a:rPr>
+              <a:t>€15.000</a:t>
+            </a:r>
+          </a:p>
+        </p:txBody>
+      </p:sp>
+      <p:sp>
+        <p:nvSpPr>
+          <p:cNvPr id="84" name="TextBox 83"/>
+          <p:cNvSpPr txBox="1"/>
+          <p:nvPr/>
+        </p:nvSpPr>
+        <p:spPr>
+          <a:xfrm>
+            <a:off x="10223500" y="3708400"/>
+            <a:ext cx="1206500" cy="152400"/>
+          </a:xfrm>
+          <a:prstGeom prst="rect">
+            <a:avLst/>
+          </a:prstGeom>
+          <a:noFill/>
+        </p:spPr>
+        <p:txBody>
+          <a:bodyPr wrap="square" lIns="0" rIns="0" tIns="0" bIns="0">
+            <a:spAutoFit/>
+          </a:bodyPr>
+          <a:lstStyle/>
+          <a:p>
+            <a:pPr algn="r">
+              <a:lnSpc>
+                <a:spcPct val="115000"/>
+              </a:lnSpc>
+            </a:pPr>
+            <a:r>
+              <a:rPr sz="950" b="0">
+                <a:solidFill>
+                  <a:srgbClr val="002333"/>
+                </a:solidFill>
+                <a:latin typeface="Inter"/>
+              </a:rPr>
+              <a:t>50%</a:t>
+            </a:r>
+          </a:p>
+        </p:txBody>
+      </p:sp>
+      <p:sp>
+        <p:nvSpPr>
+          <p:cNvPr id="85" name="TextBox 84"/>
+          <p:cNvSpPr txBox="1"/>
+          <p:nvPr/>
+        </p:nvSpPr>
+        <p:spPr>
+          <a:xfrm>
+            <a:off x="762000" y="3873500"/>
+            <a:ext cx="3048000" cy="152400"/>
+          </a:xfrm>
+          <a:prstGeom prst="rect">
+            <a:avLst/>
+          </a:prstGeom>
+          <a:noFill/>
+        </p:spPr>
+        <p:txBody>
+          <a:bodyPr wrap="square" lIns="0" rIns="0" tIns="0" bIns="0">
+            <a:spAutoFit/>
+          </a:bodyPr>
+          <a:lstStyle/>
+          <a:p>
+            <a:pPr algn="l">
+              <a:lnSpc>
+                <a:spcPct val="115000"/>
+              </a:lnSpc>
+            </a:pPr>
+            <a:r>
+              <a:rPr sz="950" b="0">
+                <a:solidFill>
+                  <a:srgbClr val="002333"/>
+                </a:solidFill>
+                <a:latin typeface="Inter"/>
+              </a:rPr>
+              <a:t>Radboud Universiteit</a:t>
+            </a:r>
+          </a:p>
+        </p:txBody>
+      </p:sp>
+      <p:sp>
+        <p:nvSpPr>
+          <p:cNvPr id="86" name="TextBox 85"/>
+          <p:cNvSpPr txBox="1"/>
+          <p:nvPr/>
+        </p:nvSpPr>
+        <p:spPr>
+          <a:xfrm>
+            <a:off x="3937000" y="3873500"/>
+            <a:ext cx="444500" cy="152400"/>
+          </a:xfrm>
+          <a:prstGeom prst="rect">
+            <a:avLst/>
+          </a:prstGeom>
+          <a:noFill/>
+        </p:spPr>
+        <p:txBody>
+          <a:bodyPr wrap="square" lIns="0" rIns="0" tIns="0" bIns="0">
+            <a:spAutoFit/>
+          </a:bodyPr>
+          <a:lstStyle/>
+          <a:p>
+            <a:pPr algn="l">
+              <a:lnSpc>
+                <a:spcPct val="115000"/>
+              </a:lnSpc>
+            </a:pPr>
+            <a:r>
+              <a:rPr sz="950" b="0">
+                <a:solidFill>
+                  <a:srgbClr val="5B7480"/>
+                </a:solidFill>
+                <a:latin typeface="Inter"/>
+              </a:rPr>
+              <a:t>NL</a:t>
+            </a:r>
+          </a:p>
+        </p:txBody>
+      </p:sp>
+      <p:sp>
+        <p:nvSpPr>
+          <p:cNvPr id="87" name="TextBox 86"/>
+          <p:cNvSpPr txBox="1"/>
+          <p:nvPr/>
+        </p:nvSpPr>
+        <p:spPr>
+          <a:xfrm>
+            <a:off x="8572500" y="3873500"/>
+            <a:ext cx="1460500" cy="152400"/>
+          </a:xfrm>
+          <a:prstGeom prst="rect">
+            <a:avLst/>
+          </a:prstGeom>
+          <a:noFill/>
+        </p:spPr>
+        <p:txBody>
+          <a:bodyPr wrap="square" lIns="0" rIns="0" tIns="0" bIns="0">
+            <a:spAutoFit/>
+          </a:bodyPr>
+          <a:lstStyle/>
+          <a:p>
+            <a:pPr algn="r">
+              <a:lnSpc>
+                <a:spcPct val="115000"/>
+              </a:lnSpc>
+            </a:pPr>
+            <a:r>
+              <a:rPr sz="950" b="0">
+                <a:solidFill>
+                  <a:srgbClr val="002333"/>
+                </a:solidFill>
+                <a:latin typeface="Inter"/>
+              </a:rPr>
+              <a:t>€15.000</a:t>
+            </a:r>
+          </a:p>
+        </p:txBody>
+      </p:sp>
+      <p:sp>
+        <p:nvSpPr>
+          <p:cNvPr id="88" name="TextBox 87"/>
+          <p:cNvSpPr txBox="1"/>
+          <p:nvPr/>
+        </p:nvSpPr>
+        <p:spPr>
+          <a:xfrm>
+            <a:off x="10223500" y="3873500"/>
+            <a:ext cx="1206500" cy="152400"/>
+          </a:xfrm>
+          <a:prstGeom prst="rect">
+            <a:avLst/>
+          </a:prstGeom>
+          <a:noFill/>
+        </p:spPr>
+        <p:txBody>
+          <a:bodyPr wrap="square" lIns="0" rIns="0" tIns="0" bIns="0">
+            <a:spAutoFit/>
+          </a:bodyPr>
+          <a:lstStyle/>
+          <a:p>
+            <a:pPr algn="r">
+              <a:lnSpc>
+                <a:spcPct val="115000"/>
+              </a:lnSpc>
+            </a:pPr>
+            <a:r>
+              <a:rPr sz="950" b="0">
+                <a:solidFill>
+                  <a:srgbClr val="002333"/>
+                </a:solidFill>
+                <a:latin typeface="Inter"/>
+              </a:rPr>
+              <a:t>15%</a:t>
+            </a:r>
+          </a:p>
+        </p:txBody>
+      </p:sp>
+      <p:sp>
+        <p:nvSpPr>
+          <p:cNvPr id="89" name="TextBox 88"/>
+          <p:cNvSpPr txBox="1"/>
+          <p:nvPr/>
+        </p:nvSpPr>
+        <p:spPr>
+          <a:xfrm>
+            <a:off x="762000" y="4038600"/>
+            <a:ext cx="3048000" cy="152400"/>
+          </a:xfrm>
+          <a:prstGeom prst="rect">
+            <a:avLst/>
+          </a:prstGeom>
+          <a:noFill/>
+        </p:spPr>
+        <p:txBody>
+          <a:bodyPr wrap="square" lIns="0" rIns="0" tIns="0" bIns="0">
+            <a:spAutoFit/>
+          </a:bodyPr>
+          <a:lstStyle/>
+          <a:p>
+            <a:pPr algn="l">
+              <a:lnSpc>
+                <a:spcPct val="115000"/>
+              </a:lnSpc>
+            </a:pPr>
+            <a:r>
+              <a:rPr sz="950" b="0">
+                <a:solidFill>
+                  <a:srgbClr val="002333"/>
+                </a:solidFill>
+                <a:latin typeface="Inter"/>
+              </a:rPr>
+              <a:t>Hogeschool Rotterdam</a:t>
+            </a:r>
+          </a:p>
+        </p:txBody>
+      </p:sp>
+      <p:sp>
+        <p:nvSpPr>
+          <p:cNvPr id="90" name="TextBox 89"/>
+          <p:cNvSpPr txBox="1"/>
+          <p:nvPr/>
+        </p:nvSpPr>
+        <p:spPr>
+          <a:xfrm>
+            <a:off x="3937000" y="4038600"/>
+            <a:ext cx="444500" cy="152400"/>
+          </a:xfrm>
+          <a:prstGeom prst="rect">
+            <a:avLst/>
+          </a:prstGeom>
+          <a:noFill/>
+        </p:spPr>
+        <p:txBody>
+          <a:bodyPr wrap="square" lIns="0" rIns="0" tIns="0" bIns="0">
+            <a:spAutoFit/>
+          </a:bodyPr>
+          <a:lstStyle/>
+          <a:p>
+            <a:pPr algn="l">
+              <a:lnSpc>
+                <a:spcPct val="115000"/>
+              </a:lnSpc>
+            </a:pPr>
+            <a:r>
+              <a:rPr sz="950" b="0">
+                <a:solidFill>
+                  <a:srgbClr val="5B7480"/>
+                </a:solidFill>
+                <a:latin typeface="Inter"/>
+              </a:rPr>
+              <a:t>NL</a:t>
+            </a:r>
+          </a:p>
+        </p:txBody>
+      </p:sp>
+      <p:sp>
+        <p:nvSpPr>
+          <p:cNvPr id="91" name="TextBox 90"/>
+          <p:cNvSpPr txBox="1"/>
+          <p:nvPr/>
+        </p:nvSpPr>
+        <p:spPr>
+          <a:xfrm>
+            <a:off x="8572500" y="4038600"/>
+            <a:ext cx="1460500" cy="152400"/>
+          </a:xfrm>
+          <a:prstGeom prst="rect">
+            <a:avLst/>
+          </a:prstGeom>
+          <a:noFill/>
+        </p:spPr>
+        <p:txBody>
+          <a:bodyPr wrap="square" lIns="0" rIns="0" tIns="0" bIns="0">
+            <a:spAutoFit/>
+          </a:bodyPr>
+          <a:lstStyle/>
+          <a:p>
+            <a:pPr algn="r">
+              <a:lnSpc>
+                <a:spcPct val="115000"/>
+              </a:lnSpc>
+            </a:pPr>
+            <a:r>
+              <a:rPr sz="950" b="0">
+                <a:solidFill>
+                  <a:srgbClr val="002333"/>
+                </a:solidFill>
+                <a:latin typeface="Inter"/>
+              </a:rPr>
+              <a:t>€10.000</a:t>
+            </a:r>
+          </a:p>
+        </p:txBody>
+      </p:sp>
+      <p:sp>
+        <p:nvSpPr>
+          <p:cNvPr id="92" name="TextBox 91"/>
+          <p:cNvSpPr txBox="1"/>
+          <p:nvPr/>
+        </p:nvSpPr>
+        <p:spPr>
+          <a:xfrm>
+            <a:off x="10223500" y="4038600"/>
+            <a:ext cx="1206500" cy="152400"/>
+          </a:xfrm>
+          <a:prstGeom prst="rect">
+            <a:avLst/>
+          </a:prstGeom>
+          <a:noFill/>
+        </p:spPr>
+        <p:txBody>
+          <a:bodyPr wrap="square" lIns="0" rIns="0" tIns="0" bIns="0">
+            <a:spAutoFit/>
+          </a:bodyPr>
+          <a:lstStyle/>
+          <a:p>
+            <a:pPr algn="r">
+              <a:lnSpc>
+                <a:spcPct val="115000"/>
+              </a:lnSpc>
+            </a:pPr>
+            <a:r>
+              <a:rPr sz="950" b="0">
+                <a:solidFill>
+                  <a:srgbClr val="002333"/>
+                </a:solidFill>
+                <a:latin typeface="Inter"/>
+              </a:rPr>
+              <a:t>85%</a:t>
+            </a:r>
+          </a:p>
+        </p:txBody>
+      </p:sp>
+      <p:sp>
+        <p:nvSpPr>
+          <p:cNvPr id="93" name="TextBox 92"/>
+          <p:cNvSpPr txBox="1"/>
+          <p:nvPr/>
+        </p:nvSpPr>
+        <p:spPr>
+          <a:xfrm>
+            <a:off x="762000" y="4203700"/>
+            <a:ext cx="3048000" cy="152400"/>
+          </a:xfrm>
+          <a:prstGeom prst="rect">
+            <a:avLst/>
+          </a:prstGeom>
+          <a:noFill/>
+        </p:spPr>
+        <p:txBody>
+          <a:bodyPr wrap="square" lIns="0" rIns="0" tIns="0" bIns="0">
+            <a:spAutoFit/>
+          </a:bodyPr>
+          <a:lstStyle/>
+          <a:p>
+            <a:pPr algn="l">
+              <a:lnSpc>
+                <a:spcPct val="115000"/>
+              </a:lnSpc>
+            </a:pPr>
+            <a:r>
+              <a:rPr sz="950" b="0">
+                <a:solidFill>
+                  <a:srgbClr val="002333"/>
+                </a:solidFill>
+                <a:latin typeface="Inter"/>
+              </a:rPr>
+              <a:t>Notenboom</a:t>
+            </a:r>
+          </a:p>
+        </p:txBody>
+      </p:sp>
+      <p:sp>
+        <p:nvSpPr>
+          <p:cNvPr id="94" name="TextBox 93"/>
+          <p:cNvSpPr txBox="1"/>
+          <p:nvPr/>
+        </p:nvSpPr>
+        <p:spPr>
+          <a:xfrm>
+            <a:off x="3937000" y="4203700"/>
+            <a:ext cx="444500" cy="152400"/>
+          </a:xfrm>
+          <a:prstGeom prst="rect">
+            <a:avLst/>
+          </a:prstGeom>
+          <a:noFill/>
+        </p:spPr>
+        <p:txBody>
+          <a:bodyPr wrap="square" lIns="0" rIns="0" tIns="0" bIns="0">
+            <a:spAutoFit/>
+          </a:bodyPr>
+          <a:lstStyle/>
+          <a:p>
+            <a:pPr algn="l">
+              <a:lnSpc>
+                <a:spcPct val="115000"/>
+              </a:lnSpc>
+            </a:pPr>
+            <a:r>
+              <a:rPr sz="950" b="0">
+                <a:solidFill>
+                  <a:srgbClr val="5B7480"/>
+                </a:solidFill>
+                <a:latin typeface="Inter"/>
+              </a:rPr>
+              <a:t>NL</a:t>
+            </a:r>
+          </a:p>
+        </p:txBody>
+      </p:sp>
+      <p:sp>
+        <p:nvSpPr>
+          <p:cNvPr id="95" name="Rounded Rectangle 94"/>
+          <p:cNvSpPr/>
+          <p:nvPr/>
+        </p:nvSpPr>
+        <p:spPr>
+          <a:xfrm>
+            <a:off x="4508500" y="4197350"/>
+            <a:ext cx="495300" cy="139700"/>
+          </a:xfrm>
+          <a:prstGeom prst="roundRect">
+            <a:avLst>
+              <a:gd name="adj" fmla="val 27272"/>
+            </a:avLst>
+          </a:prstGeom>
+          <a:solidFill>
+            <a:srgbClr val="E2FBEF"/>
+          </a:solidFill>
+          <a:ln>
+            <a:noFill/>
+          </a:ln>
+          <a:effectLst/>
+        </p:spPr>
+        <p:style>
+          <a:lnRef idx="1">
+            <a:schemeClr val="accent1"/>
+          </a:lnRef>
+          <a:fillRef idx="3">
+            <a:schemeClr val="accent1"/>
+          </a:fillRef>
+          <a:effectRef idx="2">
+            <a:schemeClr val="accent1"/>
+          </a:effectRef>
+          <a:fontRef idx="minor">
+            <a:schemeClr val="lt1"/>
+          </a:fontRef>
+        </p:style>
+        <p:txBody>
+          <a:bodyPr rtlCol="0" anchor="ctr"/>
+          <a:lstStyle/>
+          <a:p>
+            <a:pPr algn="ctr"/>
+          </a:p>
+        </p:txBody>
+      </p:sp>
+      <p:sp>
+        <p:nvSpPr>
+          <p:cNvPr id="96" name="TextBox 95"/>
+          <p:cNvSpPr txBox="1"/>
+          <p:nvPr/>
+        </p:nvSpPr>
+        <p:spPr>
+          <a:xfrm>
+            <a:off x="4508500" y="4210050"/>
+            <a:ext cx="495300" cy="114300"/>
+          </a:xfrm>
+          <a:prstGeom prst="rect">
+            <a:avLst/>
+          </a:prstGeom>
+          <a:noFill/>
+        </p:spPr>
+        <p:txBody>
+          <a:bodyPr wrap="square" lIns="0" rIns="0" tIns="0" bIns="0">
+            <a:spAutoFit/>
+          </a:bodyPr>
+          <a:lstStyle/>
+          <a:p>
+            <a:pPr algn="ctr">
+              <a:lnSpc>
+                <a:spcPct val="115000"/>
+              </a:lnSpc>
+            </a:pPr>
+            <a:r>
+              <a:rPr sz="650" b="1">
+                <a:solidFill>
+                  <a:srgbClr val="007B54"/>
+                </a:solidFill>
+                <a:latin typeface="Inter"/>
+              </a:rPr>
+              <a:t>PRIVÉ</a:t>
+            </a:r>
+          </a:p>
+        </p:txBody>
+      </p:sp>
+      <p:sp>
+        <p:nvSpPr>
+          <p:cNvPr id="97" name="Rounded Rectangle 96"/>
+          <p:cNvSpPr/>
+          <p:nvPr/>
+        </p:nvSpPr>
+        <p:spPr>
+          <a:xfrm>
+            <a:off x="5461000" y="4197350"/>
+            <a:ext cx="330200" cy="139700"/>
+          </a:xfrm>
+          <a:prstGeom prst="roundRect">
+            <a:avLst>
+              <a:gd name="adj" fmla="val 27272"/>
+            </a:avLst>
+          </a:prstGeom>
+          <a:solidFill>
+            <a:srgbClr val="FDF0DF"/>
+          </a:solidFill>
+          <a:ln>
+            <a:noFill/>
+          </a:ln>
+          <a:effectLst/>
+        </p:spPr>
+        <p:style>
+          <a:lnRef idx="1">
+            <a:schemeClr val="accent1"/>
+          </a:lnRef>
+          <a:fillRef idx="3">
+            <a:schemeClr val="accent1"/>
+          </a:fillRef>
+          <a:effectRef idx="2">
+            <a:schemeClr val="accent1"/>
+          </a:effectRef>
+          <a:fontRef idx="minor">
+            <a:schemeClr val="lt1"/>
+          </a:fontRef>
+        </p:style>
+        <p:txBody>
+          <a:bodyPr rtlCol="0" anchor="ctr"/>
+          <a:lstStyle/>
+          <a:p>
+            <a:pPr algn="ctr"/>
+          </a:p>
+        </p:txBody>
+      </p:sp>
+      <p:sp>
+        <p:nvSpPr>
+          <p:cNvPr id="98" name="TextBox 97"/>
+          <p:cNvSpPr txBox="1"/>
+          <p:nvPr/>
+        </p:nvSpPr>
+        <p:spPr>
+          <a:xfrm>
+            <a:off x="5461000" y="4210050"/>
+            <a:ext cx="330200" cy="114300"/>
+          </a:xfrm>
+          <a:prstGeom prst="rect">
+            <a:avLst/>
+          </a:prstGeom>
+          <a:noFill/>
+        </p:spPr>
+        <p:txBody>
+          <a:bodyPr wrap="square" lIns="0" rIns="0" tIns="0" bIns="0">
+            <a:spAutoFit/>
+          </a:bodyPr>
+          <a:lstStyle/>
+          <a:p>
+            <a:pPr algn="ctr">
+              <a:lnSpc>
+                <a:spcPct val="115000"/>
+              </a:lnSpc>
+            </a:pPr>
+            <a:r>
+              <a:rPr sz="650" b="1">
+                <a:solidFill>
+                  <a:srgbClr val="E07B00"/>
+                </a:solidFill>
+                <a:latin typeface="Inter"/>
+              </a:rPr>
+              <a:t>Q3</a:t>
+            </a:r>
+          </a:p>
+        </p:txBody>
+      </p:sp>
+      <p:sp>
+        <p:nvSpPr>
+          <p:cNvPr id="99" name="TextBox 98"/>
+          <p:cNvSpPr txBox="1"/>
+          <p:nvPr/>
+        </p:nvSpPr>
+        <p:spPr>
+          <a:xfrm>
+            <a:off x="8572500" y="4203700"/>
+            <a:ext cx="1460500" cy="152400"/>
+          </a:xfrm>
+          <a:prstGeom prst="rect">
+            <a:avLst/>
+          </a:prstGeom>
+          <a:noFill/>
+        </p:spPr>
+        <p:txBody>
+          <a:bodyPr wrap="square" lIns="0" rIns="0" tIns="0" bIns="0">
+            <a:spAutoFit/>
+          </a:bodyPr>
+          <a:lstStyle/>
+          <a:p>
+            <a:pPr algn="r">
+              <a:lnSpc>
+                <a:spcPct val="115000"/>
+              </a:lnSpc>
+            </a:pPr>
+            <a:r>
+              <a:rPr sz="950" b="0">
+                <a:solidFill>
+                  <a:srgbClr val="002333"/>
+                </a:solidFill>
+                <a:latin typeface="Inter"/>
+              </a:rPr>
+              <a:t>€10.000</a:t>
+            </a:r>
+          </a:p>
+        </p:txBody>
+      </p:sp>
+      <p:sp>
+        <p:nvSpPr>
+          <p:cNvPr id="100" name="TextBox 99"/>
+          <p:cNvSpPr txBox="1"/>
+          <p:nvPr/>
+        </p:nvSpPr>
+        <p:spPr>
+          <a:xfrm>
+            <a:off x="10223500" y="4203700"/>
+            <a:ext cx="1206500" cy="152400"/>
+          </a:xfrm>
+          <a:prstGeom prst="rect">
+            <a:avLst/>
+          </a:prstGeom>
+          <a:noFill/>
+        </p:spPr>
+        <p:txBody>
+          <a:bodyPr wrap="square" lIns="0" rIns="0" tIns="0" bIns="0">
+            <a:spAutoFit/>
+          </a:bodyPr>
+          <a:lstStyle/>
+          <a:p>
+            <a:pPr algn="r">
+              <a:lnSpc>
+                <a:spcPct val="115000"/>
+              </a:lnSpc>
+            </a:pPr>
+            <a:r>
+              <a:rPr sz="950" b="0">
+                <a:solidFill>
+                  <a:srgbClr val="002333"/>
+                </a:solidFill>
+                <a:latin typeface="Inter"/>
+              </a:rPr>
+              <a:t>20%</a:t>
+            </a:r>
+          </a:p>
+        </p:txBody>
+      </p:sp>
+      <p:sp>
+        <p:nvSpPr>
+          <p:cNvPr id="101" name="TextBox 100"/>
+          <p:cNvSpPr txBox="1"/>
+          <p:nvPr/>
+        </p:nvSpPr>
+        <p:spPr>
+          <a:xfrm>
+            <a:off x="762000" y="4368800"/>
+            <a:ext cx="3048000" cy="152400"/>
+          </a:xfrm>
+          <a:prstGeom prst="rect">
+            <a:avLst/>
+          </a:prstGeom>
+          <a:noFill/>
+        </p:spPr>
+        <p:txBody>
+          <a:bodyPr wrap="square" lIns="0" rIns="0" tIns="0" bIns="0">
+            <a:spAutoFit/>
+          </a:bodyPr>
+          <a:lstStyle/>
+          <a:p>
+            <a:pPr algn="l">
+              <a:lnSpc>
+                <a:spcPct val="115000"/>
+              </a:lnSpc>
+            </a:pPr>
+            <a:r>
+              <a:rPr sz="950" b="0">
+                <a:solidFill>
+                  <a:srgbClr val="002333"/>
+                </a:solidFill>
+                <a:latin typeface="Inter"/>
+              </a:rPr>
+              <a:t>CMI</a:t>
+            </a:r>
+          </a:p>
+        </p:txBody>
+      </p:sp>
+      <p:sp>
+        <p:nvSpPr>
+          <p:cNvPr id="102" name="TextBox 101"/>
+          <p:cNvSpPr txBox="1"/>
+          <p:nvPr/>
+        </p:nvSpPr>
+        <p:spPr>
+          <a:xfrm>
+            <a:off x="3937000" y="4368800"/>
+            <a:ext cx="444500" cy="152400"/>
+          </a:xfrm>
+          <a:prstGeom prst="rect">
+            <a:avLst/>
+          </a:prstGeom>
+          <a:noFill/>
+        </p:spPr>
+        <p:txBody>
+          <a:bodyPr wrap="square" lIns="0" rIns="0" tIns="0" bIns="0">
+            <a:spAutoFit/>
+          </a:bodyPr>
+          <a:lstStyle/>
+          <a:p>
+            <a:pPr algn="l">
+              <a:lnSpc>
+                <a:spcPct val="115000"/>
+              </a:lnSpc>
+            </a:pPr>
+            <a:r>
+              <a:rPr sz="950" b="0">
+                <a:solidFill>
+                  <a:srgbClr val="5B7480"/>
+                </a:solidFill>
+                <a:latin typeface="Inter"/>
+              </a:rPr>
+              <a:t>IE</a:t>
+            </a:r>
+          </a:p>
+        </p:txBody>
+      </p:sp>
+      <p:sp>
+        <p:nvSpPr>
+          <p:cNvPr id="103" name="Rounded Rectangle 102"/>
+          <p:cNvSpPr/>
+          <p:nvPr/>
+        </p:nvSpPr>
+        <p:spPr>
+          <a:xfrm>
+            <a:off x="4508500" y="4362450"/>
+            <a:ext cx="495300" cy="139700"/>
+          </a:xfrm>
+          <a:prstGeom prst="roundRect">
+            <a:avLst>
+              <a:gd name="adj" fmla="val 27272"/>
+            </a:avLst>
+          </a:prstGeom>
+          <a:solidFill>
+            <a:srgbClr val="E2FBEF"/>
+          </a:solidFill>
+          <a:ln>
+            <a:noFill/>
+          </a:ln>
+          <a:effectLst/>
+        </p:spPr>
+        <p:style>
+          <a:lnRef idx="1">
+            <a:schemeClr val="accent1"/>
+          </a:lnRef>
+          <a:fillRef idx="3">
+            <a:schemeClr val="accent1"/>
+          </a:fillRef>
+          <a:effectRef idx="2">
+            <a:schemeClr val="accent1"/>
+          </a:effectRef>
+          <a:fontRef idx="minor">
+            <a:schemeClr val="lt1"/>
+          </a:fontRef>
+        </p:style>
+        <p:txBody>
+          <a:bodyPr rtlCol="0" anchor="ctr"/>
+          <a:lstStyle/>
+          <a:p>
+            <a:pPr algn="ctr"/>
+          </a:p>
+        </p:txBody>
+      </p:sp>
+      <p:sp>
+        <p:nvSpPr>
+          <p:cNvPr id="104" name="TextBox 103"/>
+          <p:cNvSpPr txBox="1"/>
+          <p:nvPr/>
+        </p:nvSpPr>
+        <p:spPr>
+          <a:xfrm>
+            <a:off x="4508500" y="4375150"/>
+            <a:ext cx="495300" cy="114300"/>
+          </a:xfrm>
+          <a:prstGeom prst="rect">
+            <a:avLst/>
+          </a:prstGeom>
+          <a:noFill/>
+        </p:spPr>
+        <p:txBody>
+          <a:bodyPr wrap="square" lIns="0" rIns="0" tIns="0" bIns="0">
+            <a:spAutoFit/>
+          </a:bodyPr>
+          <a:lstStyle/>
+          <a:p>
+            <a:pPr algn="ctr">
+              <a:lnSpc>
+                <a:spcPct val="115000"/>
+              </a:lnSpc>
+            </a:pPr>
+            <a:r>
+              <a:rPr sz="650" b="1">
+                <a:solidFill>
+                  <a:srgbClr val="007B54"/>
+                </a:solidFill>
+                <a:latin typeface="Inter"/>
+              </a:rPr>
+              <a:t>PRIVÉ</a:t>
+            </a:r>
+          </a:p>
+        </p:txBody>
+      </p:sp>
+      <p:sp>
+        <p:nvSpPr>
+          <p:cNvPr id="105" name="Rounded Rectangle 104"/>
+          <p:cNvSpPr/>
+          <p:nvPr/>
+        </p:nvSpPr>
+        <p:spPr>
+          <a:xfrm>
+            <a:off x="5461000" y="4362450"/>
+            <a:ext cx="330200" cy="139700"/>
+          </a:xfrm>
+          <a:prstGeom prst="roundRect">
+            <a:avLst>
+              <a:gd name="adj" fmla="val 27272"/>
+            </a:avLst>
+          </a:prstGeom>
+          <a:solidFill>
+            <a:srgbClr val="FDF0DF"/>
+          </a:solidFill>
+          <a:ln>
+            <a:noFill/>
+          </a:ln>
+          <a:effectLst/>
+        </p:spPr>
+        <p:style>
+          <a:lnRef idx="1">
+            <a:schemeClr val="accent1"/>
+          </a:lnRef>
+          <a:fillRef idx="3">
+            <a:schemeClr val="accent1"/>
+          </a:fillRef>
+          <a:effectRef idx="2">
+            <a:schemeClr val="accent1"/>
+          </a:effectRef>
+          <a:fontRef idx="minor">
+            <a:schemeClr val="lt1"/>
+          </a:fontRef>
+        </p:style>
+        <p:txBody>
+          <a:bodyPr rtlCol="0" anchor="ctr"/>
+          <a:lstStyle/>
+          <a:p>
+            <a:pPr algn="ctr"/>
+          </a:p>
+        </p:txBody>
+      </p:sp>
+      <p:sp>
+        <p:nvSpPr>
+          <p:cNvPr id="106" name="TextBox 105"/>
+          <p:cNvSpPr txBox="1"/>
+          <p:nvPr/>
+        </p:nvSpPr>
+        <p:spPr>
+          <a:xfrm>
+            <a:off x="5461000" y="4375150"/>
+            <a:ext cx="330200" cy="114300"/>
+          </a:xfrm>
+          <a:prstGeom prst="rect">
+            <a:avLst/>
+          </a:prstGeom>
+          <a:noFill/>
+        </p:spPr>
+        <p:txBody>
+          <a:bodyPr wrap="square" lIns="0" rIns="0" tIns="0" bIns="0">
+            <a:spAutoFit/>
+          </a:bodyPr>
+          <a:lstStyle/>
+          <a:p>
+            <a:pPr algn="ctr">
+              <a:lnSpc>
+                <a:spcPct val="115000"/>
+              </a:lnSpc>
+            </a:pPr>
+            <a:r>
+              <a:rPr sz="650" b="1">
+                <a:solidFill>
+                  <a:srgbClr val="E07B00"/>
+                </a:solidFill>
+                <a:latin typeface="Inter"/>
+              </a:rPr>
+              <a:t>Q3</a:t>
+            </a:r>
+          </a:p>
+        </p:txBody>
+      </p:sp>
+      <p:sp>
+        <p:nvSpPr>
+          <p:cNvPr id="107" name="TextBox 106"/>
+          <p:cNvSpPr txBox="1"/>
+          <p:nvPr/>
+        </p:nvSpPr>
+        <p:spPr>
+          <a:xfrm>
+            <a:off x="8572500" y="4368800"/>
+            <a:ext cx="1460500" cy="152400"/>
+          </a:xfrm>
+          <a:prstGeom prst="rect">
+            <a:avLst/>
+          </a:prstGeom>
+          <a:noFill/>
+        </p:spPr>
+        <p:txBody>
+          <a:bodyPr wrap="square" lIns="0" rIns="0" tIns="0" bIns="0">
+            <a:spAutoFit/>
+          </a:bodyPr>
+          <a:lstStyle/>
+          <a:p>
+            <a:pPr algn="r">
+              <a:lnSpc>
+                <a:spcPct val="115000"/>
+              </a:lnSpc>
+            </a:pPr>
+            <a:r>
+              <a:rPr sz="950" b="0">
+                <a:solidFill>
+                  <a:srgbClr val="002333"/>
+                </a:solidFill>
+                <a:latin typeface="Inter"/>
+              </a:rPr>
+              <a:t>€10.000</a:t>
+            </a:r>
+          </a:p>
+        </p:txBody>
+      </p:sp>
+      <p:sp>
+        <p:nvSpPr>
+          <p:cNvPr id="108" name="TextBox 107"/>
+          <p:cNvSpPr txBox="1"/>
+          <p:nvPr/>
+        </p:nvSpPr>
+        <p:spPr>
+          <a:xfrm>
+            <a:off x="10223500" y="4368800"/>
+            <a:ext cx="1206500" cy="152400"/>
+          </a:xfrm>
+          <a:prstGeom prst="rect">
+            <a:avLst/>
+          </a:prstGeom>
+          <a:noFill/>
+        </p:spPr>
+        <p:txBody>
+          <a:bodyPr wrap="square" lIns="0" rIns="0" tIns="0" bIns="0">
+            <a:spAutoFit/>
+          </a:bodyPr>
+          <a:lstStyle/>
+          <a:p>
+            <a:pPr algn="r">
+              <a:lnSpc>
+                <a:spcPct val="115000"/>
+              </a:lnSpc>
+            </a:pPr>
+            <a:r>
+              <a:rPr sz="950" b="0">
+                <a:solidFill>
+                  <a:srgbClr val="002333"/>
+                </a:solidFill>
+                <a:latin typeface="Inter"/>
+              </a:rPr>
               <a:t>10%</a:t>
             </a:r>
           </a:p>
@@ -10069,14 +13769,14 @@
       </p:sp>
       <p:sp>
         <p:nvSpPr>
-          <p:cNvPr id="17" name="TextBox 16"/>
-          <p:cNvSpPr txBox="1"/>
-          <p:nvPr/>
-        </p:nvSpPr>
-        <p:spPr>
-          <a:xfrm>
-            <a:off x="762000" y="2260600"/>
-            <a:ext cx="4826000" cy="127000"/>
+          <p:cNvPr id="109" name="TextBox 108"/>
+          <p:cNvSpPr txBox="1"/>
+          <p:nvPr/>
+        </p:nvSpPr>
+        <p:spPr>
+          <a:xfrm>
+            <a:off x="762000" y="4533900"/>
+            <a:ext cx="3048000" cy="152400"/>
           </a:xfrm>
           <a:prstGeom prst="rect">
             <a:avLst/>
@@ -10101,21 +13801,21 @@
                 </a:solidFill>
                 <a:latin typeface="Inter"/>
               </a:rPr>
-              <a:t>Rijksuniversiteit Groningen</a:t>
-            </a:r>
-          </a:p>
-        </p:txBody>
-      </p:sp>
-      <p:sp>
-        <p:nvSpPr>
-          <p:cNvPr id="18" name="TextBox 17"/>
-          <p:cNvSpPr txBox="1"/>
-          <p:nvPr/>
-        </p:nvSpPr>
-        <p:spPr>
-          <a:xfrm>
-            <a:off x="5715000" y="2260600"/>
-            <a:ext cx="2540000" cy="127000"/>
+              <a:t>HBMSU</a:t>
+            </a:r>
+          </a:p>
+        </p:txBody>
+      </p:sp>
+      <p:sp>
+        <p:nvSpPr>
+          <p:cNvPr id="110" name="TextBox 109"/>
+          <p:cNvSpPr txBox="1"/>
+          <p:nvPr/>
+        </p:nvSpPr>
+        <p:spPr>
+          <a:xfrm>
+            <a:off x="3937000" y="4533900"/>
+            <a:ext cx="444500" cy="152400"/>
           </a:xfrm>
           <a:prstGeom prst="rect">
             <a:avLst/>
@@ -10136,25 +13836,188 @@
             <a:r>
               <a:rPr sz="950" b="0">
                 <a:solidFill>
+                  <a:srgbClr val="5B7480"/>
+                </a:solidFill>
+                <a:latin typeface="Inter"/>
+              </a:rPr>
+              <a:t>AE</a:t>
+            </a:r>
+          </a:p>
+        </p:txBody>
+      </p:sp>
+      <p:sp>
+        <p:nvSpPr>
+          <p:cNvPr id="111" name="TextBox 110"/>
+          <p:cNvSpPr txBox="1"/>
+          <p:nvPr/>
+        </p:nvSpPr>
+        <p:spPr>
+          <a:xfrm>
+            <a:off x="4508500" y="4533900"/>
+            <a:ext cx="825500" cy="152400"/>
+          </a:xfrm>
+          <a:prstGeom prst="rect">
+            <a:avLst/>
+          </a:prstGeom>
+          <a:noFill/>
+        </p:spPr>
+        <p:txBody>
+          <a:bodyPr wrap="square" lIns="0" rIns="0" tIns="0" bIns="0">
+            <a:spAutoFit/>
+          </a:bodyPr>
+          <a:lstStyle/>
+          <a:p>
+            <a:pPr algn="l">
+              <a:lnSpc>
+                <a:spcPct val="115000"/>
+              </a:lnSpc>
+            </a:pPr>
+            <a:r>
+              <a:rPr sz="800" b="0">
+                <a:solidFill>
+                  <a:srgbClr val="5B7480"/>
+                </a:solidFill>
+                <a:latin typeface="Inter"/>
+              </a:rPr>
+              <a:t>quasi-publiek</a:t>
+            </a:r>
+          </a:p>
+        </p:txBody>
+      </p:sp>
+      <p:sp>
+        <p:nvSpPr>
+          <p:cNvPr id="112" name="Rounded Rectangle 111"/>
+          <p:cNvSpPr/>
+          <p:nvPr/>
+        </p:nvSpPr>
+        <p:spPr>
+          <a:xfrm>
+            <a:off x="5461000" y="4527550"/>
+            <a:ext cx="330200" cy="139700"/>
+          </a:xfrm>
+          <a:prstGeom prst="roundRect">
+            <a:avLst>
+              <a:gd name="adj" fmla="val 27272"/>
+            </a:avLst>
+          </a:prstGeom>
+          <a:solidFill>
+            <a:srgbClr val="FDF0DF"/>
+          </a:solidFill>
+          <a:ln>
+            <a:noFill/>
+          </a:ln>
+          <a:effectLst/>
+        </p:spPr>
+        <p:style>
+          <a:lnRef idx="1">
+            <a:schemeClr val="accent1"/>
+          </a:lnRef>
+          <a:fillRef idx="3">
+            <a:schemeClr val="accent1"/>
+          </a:fillRef>
+          <a:effectRef idx="2">
+            <a:schemeClr val="accent1"/>
+          </a:effectRef>
+          <a:fontRef idx="minor">
+            <a:schemeClr val="lt1"/>
+          </a:fontRef>
+        </p:style>
+        <p:txBody>
+          <a:bodyPr rtlCol="0" anchor="ctr"/>
+          <a:lstStyle/>
+          <a:p>
+            <a:pPr algn="ctr"/>
+          </a:p>
+        </p:txBody>
+      </p:sp>
+      <p:sp>
+        <p:nvSpPr>
+          <p:cNvPr id="113" name="TextBox 112"/>
+          <p:cNvSpPr txBox="1"/>
+          <p:nvPr/>
+        </p:nvSpPr>
+        <p:spPr>
+          <a:xfrm>
+            <a:off x="5461000" y="4540250"/>
+            <a:ext cx="330200" cy="114300"/>
+          </a:xfrm>
+          <a:prstGeom prst="rect">
+            <a:avLst/>
+          </a:prstGeom>
+          <a:noFill/>
+        </p:spPr>
+        <p:txBody>
+          <a:bodyPr wrap="square" lIns="0" rIns="0" tIns="0" bIns="0">
+            <a:spAutoFit/>
+          </a:bodyPr>
+          <a:lstStyle/>
+          <a:p>
+            <a:pPr algn="ctr">
+              <a:lnSpc>
+                <a:spcPct val="115000"/>
+              </a:lnSpc>
+            </a:pPr>
+            <a:r>
+              <a:rPr sz="650" b="1">
+                <a:solidFill>
+                  <a:srgbClr val="E07B00"/>
+                </a:solidFill>
+                <a:latin typeface="Inter"/>
+              </a:rPr>
+              <a:t>Q3</a:t>
+            </a:r>
+          </a:p>
+        </p:txBody>
+      </p:sp>
+      <p:sp>
+        <p:nvSpPr>
+          <p:cNvPr id="114" name="TextBox 113"/>
+          <p:cNvSpPr txBox="1"/>
+          <p:nvPr/>
+        </p:nvSpPr>
+        <p:spPr>
+          <a:xfrm>
+            <a:off x="8572500" y="4533900"/>
+            <a:ext cx="1460500" cy="152400"/>
+          </a:xfrm>
+          <a:prstGeom prst="rect">
+            <a:avLst/>
+          </a:prstGeom>
+          <a:noFill/>
+        </p:spPr>
+        <p:txBody>
+          <a:bodyPr wrap="square" lIns="0" rIns="0" tIns="0" bIns="0">
+            <a:spAutoFit/>
+          </a:bodyPr>
+          <a:lstStyle/>
+          <a:p>
+            <a:pPr algn="r">
+              <a:lnSpc>
+                <a:spcPct val="115000"/>
+              </a:lnSpc>
+            </a:pPr>
+            <a:r>
+              <a:rPr sz="950" b="0">
+                <a:solidFill>
                   <a:srgbClr val="002333"/>
                 </a:solidFill>
                 <a:latin typeface="Inter"/>
               </a:rPr>
-              <a:t>NL, publiek</a:t>
-            </a:r>
-          </a:p>
-        </p:txBody>
-      </p:sp>
-      <p:sp>
-        <p:nvSpPr>
-          <p:cNvPr id="19" name="TextBox 18"/>
-          <p:cNvSpPr txBox="1"/>
-          <p:nvPr/>
-        </p:nvSpPr>
-        <p:spPr>
-          <a:xfrm>
-            <a:off x="8445500" y="2260600"/>
-            <a:ext cx="1587500" cy="127000"/>
+              <a:t>€10.000</a:t>
+            </a:r>
+          </a:p>
+        </p:txBody>
+      </p:sp>
+      <p:sp>
+        <p:nvSpPr>
+          <p:cNvPr id="115" name="TextBox 114"/>
+          <p:cNvSpPr txBox="1"/>
+          <p:nvPr/>
+        </p:nvSpPr>
+        <p:spPr>
+          <a:xfrm>
+            <a:off x="10223500" y="4533900"/>
+            <a:ext cx="1206500" cy="152400"/>
           </a:xfrm>
           <a:prstGeom prst="rect">
             <a:avLst/>
@@ -10179,21 +14042,223 @@
                 </a:solidFill>
                 <a:latin typeface="Inter"/>
               </a:rPr>
-              <a:t>€300.000</a:t>
-            </a:r>
-          </a:p>
-        </p:txBody>
-      </p:sp>
-      <p:sp>
-        <p:nvSpPr>
-          <p:cNvPr id="20" name="TextBox 19"/>
-          <p:cNvSpPr txBox="1"/>
-          <p:nvPr/>
-        </p:nvSpPr>
-        <p:spPr>
-          <a:xfrm>
-            <a:off x="10160000" y="2260600"/>
-            <a:ext cx="1270000" cy="127000"/>
+              <a:t>10%</a:t>
+            </a:r>
+          </a:p>
+        </p:txBody>
+      </p:sp>
+      <p:sp>
+        <p:nvSpPr>
+          <p:cNvPr id="116" name="TextBox 115"/>
+          <p:cNvSpPr txBox="1"/>
+          <p:nvPr/>
+        </p:nvSpPr>
+        <p:spPr>
+          <a:xfrm>
+            <a:off x="762000" y="4699000"/>
+            <a:ext cx="3048000" cy="152400"/>
+          </a:xfrm>
+          <a:prstGeom prst="rect">
+            <a:avLst/>
+          </a:prstGeom>
+          <a:noFill/>
+        </p:spPr>
+        <p:txBody>
+          <a:bodyPr wrap="square" lIns="0" rIns="0" tIns="0" bIns="0">
+            <a:spAutoFit/>
+          </a:bodyPr>
+          <a:lstStyle/>
+          <a:p>
+            <a:pPr algn="l">
+              <a:lnSpc>
+                <a:spcPct val="115000"/>
+              </a:lnSpc>
+            </a:pPr>
+            <a:r>
+              <a:rPr sz="950" b="0">
+                <a:solidFill>
+                  <a:srgbClr val="002333"/>
+                </a:solidFill>
+                <a:latin typeface="Inter"/>
+              </a:rPr>
+              <a:t>Noordhoff</a:t>
+            </a:r>
+          </a:p>
+        </p:txBody>
+      </p:sp>
+      <p:sp>
+        <p:nvSpPr>
+          <p:cNvPr id="117" name="TextBox 116"/>
+          <p:cNvSpPr txBox="1"/>
+          <p:nvPr/>
+        </p:nvSpPr>
+        <p:spPr>
+          <a:xfrm>
+            <a:off x="3937000" y="4699000"/>
+            <a:ext cx="444500" cy="152400"/>
+          </a:xfrm>
+          <a:prstGeom prst="rect">
+            <a:avLst/>
+          </a:prstGeom>
+          <a:noFill/>
+        </p:spPr>
+        <p:txBody>
+          <a:bodyPr wrap="square" lIns="0" rIns="0" tIns="0" bIns="0">
+            <a:spAutoFit/>
+          </a:bodyPr>
+          <a:lstStyle/>
+          <a:p>
+            <a:pPr algn="l">
+              <a:lnSpc>
+                <a:spcPct val="115000"/>
+              </a:lnSpc>
+            </a:pPr>
+            <a:r>
+              <a:rPr sz="950" b="0">
+                <a:solidFill>
+                  <a:srgbClr val="5B7480"/>
+                </a:solidFill>
+                <a:latin typeface="Inter"/>
+              </a:rPr>
+              <a:t>—</a:t>
+            </a:r>
+          </a:p>
+        </p:txBody>
+      </p:sp>
+      <p:sp>
+        <p:nvSpPr>
+          <p:cNvPr id="118" name="TextBox 117"/>
+          <p:cNvSpPr txBox="1"/>
+          <p:nvPr/>
+        </p:nvSpPr>
+        <p:spPr>
+          <a:xfrm>
+            <a:off x="4508500" y="4699000"/>
+            <a:ext cx="825500" cy="152400"/>
+          </a:xfrm>
+          <a:prstGeom prst="rect">
+            <a:avLst/>
+          </a:prstGeom>
+          <a:noFill/>
+        </p:spPr>
+        <p:txBody>
+          <a:bodyPr wrap="square" lIns="0" rIns="0" tIns="0" bIns="0">
+            <a:spAutoFit/>
+          </a:bodyPr>
+          <a:lstStyle/>
+          <a:p>
+            <a:pPr algn="l">
+              <a:lnSpc>
+                <a:spcPct val="115000"/>
+              </a:lnSpc>
+            </a:pPr>
+            <a:r>
+              <a:rPr sz="800" b="0">
+                <a:solidFill>
+                  <a:srgbClr val="5B7480"/>
+                </a:solidFill>
+                <a:latin typeface="Inter"/>
+              </a:rPr>
+              <a:t>uitgever</a:t>
+            </a:r>
+          </a:p>
+        </p:txBody>
+      </p:sp>
+      <p:sp>
+        <p:nvSpPr>
+          <p:cNvPr id="119" name="Rounded Rectangle 118"/>
+          <p:cNvSpPr/>
+          <p:nvPr/>
+        </p:nvSpPr>
+        <p:spPr>
+          <a:xfrm>
+            <a:off x="5461000" y="4692650"/>
+            <a:ext cx="330200" cy="139700"/>
+          </a:xfrm>
+          <a:prstGeom prst="roundRect">
+            <a:avLst>
+              <a:gd name="adj" fmla="val 27272"/>
+            </a:avLst>
+          </a:prstGeom>
+          <a:solidFill>
+            <a:srgbClr val="FDF0DF"/>
+          </a:solidFill>
+          <a:ln>
+            <a:noFill/>
+          </a:ln>
+          <a:effectLst/>
+        </p:spPr>
+        <p:style>
+          <a:lnRef idx="1">
+            <a:schemeClr val="accent1"/>
+          </a:lnRef>
+          <a:fillRef idx="3">
+            <a:schemeClr val="accent1"/>
+          </a:fillRef>
+          <a:effectRef idx="2">
+            <a:schemeClr val="accent1"/>
+          </a:effectRef>
+          <a:fontRef idx="minor">
+            <a:schemeClr val="lt1"/>
+          </a:fontRef>
+        </p:style>
+        <p:txBody>
+          <a:bodyPr rtlCol="0" anchor="ctr"/>
+          <a:lstStyle/>
+          <a:p>
+            <a:pPr algn="ctr"/>
+          </a:p>
+        </p:txBody>
+      </p:sp>
+      <p:sp>
+        <p:nvSpPr>
+          <p:cNvPr id="120" name="TextBox 119"/>
+          <p:cNvSpPr txBox="1"/>
+          <p:nvPr/>
+        </p:nvSpPr>
+        <p:spPr>
+          <a:xfrm>
+            <a:off x="5461000" y="4705350"/>
+            <a:ext cx="330200" cy="114300"/>
+          </a:xfrm>
+          <a:prstGeom prst="rect">
+            <a:avLst/>
+          </a:prstGeom>
+          <a:noFill/>
+        </p:spPr>
+        <p:txBody>
+          <a:bodyPr wrap="square" lIns="0" rIns="0" tIns="0" bIns="0">
+            <a:spAutoFit/>
+          </a:bodyPr>
+          <a:lstStyle/>
+          <a:p>
+            <a:pPr algn="ctr">
+              <a:lnSpc>
+                <a:spcPct val="115000"/>
+              </a:lnSpc>
+            </a:pPr>
+            <a:r>
+              <a:rPr sz="650" b="1">
+                <a:solidFill>
+                  <a:srgbClr val="E07B00"/>
+                </a:solidFill>
+                <a:latin typeface="Inter"/>
+              </a:rPr>
+              <a:t>Q3</a:t>
+            </a:r>
+          </a:p>
+        </p:txBody>
+      </p:sp>
+      <p:sp>
+        <p:nvSpPr>
+          <p:cNvPr id="121" name="TextBox 120"/>
+          <p:cNvSpPr txBox="1"/>
+          <p:nvPr/>
+        </p:nvSpPr>
+        <p:spPr>
+          <a:xfrm>
+            <a:off x="8572500" y="4699000"/>
+            <a:ext cx="1460500" cy="152400"/>
           </a:xfrm>
           <a:prstGeom prst="rect">
             <a:avLst/>
@@ -10218,34 +14283,34 @@
                 </a:solidFill>
                 <a:latin typeface="Inter"/>
               </a:rPr>
-              <a:t>20%</a:t>
-            </a:r>
-          </a:p>
-        </p:txBody>
-      </p:sp>
-      <p:sp>
-        <p:nvSpPr>
-          <p:cNvPr id="21" name="TextBox 20"/>
-          <p:cNvSpPr txBox="1"/>
-          <p:nvPr/>
-        </p:nvSpPr>
-        <p:spPr>
-          <a:xfrm>
-            <a:off x="762000" y="2425700"/>
-            <a:ext cx="4826000" cy="127000"/>
-          </a:xfrm>
-          <a:prstGeom prst="rect">
-            <a:avLst/>
-          </a:prstGeom>
-          <a:noFill/>
-        </p:spPr>
-        <p:txBody>
-          <a:bodyPr wrap="square" lIns="0" rIns="0" tIns="0" bIns="0">
-            <a:spAutoFit/>
-          </a:bodyPr>
-          <a:lstStyle/>
-          <a:p>
-            <a:pPr algn="l">
+              <a:t>€10.000</a:t>
+            </a:r>
+          </a:p>
+        </p:txBody>
+      </p:sp>
+      <p:sp>
+        <p:nvSpPr>
+          <p:cNvPr id="122" name="TextBox 121"/>
+          <p:cNvSpPr txBox="1"/>
+          <p:nvPr/>
+        </p:nvSpPr>
+        <p:spPr>
+          <a:xfrm>
+            <a:off x="10223500" y="4699000"/>
+            <a:ext cx="1206500" cy="152400"/>
+          </a:xfrm>
+          <a:prstGeom prst="rect">
+            <a:avLst/>
+          </a:prstGeom>
+          <a:noFill/>
+        </p:spPr>
+        <p:txBody>
+          <a:bodyPr wrap="square" lIns="0" rIns="0" tIns="0" bIns="0">
+            <a:spAutoFit/>
+          </a:bodyPr>
+          <a:lstStyle/>
+          <a:p>
+            <a:pPr algn="r">
               <a:lnSpc>
                 <a:spcPct val="115000"/>
               </a:lnSpc>
@@ -10257,21 +14322,21 @@
                 </a:solidFill>
                 <a:latin typeface="Inter"/>
               </a:rPr>
-              <a:t>UADE</a:t>
-            </a:r>
-          </a:p>
-        </p:txBody>
-      </p:sp>
-      <p:sp>
-        <p:nvSpPr>
-          <p:cNvPr id="22" name="TextBox 21"/>
-          <p:cNvSpPr txBox="1"/>
-          <p:nvPr/>
-        </p:nvSpPr>
-        <p:spPr>
-          <a:xfrm>
-            <a:off x="5715000" y="2425700"/>
-            <a:ext cx="2540000" cy="127000"/>
+              <a:t>10%</a:t>
+            </a:r>
+          </a:p>
+        </p:txBody>
+      </p:sp>
+      <p:sp>
+        <p:nvSpPr>
+          <p:cNvPr id="123" name="TextBox 122"/>
+          <p:cNvSpPr txBox="1"/>
+          <p:nvPr/>
+        </p:nvSpPr>
+        <p:spPr>
+          <a:xfrm>
+            <a:off x="762000" y="4864100"/>
+            <a:ext cx="3048000" cy="152400"/>
           </a:xfrm>
           <a:prstGeom prst="rect">
             <a:avLst/>
@@ -10296,21 +14361,230 @@
                 </a:solidFill>
                 <a:latin typeface="Inter"/>
               </a:rPr>
-              <a:t>AR, privaat</a:t>
-            </a:r>
-          </a:p>
-        </p:txBody>
-      </p:sp>
-      <p:sp>
-        <p:nvSpPr>
-          <p:cNvPr id="23" name="TextBox 22"/>
-          <p:cNvSpPr txBox="1"/>
-          <p:nvPr/>
-        </p:nvSpPr>
-        <p:spPr>
-          <a:xfrm>
-            <a:off x="8445500" y="2425700"/>
-            <a:ext cx="1587500" cy="127000"/>
+              <a:t>Academica</a:t>
+            </a:r>
+          </a:p>
+        </p:txBody>
+      </p:sp>
+      <p:sp>
+        <p:nvSpPr>
+          <p:cNvPr id="124" name="TextBox 123"/>
+          <p:cNvSpPr txBox="1"/>
+          <p:nvPr/>
+        </p:nvSpPr>
+        <p:spPr>
+          <a:xfrm>
+            <a:off x="3937000" y="4864100"/>
+            <a:ext cx="444500" cy="152400"/>
+          </a:xfrm>
+          <a:prstGeom prst="rect">
+            <a:avLst/>
+          </a:prstGeom>
+          <a:noFill/>
+        </p:spPr>
+        <p:txBody>
+          <a:bodyPr wrap="square" lIns="0" rIns="0" tIns="0" bIns="0">
+            <a:spAutoFit/>
+          </a:bodyPr>
+          <a:lstStyle/>
+          <a:p>
+            <a:pPr algn="l">
+              <a:lnSpc>
+                <a:spcPct val="115000"/>
+              </a:lnSpc>
+            </a:pPr>
+            <a:r>
+              <a:rPr sz="950" b="0">
+                <a:solidFill>
+                  <a:srgbClr val="5B7480"/>
+                </a:solidFill>
+                <a:latin typeface="Inter"/>
+              </a:rPr>
+              <a:t>NL</a:t>
+            </a:r>
+          </a:p>
+        </p:txBody>
+      </p:sp>
+      <p:sp>
+        <p:nvSpPr>
+          <p:cNvPr id="125" name="Rounded Rectangle 124"/>
+          <p:cNvSpPr/>
+          <p:nvPr/>
+        </p:nvSpPr>
+        <p:spPr>
+          <a:xfrm>
+            <a:off x="4508500" y="4857750"/>
+            <a:ext cx="495300" cy="139700"/>
+          </a:xfrm>
+          <a:prstGeom prst="roundRect">
+            <a:avLst>
+              <a:gd name="adj" fmla="val 27272"/>
+            </a:avLst>
+          </a:prstGeom>
+          <a:solidFill>
+            <a:srgbClr val="E2FBEF"/>
+          </a:solidFill>
+          <a:ln>
+            <a:noFill/>
+          </a:ln>
+          <a:effectLst/>
+        </p:spPr>
+        <p:style>
+          <a:lnRef idx="1">
+            <a:schemeClr val="accent1"/>
+          </a:lnRef>
+          <a:fillRef idx="3">
+            <a:schemeClr val="accent1"/>
+          </a:fillRef>
+          <a:effectRef idx="2">
+            <a:schemeClr val="accent1"/>
+          </a:effectRef>
+          <a:fontRef idx="minor">
+            <a:schemeClr val="lt1"/>
+          </a:fontRef>
+        </p:style>
+        <p:txBody>
+          <a:bodyPr rtlCol="0" anchor="ctr"/>
+          <a:lstStyle/>
+          <a:p>
+            <a:pPr algn="ctr"/>
+          </a:p>
+        </p:txBody>
+      </p:sp>
+      <p:sp>
+        <p:nvSpPr>
+          <p:cNvPr id="126" name="TextBox 125"/>
+          <p:cNvSpPr txBox="1"/>
+          <p:nvPr/>
+        </p:nvSpPr>
+        <p:spPr>
+          <a:xfrm>
+            <a:off x="4508500" y="4870450"/>
+            <a:ext cx="495300" cy="114300"/>
+          </a:xfrm>
+          <a:prstGeom prst="rect">
+            <a:avLst/>
+          </a:prstGeom>
+          <a:noFill/>
+        </p:spPr>
+        <p:txBody>
+          <a:bodyPr wrap="square" lIns="0" rIns="0" tIns="0" bIns="0">
+            <a:spAutoFit/>
+          </a:bodyPr>
+          <a:lstStyle/>
+          <a:p>
+            <a:pPr algn="ctr">
+              <a:lnSpc>
+                <a:spcPct val="115000"/>
+              </a:lnSpc>
+            </a:pPr>
+            <a:r>
+              <a:rPr sz="650" b="1">
+                <a:solidFill>
+                  <a:srgbClr val="007B54"/>
+                </a:solidFill>
+                <a:latin typeface="Inter"/>
+              </a:rPr>
+              <a:t>PRIVÉ</a:t>
+            </a:r>
+          </a:p>
+        </p:txBody>
+      </p:sp>
+      <p:sp>
+        <p:nvSpPr>
+          <p:cNvPr id="127" name="Rounded Rectangle 126"/>
+          <p:cNvSpPr/>
+          <p:nvPr/>
+        </p:nvSpPr>
+        <p:spPr>
+          <a:xfrm>
+            <a:off x="5461000" y="4857750"/>
+            <a:ext cx="330200" cy="139700"/>
+          </a:xfrm>
+          <a:prstGeom prst="roundRect">
+            <a:avLst>
+              <a:gd name="adj" fmla="val 27272"/>
+            </a:avLst>
+          </a:prstGeom>
+          <a:solidFill>
+            <a:srgbClr val="FDF0DF"/>
+          </a:solidFill>
+          <a:ln>
+            <a:noFill/>
+          </a:ln>
+          <a:effectLst/>
+        </p:spPr>
+        <p:style>
+          <a:lnRef idx="1">
+            <a:schemeClr val="accent1"/>
+          </a:lnRef>
+          <a:fillRef idx="3">
+            <a:schemeClr val="accent1"/>
+          </a:fillRef>
+          <a:effectRef idx="2">
+            <a:schemeClr val="accent1"/>
+          </a:effectRef>
+          <a:fontRef idx="minor">
+            <a:schemeClr val="lt1"/>
+          </a:fontRef>
+        </p:style>
+        <p:txBody>
+          <a:bodyPr rtlCol="0" anchor="ctr"/>
+          <a:lstStyle/>
+          <a:p>
+            <a:pPr algn="ctr"/>
+          </a:p>
+        </p:txBody>
+      </p:sp>
+      <p:sp>
+        <p:nvSpPr>
+          <p:cNvPr id="128" name="TextBox 127"/>
+          <p:cNvSpPr txBox="1"/>
+          <p:nvPr/>
+        </p:nvSpPr>
+        <p:spPr>
+          <a:xfrm>
+            <a:off x="5461000" y="4870450"/>
+            <a:ext cx="330200" cy="114300"/>
+          </a:xfrm>
+          <a:prstGeom prst="rect">
+            <a:avLst/>
+          </a:prstGeom>
+          <a:noFill/>
+        </p:spPr>
+        <p:txBody>
+          <a:bodyPr wrap="square" lIns="0" rIns="0" tIns="0" bIns="0">
+            <a:spAutoFit/>
+          </a:bodyPr>
+          <a:lstStyle/>
+          <a:p>
+            <a:pPr algn="ctr">
+              <a:lnSpc>
+                <a:spcPct val="115000"/>
+              </a:lnSpc>
+            </a:pPr>
+            <a:r>
+              <a:rPr sz="650" b="1">
+                <a:solidFill>
+                  <a:srgbClr val="E07B00"/>
+                </a:solidFill>
+                <a:latin typeface="Inter"/>
+              </a:rPr>
+              <a:t>Q3</a:t>
+            </a:r>
+          </a:p>
+        </p:txBody>
+      </p:sp>
+      <p:sp>
+        <p:nvSpPr>
+          <p:cNvPr id="129" name="TextBox 128"/>
+          <p:cNvSpPr txBox="1"/>
+          <p:nvPr/>
+        </p:nvSpPr>
+        <p:spPr>
+          <a:xfrm>
+            <a:off x="8572500" y="4864100"/>
+            <a:ext cx="1460500" cy="152400"/>
           </a:xfrm>
           <a:prstGeom prst="rect">
             <a:avLst/>
@@ -10335,21 +14609,21 @@
                 </a:solidFill>
                 <a:latin typeface="Inter"/>
               </a:rPr>
-              <a:t>€250.000</a:t>
-            </a:r>
-          </a:p>
-        </p:txBody>
-      </p:sp>
-      <p:sp>
-        <p:nvSpPr>
-          <p:cNvPr id="24" name="TextBox 23"/>
-          <p:cNvSpPr txBox="1"/>
-          <p:nvPr/>
-        </p:nvSpPr>
-        <p:spPr>
-          <a:xfrm>
-            <a:off x="10160000" y="2425700"/>
-            <a:ext cx="1270000" cy="127000"/>
+              <a:t>€7.500</a:t>
+            </a:r>
+          </a:p>
+        </p:txBody>
+      </p:sp>
+      <p:sp>
+        <p:nvSpPr>
+          <p:cNvPr id="130" name="TextBox 129"/>
+          <p:cNvSpPr txBox="1"/>
+          <p:nvPr/>
+        </p:nvSpPr>
+        <p:spPr>
+          <a:xfrm>
+            <a:off x="10223500" y="4864100"/>
+            <a:ext cx="1206500" cy="152400"/>
           </a:xfrm>
           <a:prstGeom prst="rect">
             <a:avLst/>
@@ -10374,162 +14648,6 @@
                 </a:solidFill>
                 <a:latin typeface="Inter"/>
               </a:rPr>
-              <a:t>20%</a:t>
-            </a:r>
-          </a:p>
-        </p:txBody>
-      </p:sp>
-      <p:sp>
-        <p:nvSpPr>
-          <p:cNvPr id="25" name="TextBox 24"/>
-          <p:cNvSpPr txBox="1"/>
-          <p:nvPr/>
-        </p:nvSpPr>
-        <p:spPr>
-          <a:xfrm>
-            <a:off x="762000" y="2590800"/>
-            <a:ext cx="4826000" cy="127000"/>
-          </a:xfrm>
-          <a:prstGeom prst="rect">
-            <a:avLst/>
-          </a:prstGeom>
-          <a:noFill/>
-        </p:spPr>
-        <p:txBody>
-          <a:bodyPr wrap="square" lIns="0" rIns="0" tIns="0" bIns="0">
-            <a:spAutoFit/>
-          </a:bodyPr>
-          <a:lstStyle/>
-          <a:p>
-            <a:pPr algn="l">
-              <a:lnSpc>
-                <a:spcPct val="115000"/>
-              </a:lnSpc>
-            </a:pPr>
-            <a:r>
-              <a:rPr sz="950" b="0">
-                <a:solidFill>
-                  <a:srgbClr val="002333"/>
-                </a:solidFill>
-                <a:latin typeface="Inter"/>
-              </a:rPr>
-              <a:t>Windesheim</a:t>
-            </a:r>
-          </a:p>
-        </p:txBody>
-      </p:sp>
-      <p:sp>
-        <p:nvSpPr>
-          <p:cNvPr id="26" name="TextBox 25"/>
-          <p:cNvSpPr txBox="1"/>
-          <p:nvPr/>
-        </p:nvSpPr>
-        <p:spPr>
-          <a:xfrm>
-            <a:off x="5715000" y="2590800"/>
-            <a:ext cx="2540000" cy="127000"/>
-          </a:xfrm>
-          <a:prstGeom prst="rect">
-            <a:avLst/>
-          </a:prstGeom>
-          <a:noFill/>
-        </p:spPr>
-        <p:txBody>
-          <a:bodyPr wrap="square" lIns="0" rIns="0" tIns="0" bIns="0">
-            <a:spAutoFit/>
-          </a:bodyPr>
-          <a:lstStyle/>
-          <a:p>
-            <a:pPr algn="l">
-              <a:lnSpc>
-                <a:spcPct val="115000"/>
-              </a:lnSpc>
-            </a:pPr>
-            <a:r>
-              <a:rPr sz="950" b="0">
-                <a:solidFill>
-                  <a:srgbClr val="002333"/>
-                </a:solidFill>
-                <a:latin typeface="Inter"/>
-              </a:rPr>
-              <a:t>NL, publiek</a:t>
-            </a:r>
-          </a:p>
-        </p:txBody>
-      </p:sp>
-      <p:sp>
-        <p:nvSpPr>
-          <p:cNvPr id="27" name="TextBox 26"/>
-          <p:cNvSpPr txBox="1"/>
-          <p:nvPr/>
-        </p:nvSpPr>
-        <p:spPr>
-          <a:xfrm>
-            <a:off x="8445500" y="2590800"/>
-            <a:ext cx="1587500" cy="127000"/>
-          </a:xfrm>
-          <a:prstGeom prst="rect">
-            <a:avLst/>
-          </a:prstGeom>
-          <a:noFill/>
-        </p:spPr>
-        <p:txBody>
-          <a:bodyPr wrap="square" lIns="0" rIns="0" tIns="0" bIns="0">
-            <a:spAutoFit/>
-          </a:bodyPr>
-          <a:lstStyle/>
-          <a:p>
-            <a:pPr algn="r">
-              <a:lnSpc>
-                <a:spcPct val="115000"/>
-              </a:lnSpc>
-            </a:pPr>
-            <a:r>
-              <a:rPr sz="950" b="0">
-                <a:solidFill>
-                  <a:srgbClr val="002333"/>
-                </a:solidFill>
-                <a:latin typeface="Inter"/>
-              </a:rPr>
-              <a:t>€200.000</a:t>
-            </a:r>
-          </a:p>
-        </p:txBody>
-      </p:sp>
-      <p:sp>
-        <p:nvSpPr>
-          <p:cNvPr id="28" name="TextBox 27"/>
-          <p:cNvSpPr txBox="1"/>
-          <p:nvPr/>
-        </p:nvSpPr>
-        <p:spPr>
-          <a:xfrm>
-            <a:off x="10160000" y="2590800"/>
-            <a:ext cx="1270000" cy="127000"/>
-          </a:xfrm>
-          <a:prstGeom prst="rect">
-            <a:avLst/>
-          </a:prstGeom>
-          <a:noFill/>
-        </p:spPr>
-        <p:txBody>
-          <a:bodyPr wrap="square" lIns="0" rIns="0" tIns="0" bIns="0">
-            <a:spAutoFit/>
-          </a:bodyPr>
-          <a:lstStyle/>
-          <a:p>
-            <a:pPr algn="r">
-              <a:lnSpc>
-                <a:spcPct val="115000"/>
-              </a:lnSpc>
-            </a:pPr>
-            <a:r>
-              <a:rPr sz="950" b="0">
-                <a:solidFill>
-                  <a:srgbClr val="002333"/>
-                </a:solidFill>
-                <a:latin typeface="Inter"/>
-              </a:rPr>
               <a:t>10%</a:t>
             </a:r>
           </a:p>
@@ -10537,2197 +14655,13 @@
       </p:sp>
       <p:sp>
         <p:nvSpPr>
-          <p:cNvPr id="29" name="TextBox 28"/>
-          <p:cNvSpPr txBox="1"/>
-          <p:nvPr/>
-        </p:nvSpPr>
-        <p:spPr>
-          <a:xfrm>
-            <a:off x="762000" y="2755900"/>
-            <a:ext cx="4826000" cy="127000"/>
-          </a:xfrm>
-          <a:prstGeom prst="rect">
-            <a:avLst/>
-          </a:prstGeom>
-          <a:noFill/>
-        </p:spPr>
-        <p:txBody>
-          <a:bodyPr wrap="square" lIns="0" rIns="0" tIns="0" bIns="0">
-            <a:spAutoFit/>
-          </a:bodyPr>
-          <a:lstStyle/>
-          <a:p>
-            <a:pPr algn="l">
-              <a:lnSpc>
-                <a:spcPct val="115000"/>
-              </a:lnSpc>
-            </a:pPr>
-            <a:r>
-              <a:rPr sz="950" b="0">
-                <a:solidFill>
-                  <a:srgbClr val="002333"/>
-                </a:solidFill>
-                <a:latin typeface="Inter"/>
-              </a:rPr>
-              <a:t>Bristol University</a:t>
-            </a:r>
-          </a:p>
-        </p:txBody>
-      </p:sp>
-      <p:sp>
-        <p:nvSpPr>
-          <p:cNvPr id="30" name="TextBox 29"/>
-          <p:cNvSpPr txBox="1"/>
-          <p:nvPr/>
-        </p:nvSpPr>
-        <p:spPr>
-          <a:xfrm>
-            <a:off x="5715000" y="2755900"/>
-            <a:ext cx="2540000" cy="127000"/>
-          </a:xfrm>
-          <a:prstGeom prst="rect">
-            <a:avLst/>
-          </a:prstGeom>
-          <a:noFill/>
-        </p:spPr>
-        <p:txBody>
-          <a:bodyPr wrap="square" lIns="0" rIns="0" tIns="0" bIns="0">
-            <a:spAutoFit/>
-          </a:bodyPr>
-          <a:lstStyle/>
-          <a:p>
-            <a:pPr algn="l">
-              <a:lnSpc>
-                <a:spcPct val="115000"/>
-              </a:lnSpc>
-            </a:pPr>
-            <a:r>
-              <a:rPr sz="950" b="0">
-                <a:solidFill>
-                  <a:srgbClr val="002333"/>
-                </a:solidFill>
-                <a:latin typeface="Inter"/>
-              </a:rPr>
-              <a:t>UK, publiek</a:t>
-            </a:r>
-          </a:p>
-        </p:txBody>
-      </p:sp>
-      <p:sp>
-        <p:nvSpPr>
-          <p:cNvPr id="31" name="TextBox 30"/>
-          <p:cNvSpPr txBox="1"/>
-          <p:nvPr/>
-        </p:nvSpPr>
-        <p:spPr>
-          <a:xfrm>
-            <a:off x="8445500" y="2755900"/>
-            <a:ext cx="1587500" cy="127000"/>
-          </a:xfrm>
-          <a:prstGeom prst="rect">
-            <a:avLst/>
-          </a:prstGeom>
-          <a:noFill/>
-        </p:spPr>
-        <p:txBody>
-          <a:bodyPr wrap="square" lIns="0" rIns="0" tIns="0" bIns="0">
-            <a:spAutoFit/>
-          </a:bodyPr>
-          <a:lstStyle/>
-          <a:p>
-            <a:pPr algn="r">
-              <a:lnSpc>
-                <a:spcPct val="115000"/>
-              </a:lnSpc>
-            </a:pPr>
-            <a:r>
-              <a:rPr sz="950" b="0">
-                <a:solidFill>
-                  <a:srgbClr val="002333"/>
-                </a:solidFill>
-                <a:latin typeface="Inter"/>
-              </a:rPr>
-              <a:t>€200.000</a:t>
-            </a:r>
-          </a:p>
-        </p:txBody>
-      </p:sp>
-      <p:sp>
-        <p:nvSpPr>
-          <p:cNvPr id="32" name="TextBox 31"/>
-          <p:cNvSpPr txBox="1"/>
-          <p:nvPr/>
-        </p:nvSpPr>
-        <p:spPr>
-          <a:xfrm>
-            <a:off x="10160000" y="2755900"/>
-            <a:ext cx="1270000" cy="127000"/>
-          </a:xfrm>
-          <a:prstGeom prst="rect">
-            <a:avLst/>
-          </a:prstGeom>
-          <a:noFill/>
-        </p:spPr>
-        <p:txBody>
-          <a:bodyPr wrap="square" lIns="0" rIns="0" tIns="0" bIns="0">
-            <a:spAutoFit/>
-          </a:bodyPr>
-          <a:lstStyle/>
-          <a:p>
-            <a:pPr algn="r">
-              <a:lnSpc>
-                <a:spcPct val="115000"/>
-              </a:lnSpc>
-            </a:pPr>
-            <a:r>
-              <a:rPr sz="950" b="0">
-                <a:solidFill>
-                  <a:srgbClr val="002333"/>
-                </a:solidFill>
-                <a:latin typeface="Inter"/>
-              </a:rPr>
-              <a:t>10%</a:t>
-            </a:r>
-          </a:p>
-        </p:txBody>
-      </p:sp>
-      <p:sp>
-        <p:nvSpPr>
-          <p:cNvPr id="33" name="TextBox 32"/>
-          <p:cNvSpPr txBox="1"/>
-          <p:nvPr/>
-        </p:nvSpPr>
-        <p:spPr>
-          <a:xfrm>
-            <a:off x="762000" y="2921000"/>
-            <a:ext cx="4826000" cy="127000"/>
-          </a:xfrm>
-          <a:prstGeom prst="rect">
-            <a:avLst/>
-          </a:prstGeom>
-          <a:noFill/>
-        </p:spPr>
-        <p:txBody>
-          <a:bodyPr wrap="square" lIns="0" rIns="0" tIns="0" bIns="0">
-            <a:spAutoFit/>
-          </a:bodyPr>
-          <a:lstStyle/>
-          <a:p>
-            <a:pPr algn="l">
-              <a:lnSpc>
-                <a:spcPct val="115000"/>
-              </a:lnSpc>
-            </a:pPr>
-            <a:r>
-              <a:rPr sz="950" b="0">
-                <a:solidFill>
-                  <a:srgbClr val="002333"/>
-                </a:solidFill>
-                <a:latin typeface="Inter"/>
-              </a:rPr>
-              <a:t>Concorde Career College</a:t>
-            </a:r>
-          </a:p>
-        </p:txBody>
-      </p:sp>
-      <p:sp>
-        <p:nvSpPr>
-          <p:cNvPr id="34" name="TextBox 33"/>
-          <p:cNvSpPr txBox="1"/>
-          <p:nvPr/>
-        </p:nvSpPr>
-        <p:spPr>
-          <a:xfrm>
-            <a:off x="5715000" y="2921000"/>
-            <a:ext cx="2540000" cy="127000"/>
-          </a:xfrm>
-          <a:prstGeom prst="rect">
-            <a:avLst/>
-          </a:prstGeom>
-          <a:noFill/>
-        </p:spPr>
-        <p:txBody>
-          <a:bodyPr wrap="square" lIns="0" rIns="0" tIns="0" bIns="0">
-            <a:spAutoFit/>
-          </a:bodyPr>
-          <a:lstStyle/>
-          <a:p>
-            <a:pPr algn="l">
-              <a:lnSpc>
-                <a:spcPct val="115000"/>
-              </a:lnSpc>
-            </a:pPr>
-            <a:r>
-              <a:rPr sz="950" b="0">
-                <a:solidFill>
-                  <a:srgbClr val="002333"/>
-                </a:solidFill>
-                <a:latin typeface="Inter"/>
-              </a:rPr>
-              <a:t>US, privaat</a:t>
-            </a:r>
-          </a:p>
-        </p:txBody>
-      </p:sp>
-      <p:sp>
-        <p:nvSpPr>
-          <p:cNvPr id="35" name="TextBox 34"/>
-          <p:cNvSpPr txBox="1"/>
-          <p:nvPr/>
-        </p:nvSpPr>
-        <p:spPr>
-          <a:xfrm>
-            <a:off x="8445500" y="2921000"/>
-            <a:ext cx="1587500" cy="127000"/>
-          </a:xfrm>
-          <a:prstGeom prst="rect">
-            <a:avLst/>
-          </a:prstGeom>
-          <a:noFill/>
-        </p:spPr>
-        <p:txBody>
-          <a:bodyPr wrap="square" lIns="0" rIns="0" tIns="0" bIns="0">
-            <a:spAutoFit/>
-          </a:bodyPr>
-          <a:lstStyle/>
-          <a:p>
-            <a:pPr algn="r">
-              <a:lnSpc>
-                <a:spcPct val="115000"/>
-              </a:lnSpc>
-            </a:pPr>
-            <a:r>
-              <a:rPr sz="950" b="0">
-                <a:solidFill>
-                  <a:srgbClr val="002333"/>
-                </a:solidFill>
-                <a:latin typeface="Inter"/>
-              </a:rPr>
-              <a:t>€200.000</a:t>
-            </a:r>
-          </a:p>
-        </p:txBody>
-      </p:sp>
-      <p:sp>
-        <p:nvSpPr>
-          <p:cNvPr id="36" name="TextBox 35"/>
-          <p:cNvSpPr txBox="1"/>
-          <p:nvPr/>
-        </p:nvSpPr>
-        <p:spPr>
-          <a:xfrm>
-            <a:off x="10160000" y="2921000"/>
-            <a:ext cx="1270000" cy="127000"/>
-          </a:xfrm>
-          <a:prstGeom prst="rect">
-            <a:avLst/>
-          </a:prstGeom>
-          <a:noFill/>
-        </p:spPr>
-        <p:txBody>
-          <a:bodyPr wrap="square" lIns="0" rIns="0" tIns="0" bIns="0">
-            <a:spAutoFit/>
-          </a:bodyPr>
-          <a:lstStyle/>
-          <a:p>
-            <a:pPr algn="r">
-              <a:lnSpc>
-                <a:spcPct val="115000"/>
-              </a:lnSpc>
-            </a:pPr>
-            <a:r>
-              <a:rPr sz="950" b="0">
-                <a:solidFill>
-                  <a:srgbClr val="002333"/>
-                </a:solidFill>
-                <a:latin typeface="Inter"/>
-              </a:rPr>
-              <a:t>15%</a:t>
-            </a:r>
-          </a:p>
-        </p:txBody>
-      </p:sp>
-      <p:sp>
-        <p:nvSpPr>
-          <p:cNvPr id="37" name="TextBox 36"/>
-          <p:cNvSpPr txBox="1"/>
-          <p:nvPr/>
-        </p:nvSpPr>
-        <p:spPr>
-          <a:xfrm>
-            <a:off x="762000" y="3086100"/>
-            <a:ext cx="4826000" cy="127000"/>
-          </a:xfrm>
-          <a:prstGeom prst="rect">
-            <a:avLst/>
-          </a:prstGeom>
-          <a:noFill/>
-        </p:spPr>
-        <p:txBody>
-          <a:bodyPr wrap="square" lIns="0" rIns="0" tIns="0" bIns="0">
-            <a:spAutoFit/>
-          </a:bodyPr>
-          <a:lstStyle/>
-          <a:p>
-            <a:pPr algn="l">
-              <a:lnSpc>
-                <a:spcPct val="115000"/>
-              </a:lnSpc>
-            </a:pPr>
-            <a:r>
-              <a:rPr sz="950" b="0">
-                <a:solidFill>
-                  <a:srgbClr val="002333"/>
-                </a:solidFill>
-                <a:latin typeface="Inter"/>
-              </a:rPr>
-              <a:t>Goldsmiths</a:t>
-            </a:r>
-          </a:p>
-        </p:txBody>
-      </p:sp>
-      <p:sp>
-        <p:nvSpPr>
-          <p:cNvPr id="38" name="TextBox 37"/>
-          <p:cNvSpPr txBox="1"/>
-          <p:nvPr/>
-        </p:nvSpPr>
-        <p:spPr>
-          <a:xfrm>
-            <a:off x="5715000" y="3086100"/>
-            <a:ext cx="2540000" cy="127000"/>
-          </a:xfrm>
-          <a:prstGeom prst="rect">
-            <a:avLst/>
-          </a:prstGeom>
-          <a:noFill/>
-        </p:spPr>
-        <p:txBody>
-          <a:bodyPr wrap="square" lIns="0" rIns="0" tIns="0" bIns="0">
-            <a:spAutoFit/>
-          </a:bodyPr>
-          <a:lstStyle/>
-          <a:p>
-            <a:pPr algn="l">
-              <a:lnSpc>
-                <a:spcPct val="115000"/>
-              </a:lnSpc>
-            </a:pPr>
-            <a:r>
-              <a:rPr sz="950" b="0">
-                <a:solidFill>
-                  <a:srgbClr val="002333"/>
-                </a:solidFill>
-                <a:latin typeface="Inter"/>
-              </a:rPr>
-              <a:t>UK, publiek</a:t>
-            </a:r>
-          </a:p>
-        </p:txBody>
-      </p:sp>
-      <p:sp>
-        <p:nvSpPr>
-          <p:cNvPr id="39" name="TextBox 38"/>
-          <p:cNvSpPr txBox="1"/>
-          <p:nvPr/>
-        </p:nvSpPr>
-        <p:spPr>
-          <a:xfrm>
-            <a:off x="8445500" y="3086100"/>
-            <a:ext cx="1587500" cy="127000"/>
-          </a:xfrm>
-          <a:prstGeom prst="rect">
-            <a:avLst/>
-          </a:prstGeom>
-          <a:noFill/>
-        </p:spPr>
-        <p:txBody>
-          <a:bodyPr wrap="square" lIns="0" rIns="0" tIns="0" bIns="0">
-            <a:spAutoFit/>
-          </a:bodyPr>
-          <a:lstStyle/>
-          <a:p>
-            <a:pPr algn="r">
-              <a:lnSpc>
-                <a:spcPct val="115000"/>
-              </a:lnSpc>
-            </a:pPr>
-            <a:r>
-              <a:rPr sz="950" b="0">
-                <a:solidFill>
-                  <a:srgbClr val="002333"/>
-                </a:solidFill>
-                <a:latin typeface="Inter"/>
-              </a:rPr>
-              <a:t>€60.000</a:t>
-            </a:r>
-          </a:p>
-        </p:txBody>
-      </p:sp>
-      <p:sp>
-        <p:nvSpPr>
-          <p:cNvPr id="40" name="TextBox 39"/>
-          <p:cNvSpPr txBox="1"/>
-          <p:nvPr/>
-        </p:nvSpPr>
-        <p:spPr>
-          <a:xfrm>
-            <a:off x="10160000" y="3086100"/>
-            <a:ext cx="1270000" cy="127000"/>
-          </a:xfrm>
-          <a:prstGeom prst="rect">
-            <a:avLst/>
-          </a:prstGeom>
-          <a:noFill/>
-        </p:spPr>
-        <p:txBody>
-          <a:bodyPr wrap="square" lIns="0" rIns="0" tIns="0" bIns="0">
-            <a:spAutoFit/>
-          </a:bodyPr>
-          <a:lstStyle/>
-          <a:p>
-            <a:pPr algn="r">
-              <a:lnSpc>
-                <a:spcPct val="115000"/>
-              </a:lnSpc>
-            </a:pPr>
-            <a:r>
-              <a:rPr sz="950" b="0">
-                <a:solidFill>
-                  <a:srgbClr val="002333"/>
-                </a:solidFill>
-                <a:latin typeface="Inter"/>
-              </a:rPr>
-              <a:t>30%</a:t>
-            </a:r>
-          </a:p>
-        </p:txBody>
-      </p:sp>
-      <p:sp>
-        <p:nvSpPr>
-          <p:cNvPr id="41" name="TextBox 40"/>
-          <p:cNvSpPr txBox="1"/>
-          <p:nvPr/>
-        </p:nvSpPr>
-        <p:spPr>
-          <a:xfrm>
-            <a:off x="762000" y="3251200"/>
-            <a:ext cx="4826000" cy="127000"/>
-          </a:xfrm>
-          <a:prstGeom prst="rect">
-            <a:avLst/>
-          </a:prstGeom>
-          <a:noFill/>
-        </p:spPr>
-        <p:txBody>
-          <a:bodyPr wrap="square" lIns="0" rIns="0" tIns="0" bIns="0">
-            <a:spAutoFit/>
-          </a:bodyPr>
-          <a:lstStyle/>
-          <a:p>
-            <a:pPr algn="l">
-              <a:lnSpc>
-                <a:spcPct val="115000"/>
-              </a:lnSpc>
-            </a:pPr>
-            <a:r>
-              <a:rPr sz="950" b="0">
-                <a:solidFill>
-                  <a:srgbClr val="002333"/>
-                </a:solidFill>
-                <a:latin typeface="Inter"/>
-              </a:rPr>
-              <a:t>Haagse Hogeschool</a:t>
-            </a:r>
-          </a:p>
-        </p:txBody>
-      </p:sp>
-      <p:sp>
-        <p:nvSpPr>
-          <p:cNvPr id="42" name="TextBox 41"/>
-          <p:cNvSpPr txBox="1"/>
-          <p:nvPr/>
-        </p:nvSpPr>
-        <p:spPr>
-          <a:xfrm>
-            <a:off x="5715000" y="3251200"/>
-            <a:ext cx="2540000" cy="127000"/>
-          </a:xfrm>
-          <a:prstGeom prst="rect">
-            <a:avLst/>
-          </a:prstGeom>
-          <a:noFill/>
-        </p:spPr>
-        <p:txBody>
-          <a:bodyPr wrap="square" lIns="0" rIns="0" tIns="0" bIns="0">
-            <a:spAutoFit/>
-          </a:bodyPr>
-          <a:lstStyle/>
-          <a:p>
-            <a:pPr algn="l">
-              <a:lnSpc>
-                <a:spcPct val="115000"/>
-              </a:lnSpc>
-            </a:pPr>
-            <a:r>
-              <a:rPr sz="950" b="0">
-                <a:solidFill>
-                  <a:srgbClr val="002333"/>
-                </a:solidFill>
-                <a:latin typeface="Inter"/>
-              </a:rPr>
-              <a:t>NL, publiek</a:t>
-            </a:r>
-          </a:p>
-        </p:txBody>
-      </p:sp>
-      <p:sp>
-        <p:nvSpPr>
-          <p:cNvPr id="43" name="TextBox 42"/>
-          <p:cNvSpPr txBox="1"/>
-          <p:nvPr/>
-        </p:nvSpPr>
-        <p:spPr>
-          <a:xfrm>
-            <a:off x="8445500" y="3251200"/>
-            <a:ext cx="1587500" cy="127000"/>
-          </a:xfrm>
-          <a:prstGeom prst="rect">
-            <a:avLst/>
-          </a:prstGeom>
-          <a:noFill/>
-        </p:spPr>
-        <p:txBody>
-          <a:bodyPr wrap="square" lIns="0" rIns="0" tIns="0" bIns="0">
-            <a:spAutoFit/>
-          </a:bodyPr>
-          <a:lstStyle/>
-          <a:p>
-            <a:pPr algn="r">
-              <a:lnSpc>
-                <a:spcPct val="115000"/>
-              </a:lnSpc>
-            </a:pPr>
-            <a:r>
-              <a:rPr sz="950" b="0">
-                <a:solidFill>
-                  <a:srgbClr val="002333"/>
-                </a:solidFill>
-                <a:latin typeface="Inter"/>
-              </a:rPr>
-              <a:t>€20.000</a:t>
-            </a:r>
-          </a:p>
-        </p:txBody>
-      </p:sp>
-      <p:sp>
-        <p:nvSpPr>
-          <p:cNvPr id="44" name="TextBox 43"/>
-          <p:cNvSpPr txBox="1"/>
-          <p:nvPr/>
-        </p:nvSpPr>
-        <p:spPr>
-          <a:xfrm>
-            <a:off x="10160000" y="3251200"/>
-            <a:ext cx="1270000" cy="127000"/>
-          </a:xfrm>
-          <a:prstGeom prst="rect">
-            <a:avLst/>
-          </a:prstGeom>
-          <a:noFill/>
-        </p:spPr>
-        <p:txBody>
-          <a:bodyPr wrap="square" lIns="0" rIns="0" tIns="0" bIns="0">
-            <a:spAutoFit/>
-          </a:bodyPr>
-          <a:lstStyle/>
-          <a:p>
-            <a:pPr algn="r">
-              <a:lnSpc>
-                <a:spcPct val="115000"/>
-              </a:lnSpc>
-            </a:pPr>
-            <a:r>
-              <a:rPr sz="950" b="0">
-                <a:solidFill>
-                  <a:srgbClr val="002333"/>
-                </a:solidFill>
-                <a:latin typeface="Inter"/>
-              </a:rPr>
-              <a:t>50%</a:t>
-            </a:r>
-          </a:p>
-        </p:txBody>
-      </p:sp>
-      <p:sp>
-        <p:nvSpPr>
-          <p:cNvPr id="45" name="TextBox 44"/>
-          <p:cNvSpPr txBox="1"/>
-          <p:nvPr/>
-        </p:nvSpPr>
-        <p:spPr>
-          <a:xfrm>
-            <a:off x="762000" y="3416300"/>
-            <a:ext cx="4826000" cy="127000"/>
-          </a:xfrm>
-          <a:prstGeom prst="rect">
-            <a:avLst/>
-          </a:prstGeom>
-          <a:noFill/>
-        </p:spPr>
-        <p:txBody>
-          <a:bodyPr wrap="square" lIns="0" rIns="0" tIns="0" bIns="0">
-            <a:spAutoFit/>
-          </a:bodyPr>
-          <a:lstStyle/>
-          <a:p>
-            <a:pPr algn="l">
-              <a:lnSpc>
-                <a:spcPct val="115000"/>
-              </a:lnSpc>
-            </a:pPr>
-            <a:r>
-              <a:rPr sz="950" b="0">
-                <a:solidFill>
-                  <a:srgbClr val="002333"/>
-                </a:solidFill>
-                <a:latin typeface="Inter"/>
-              </a:rPr>
-              <a:t>Breederode Hogeschool</a:t>
-            </a:r>
-          </a:p>
-        </p:txBody>
-      </p:sp>
-      <p:sp>
-        <p:nvSpPr>
-          <p:cNvPr id="46" name="TextBox 45"/>
-          <p:cNvSpPr txBox="1"/>
-          <p:nvPr/>
-        </p:nvSpPr>
-        <p:spPr>
-          <a:xfrm>
-            <a:off x="5715000" y="3416300"/>
-            <a:ext cx="2540000" cy="127000"/>
-          </a:xfrm>
-          <a:prstGeom prst="rect">
-            <a:avLst/>
-          </a:prstGeom>
-          <a:noFill/>
-        </p:spPr>
-        <p:txBody>
-          <a:bodyPr wrap="square" lIns="0" rIns="0" tIns="0" bIns="0">
-            <a:spAutoFit/>
-          </a:bodyPr>
-          <a:lstStyle/>
-          <a:p>
-            <a:pPr algn="l">
-              <a:lnSpc>
-                <a:spcPct val="115000"/>
-              </a:lnSpc>
-            </a:pPr>
-            <a:r>
-              <a:rPr sz="950" b="0">
-                <a:solidFill>
-                  <a:srgbClr val="002333"/>
-                </a:solidFill>
-                <a:latin typeface="Inter"/>
-              </a:rPr>
-              <a:t>NL, privaat</a:t>
-            </a:r>
-          </a:p>
-        </p:txBody>
-      </p:sp>
-      <p:sp>
-        <p:nvSpPr>
-          <p:cNvPr id="47" name="TextBox 46"/>
-          <p:cNvSpPr txBox="1"/>
-          <p:nvPr/>
-        </p:nvSpPr>
-        <p:spPr>
-          <a:xfrm>
-            <a:off x="8445500" y="3416300"/>
-            <a:ext cx="1587500" cy="127000"/>
-          </a:xfrm>
-          <a:prstGeom prst="rect">
-            <a:avLst/>
-          </a:prstGeom>
-          <a:noFill/>
-        </p:spPr>
-        <p:txBody>
-          <a:bodyPr wrap="square" lIns="0" rIns="0" tIns="0" bIns="0">
-            <a:spAutoFit/>
-          </a:bodyPr>
-          <a:lstStyle/>
-          <a:p>
-            <a:pPr algn="r">
-              <a:lnSpc>
-                <a:spcPct val="115000"/>
-              </a:lnSpc>
-            </a:pPr>
-            <a:r>
-              <a:rPr sz="950" b="0">
-                <a:solidFill>
-                  <a:srgbClr val="002333"/>
-                </a:solidFill>
-                <a:latin typeface="Inter"/>
-              </a:rPr>
-              <a:t>€20.000</a:t>
-            </a:r>
-          </a:p>
-        </p:txBody>
-      </p:sp>
-      <p:sp>
-        <p:nvSpPr>
-          <p:cNvPr id="48" name="TextBox 47"/>
-          <p:cNvSpPr txBox="1"/>
-          <p:nvPr/>
-        </p:nvSpPr>
-        <p:spPr>
-          <a:xfrm>
-            <a:off x="10160000" y="3416300"/>
-            <a:ext cx="1270000" cy="127000"/>
-          </a:xfrm>
-          <a:prstGeom prst="rect">
-            <a:avLst/>
-          </a:prstGeom>
-          <a:noFill/>
-        </p:spPr>
-        <p:txBody>
-          <a:bodyPr wrap="square" lIns="0" rIns="0" tIns="0" bIns="0">
-            <a:spAutoFit/>
-          </a:bodyPr>
-          <a:lstStyle/>
-          <a:p>
-            <a:pPr algn="r">
-              <a:lnSpc>
-                <a:spcPct val="115000"/>
-              </a:lnSpc>
-            </a:pPr>
-            <a:r>
-              <a:rPr sz="950" b="0">
-                <a:solidFill>
-                  <a:srgbClr val="002333"/>
-                </a:solidFill>
-                <a:latin typeface="Inter"/>
-              </a:rPr>
-              <a:t>70%</a:t>
-            </a:r>
-          </a:p>
-        </p:txBody>
-      </p:sp>
-      <p:sp>
-        <p:nvSpPr>
-          <p:cNvPr id="49" name="TextBox 48"/>
-          <p:cNvSpPr txBox="1"/>
-          <p:nvPr/>
-        </p:nvSpPr>
-        <p:spPr>
-          <a:xfrm>
-            <a:off x="762000" y="3581400"/>
-            <a:ext cx="4826000" cy="127000"/>
-          </a:xfrm>
-          <a:prstGeom prst="rect">
-            <a:avLst/>
-          </a:prstGeom>
-          <a:noFill/>
-        </p:spPr>
-        <p:txBody>
-          <a:bodyPr wrap="square" lIns="0" rIns="0" tIns="0" bIns="0">
-            <a:spAutoFit/>
-          </a:bodyPr>
-          <a:lstStyle/>
-          <a:p>
-            <a:pPr algn="l">
-              <a:lnSpc>
-                <a:spcPct val="115000"/>
-              </a:lnSpc>
-            </a:pPr>
-            <a:r>
-              <a:rPr sz="950" b="0">
-                <a:solidFill>
-                  <a:srgbClr val="002333"/>
-                </a:solidFill>
-                <a:latin typeface="Inter"/>
-              </a:rPr>
-              <a:t>Tilburg University</a:t>
-            </a:r>
-          </a:p>
-        </p:txBody>
-      </p:sp>
-      <p:sp>
-        <p:nvSpPr>
-          <p:cNvPr id="50" name="TextBox 49"/>
-          <p:cNvSpPr txBox="1"/>
-          <p:nvPr/>
-        </p:nvSpPr>
-        <p:spPr>
-          <a:xfrm>
-            <a:off x="5715000" y="3581400"/>
-            <a:ext cx="2540000" cy="127000"/>
-          </a:xfrm>
-          <a:prstGeom prst="rect">
-            <a:avLst/>
-          </a:prstGeom>
-          <a:noFill/>
-        </p:spPr>
-        <p:txBody>
-          <a:bodyPr wrap="square" lIns="0" rIns="0" tIns="0" bIns="0">
-            <a:spAutoFit/>
-          </a:bodyPr>
-          <a:lstStyle/>
-          <a:p>
-            <a:pPr algn="l">
-              <a:lnSpc>
-                <a:spcPct val="115000"/>
-              </a:lnSpc>
-            </a:pPr>
-            <a:r>
-              <a:rPr sz="950" b="0">
-                <a:solidFill>
-                  <a:srgbClr val="002333"/>
-                </a:solidFill>
-                <a:latin typeface="Inter"/>
-              </a:rPr>
-              <a:t>NL, publiek</a:t>
-            </a:r>
-          </a:p>
-        </p:txBody>
-      </p:sp>
-      <p:sp>
-        <p:nvSpPr>
-          <p:cNvPr id="51" name="TextBox 50"/>
-          <p:cNvSpPr txBox="1"/>
-          <p:nvPr/>
-        </p:nvSpPr>
-        <p:spPr>
-          <a:xfrm>
-            <a:off x="8445500" y="3581400"/>
-            <a:ext cx="1587500" cy="127000"/>
-          </a:xfrm>
-          <a:prstGeom prst="rect">
-            <a:avLst/>
-          </a:prstGeom>
-          <a:noFill/>
-        </p:spPr>
-        <p:txBody>
-          <a:bodyPr wrap="square" lIns="0" rIns="0" tIns="0" bIns="0">
-            <a:spAutoFit/>
-          </a:bodyPr>
-          <a:lstStyle/>
-          <a:p>
-            <a:pPr algn="r">
-              <a:lnSpc>
-                <a:spcPct val="115000"/>
-              </a:lnSpc>
-            </a:pPr>
-            <a:r>
-              <a:rPr sz="950" b="0">
-                <a:solidFill>
-                  <a:srgbClr val="002333"/>
-                </a:solidFill>
-                <a:latin typeface="Inter"/>
-              </a:rPr>
-              <a:t>€20.000</a:t>
-            </a:r>
-          </a:p>
-        </p:txBody>
-      </p:sp>
-      <p:sp>
-        <p:nvSpPr>
-          <p:cNvPr id="52" name="TextBox 51"/>
-          <p:cNvSpPr txBox="1"/>
-          <p:nvPr/>
-        </p:nvSpPr>
-        <p:spPr>
-          <a:xfrm>
-            <a:off x="10160000" y="3581400"/>
-            <a:ext cx="1270000" cy="127000"/>
-          </a:xfrm>
-          <a:prstGeom prst="rect">
-            <a:avLst/>
-          </a:prstGeom>
-          <a:noFill/>
-        </p:spPr>
-        <p:txBody>
-          <a:bodyPr wrap="square" lIns="0" rIns="0" tIns="0" bIns="0">
-            <a:spAutoFit/>
-          </a:bodyPr>
-          <a:lstStyle/>
-          <a:p>
-            <a:pPr algn="r">
-              <a:lnSpc>
-                <a:spcPct val="115000"/>
-              </a:lnSpc>
-            </a:pPr>
-            <a:r>
-              <a:rPr sz="950" b="0">
-                <a:solidFill>
-                  <a:srgbClr val="002333"/>
-                </a:solidFill>
-                <a:latin typeface="Inter"/>
-              </a:rPr>
-              <a:t>15%</a:t>
-            </a:r>
-          </a:p>
-        </p:txBody>
-      </p:sp>
-      <p:sp>
-        <p:nvSpPr>
-          <p:cNvPr id="53" name="TextBox 52"/>
-          <p:cNvSpPr txBox="1"/>
-          <p:nvPr/>
-        </p:nvSpPr>
-        <p:spPr>
-          <a:xfrm>
-            <a:off x="762000" y="3746500"/>
-            <a:ext cx="4826000" cy="127000"/>
-          </a:xfrm>
-          <a:prstGeom prst="rect">
-            <a:avLst/>
-          </a:prstGeom>
-          <a:noFill/>
-        </p:spPr>
-        <p:txBody>
-          <a:bodyPr wrap="square" lIns="0" rIns="0" tIns="0" bIns="0">
-            <a:spAutoFit/>
-          </a:bodyPr>
-          <a:lstStyle/>
-          <a:p>
-            <a:pPr algn="l">
-              <a:lnSpc>
-                <a:spcPct val="115000"/>
-              </a:lnSpc>
-            </a:pPr>
-            <a:r>
-              <a:rPr sz="950" b="0">
-                <a:solidFill>
-                  <a:srgbClr val="002333"/>
-                </a:solidFill>
-                <a:latin typeface="Inter"/>
-              </a:rPr>
-              <a:t>UMCG</a:t>
-            </a:r>
-          </a:p>
-        </p:txBody>
-      </p:sp>
-      <p:sp>
-        <p:nvSpPr>
-          <p:cNvPr id="54" name="TextBox 53"/>
-          <p:cNvSpPr txBox="1"/>
-          <p:nvPr/>
-        </p:nvSpPr>
-        <p:spPr>
-          <a:xfrm>
-            <a:off x="5715000" y="3746500"/>
-            <a:ext cx="2540000" cy="127000"/>
-          </a:xfrm>
-          <a:prstGeom prst="rect">
-            <a:avLst/>
-          </a:prstGeom>
-          <a:noFill/>
-        </p:spPr>
-        <p:txBody>
-          <a:bodyPr wrap="square" lIns="0" rIns="0" tIns="0" bIns="0">
-            <a:spAutoFit/>
-          </a:bodyPr>
-          <a:lstStyle/>
-          <a:p>
-            <a:pPr algn="l">
-              <a:lnSpc>
-                <a:spcPct val="115000"/>
-              </a:lnSpc>
-            </a:pPr>
-            <a:r>
-              <a:rPr sz="950" b="0">
-                <a:solidFill>
-                  <a:srgbClr val="002333"/>
-                </a:solidFill>
-                <a:latin typeface="Inter"/>
-              </a:rPr>
-              <a:t>NL, publiek</a:t>
-            </a:r>
-          </a:p>
-        </p:txBody>
-      </p:sp>
-      <p:sp>
-        <p:nvSpPr>
-          <p:cNvPr id="55" name="TextBox 54"/>
-          <p:cNvSpPr txBox="1"/>
-          <p:nvPr/>
-        </p:nvSpPr>
-        <p:spPr>
-          <a:xfrm>
-            <a:off x="8445500" y="3746500"/>
-            <a:ext cx="1587500" cy="127000"/>
-          </a:xfrm>
-          <a:prstGeom prst="rect">
-            <a:avLst/>
-          </a:prstGeom>
-          <a:noFill/>
-        </p:spPr>
-        <p:txBody>
-          <a:bodyPr wrap="square" lIns="0" rIns="0" tIns="0" bIns="0">
-            <a:spAutoFit/>
-          </a:bodyPr>
-          <a:lstStyle/>
-          <a:p>
-            <a:pPr algn="r">
-              <a:lnSpc>
-                <a:spcPct val="115000"/>
-              </a:lnSpc>
-            </a:pPr>
-            <a:r>
-              <a:rPr sz="950" b="0">
-                <a:solidFill>
-                  <a:srgbClr val="002333"/>
-                </a:solidFill>
-                <a:latin typeface="Inter"/>
-              </a:rPr>
-              <a:t>€15.000</a:t>
-            </a:r>
-          </a:p>
-        </p:txBody>
-      </p:sp>
-      <p:sp>
-        <p:nvSpPr>
-          <p:cNvPr id="56" name="TextBox 55"/>
-          <p:cNvSpPr txBox="1"/>
-          <p:nvPr/>
-        </p:nvSpPr>
-        <p:spPr>
-          <a:xfrm>
-            <a:off x="10160000" y="3746500"/>
-            <a:ext cx="1270000" cy="127000"/>
-          </a:xfrm>
-          <a:prstGeom prst="rect">
-            <a:avLst/>
-          </a:prstGeom>
-          <a:noFill/>
-        </p:spPr>
-        <p:txBody>
-          <a:bodyPr wrap="square" lIns="0" rIns="0" tIns="0" bIns="0">
-            <a:spAutoFit/>
-          </a:bodyPr>
-          <a:lstStyle/>
-          <a:p>
-            <a:pPr algn="r">
-              <a:lnSpc>
-                <a:spcPct val="115000"/>
-              </a:lnSpc>
-            </a:pPr>
-            <a:r>
-              <a:rPr sz="950" b="0">
-                <a:solidFill>
-                  <a:srgbClr val="002333"/>
-                </a:solidFill>
-                <a:latin typeface="Inter"/>
-              </a:rPr>
-              <a:t>50%</a:t>
-            </a:r>
-          </a:p>
-        </p:txBody>
-      </p:sp>
-      <p:sp>
-        <p:nvSpPr>
-          <p:cNvPr id="57" name="TextBox 56"/>
-          <p:cNvSpPr txBox="1"/>
-          <p:nvPr/>
-        </p:nvSpPr>
-        <p:spPr>
-          <a:xfrm>
-            <a:off x="762000" y="3911600"/>
-            <a:ext cx="4826000" cy="127000"/>
-          </a:xfrm>
-          <a:prstGeom prst="rect">
-            <a:avLst/>
-          </a:prstGeom>
-          <a:noFill/>
-        </p:spPr>
-        <p:txBody>
-          <a:bodyPr wrap="square" lIns="0" rIns="0" tIns="0" bIns="0">
-            <a:spAutoFit/>
-          </a:bodyPr>
-          <a:lstStyle/>
-          <a:p>
-            <a:pPr algn="l">
-              <a:lnSpc>
-                <a:spcPct val="115000"/>
-              </a:lnSpc>
-            </a:pPr>
-            <a:r>
-              <a:rPr sz="950" b="0">
-                <a:solidFill>
-                  <a:srgbClr val="002333"/>
-                </a:solidFill>
-                <a:latin typeface="Inter"/>
-              </a:rPr>
-              <a:t>Radboud Universiteit</a:t>
-            </a:r>
-          </a:p>
-        </p:txBody>
-      </p:sp>
-      <p:sp>
-        <p:nvSpPr>
-          <p:cNvPr id="58" name="TextBox 57"/>
-          <p:cNvSpPr txBox="1"/>
-          <p:nvPr/>
-        </p:nvSpPr>
-        <p:spPr>
-          <a:xfrm>
-            <a:off x="5715000" y="3911600"/>
-            <a:ext cx="2540000" cy="127000"/>
-          </a:xfrm>
-          <a:prstGeom prst="rect">
-            <a:avLst/>
-          </a:prstGeom>
-          <a:noFill/>
-        </p:spPr>
-        <p:txBody>
-          <a:bodyPr wrap="square" lIns="0" rIns="0" tIns="0" bIns="0">
-            <a:spAutoFit/>
-          </a:bodyPr>
-          <a:lstStyle/>
-          <a:p>
-            <a:pPr algn="l">
-              <a:lnSpc>
-                <a:spcPct val="115000"/>
-              </a:lnSpc>
-            </a:pPr>
-            <a:r>
-              <a:rPr sz="950" b="0">
-                <a:solidFill>
-                  <a:srgbClr val="002333"/>
-                </a:solidFill>
-                <a:latin typeface="Inter"/>
-              </a:rPr>
-              <a:t>NL, publiek</a:t>
-            </a:r>
-          </a:p>
-        </p:txBody>
-      </p:sp>
-      <p:sp>
-        <p:nvSpPr>
-          <p:cNvPr id="59" name="TextBox 58"/>
-          <p:cNvSpPr txBox="1"/>
-          <p:nvPr/>
-        </p:nvSpPr>
-        <p:spPr>
-          <a:xfrm>
-            <a:off x="8445500" y="3911600"/>
-            <a:ext cx="1587500" cy="127000"/>
-          </a:xfrm>
-          <a:prstGeom prst="rect">
-            <a:avLst/>
-          </a:prstGeom>
-          <a:noFill/>
-        </p:spPr>
-        <p:txBody>
-          <a:bodyPr wrap="square" lIns="0" rIns="0" tIns="0" bIns="0">
-            <a:spAutoFit/>
-          </a:bodyPr>
-          <a:lstStyle/>
-          <a:p>
-            <a:pPr algn="r">
-              <a:lnSpc>
-                <a:spcPct val="115000"/>
-              </a:lnSpc>
-            </a:pPr>
-            <a:r>
-              <a:rPr sz="950" b="0">
-                <a:solidFill>
-                  <a:srgbClr val="002333"/>
-                </a:solidFill>
-                <a:latin typeface="Inter"/>
-              </a:rPr>
-              <a:t>€15.000</a:t>
-            </a:r>
-          </a:p>
-        </p:txBody>
-      </p:sp>
-      <p:sp>
-        <p:nvSpPr>
-          <p:cNvPr id="60" name="TextBox 59"/>
-          <p:cNvSpPr txBox="1"/>
-          <p:nvPr/>
-        </p:nvSpPr>
-        <p:spPr>
-          <a:xfrm>
-            <a:off x="10160000" y="3911600"/>
-            <a:ext cx="1270000" cy="127000"/>
-          </a:xfrm>
-          <a:prstGeom prst="rect">
-            <a:avLst/>
-          </a:prstGeom>
-          <a:noFill/>
-        </p:spPr>
-        <p:txBody>
-          <a:bodyPr wrap="square" lIns="0" rIns="0" tIns="0" bIns="0">
-            <a:spAutoFit/>
-          </a:bodyPr>
-          <a:lstStyle/>
-          <a:p>
-            <a:pPr algn="r">
-              <a:lnSpc>
-                <a:spcPct val="115000"/>
-              </a:lnSpc>
-            </a:pPr>
-            <a:r>
-              <a:rPr sz="950" b="0">
-                <a:solidFill>
-                  <a:srgbClr val="002333"/>
-                </a:solidFill>
-                <a:latin typeface="Inter"/>
-              </a:rPr>
-              <a:t>15%</a:t>
-            </a:r>
-          </a:p>
-        </p:txBody>
-      </p:sp>
-      <p:sp>
-        <p:nvSpPr>
-          <p:cNvPr id="61" name="TextBox 60"/>
-          <p:cNvSpPr txBox="1"/>
-          <p:nvPr/>
-        </p:nvSpPr>
-        <p:spPr>
-          <a:xfrm>
-            <a:off x="762000" y="4076700"/>
-            <a:ext cx="4826000" cy="127000"/>
-          </a:xfrm>
-          <a:prstGeom prst="rect">
-            <a:avLst/>
-          </a:prstGeom>
-          <a:noFill/>
-        </p:spPr>
-        <p:txBody>
-          <a:bodyPr wrap="square" lIns="0" rIns="0" tIns="0" bIns="0">
-            <a:spAutoFit/>
-          </a:bodyPr>
-          <a:lstStyle/>
-          <a:p>
-            <a:pPr algn="l">
-              <a:lnSpc>
-                <a:spcPct val="115000"/>
-              </a:lnSpc>
-            </a:pPr>
-            <a:r>
-              <a:rPr sz="950" b="0">
-                <a:solidFill>
-                  <a:srgbClr val="002333"/>
-                </a:solidFill>
-                <a:latin typeface="Inter"/>
-              </a:rPr>
-              <a:t>Hogeschool Rotterdam</a:t>
-            </a:r>
-          </a:p>
-        </p:txBody>
-      </p:sp>
-      <p:sp>
-        <p:nvSpPr>
-          <p:cNvPr id="62" name="TextBox 61"/>
-          <p:cNvSpPr txBox="1"/>
-          <p:nvPr/>
-        </p:nvSpPr>
-        <p:spPr>
-          <a:xfrm>
-            <a:off x="5715000" y="4076700"/>
-            <a:ext cx="2540000" cy="127000"/>
-          </a:xfrm>
-          <a:prstGeom prst="rect">
-            <a:avLst/>
-          </a:prstGeom>
-          <a:noFill/>
-        </p:spPr>
-        <p:txBody>
-          <a:bodyPr wrap="square" lIns="0" rIns="0" tIns="0" bIns="0">
-            <a:spAutoFit/>
-          </a:bodyPr>
-          <a:lstStyle/>
-          <a:p>
-            <a:pPr algn="l">
-              <a:lnSpc>
-                <a:spcPct val="115000"/>
-              </a:lnSpc>
-            </a:pPr>
-            <a:r>
-              <a:rPr sz="950" b="0">
-                <a:solidFill>
-                  <a:srgbClr val="002333"/>
-                </a:solidFill>
-                <a:latin typeface="Inter"/>
-              </a:rPr>
-              <a:t>NL, publiek</a:t>
-            </a:r>
-          </a:p>
-        </p:txBody>
-      </p:sp>
-      <p:sp>
-        <p:nvSpPr>
-          <p:cNvPr id="63" name="TextBox 62"/>
-          <p:cNvSpPr txBox="1"/>
-          <p:nvPr/>
-        </p:nvSpPr>
-        <p:spPr>
-          <a:xfrm>
-            <a:off x="8445500" y="4076700"/>
-            <a:ext cx="1587500" cy="127000"/>
-          </a:xfrm>
-          <a:prstGeom prst="rect">
-            <a:avLst/>
-          </a:prstGeom>
-          <a:noFill/>
-        </p:spPr>
-        <p:txBody>
-          <a:bodyPr wrap="square" lIns="0" rIns="0" tIns="0" bIns="0">
-            <a:spAutoFit/>
-          </a:bodyPr>
-          <a:lstStyle/>
-          <a:p>
-            <a:pPr algn="r">
-              <a:lnSpc>
-                <a:spcPct val="115000"/>
-              </a:lnSpc>
-            </a:pPr>
-            <a:r>
-              <a:rPr sz="950" b="0">
-                <a:solidFill>
-                  <a:srgbClr val="002333"/>
-                </a:solidFill>
-                <a:latin typeface="Inter"/>
-              </a:rPr>
-              <a:t>€10.000</a:t>
-            </a:r>
-          </a:p>
-        </p:txBody>
-      </p:sp>
-      <p:sp>
-        <p:nvSpPr>
-          <p:cNvPr id="64" name="TextBox 63"/>
-          <p:cNvSpPr txBox="1"/>
-          <p:nvPr/>
-        </p:nvSpPr>
-        <p:spPr>
-          <a:xfrm>
-            <a:off x="10160000" y="4076700"/>
-            <a:ext cx="1270000" cy="127000"/>
-          </a:xfrm>
-          <a:prstGeom prst="rect">
-            <a:avLst/>
-          </a:prstGeom>
-          <a:noFill/>
-        </p:spPr>
-        <p:txBody>
-          <a:bodyPr wrap="square" lIns="0" rIns="0" tIns="0" bIns="0">
-            <a:spAutoFit/>
-          </a:bodyPr>
-          <a:lstStyle/>
-          <a:p>
-            <a:pPr algn="r">
-              <a:lnSpc>
-                <a:spcPct val="115000"/>
-              </a:lnSpc>
-            </a:pPr>
-            <a:r>
-              <a:rPr sz="950" b="0">
-                <a:solidFill>
-                  <a:srgbClr val="002333"/>
-                </a:solidFill>
-                <a:latin typeface="Inter"/>
-              </a:rPr>
-              <a:t>85%</a:t>
-            </a:r>
-          </a:p>
-        </p:txBody>
-      </p:sp>
-      <p:sp>
-        <p:nvSpPr>
-          <p:cNvPr id="65" name="TextBox 64"/>
-          <p:cNvSpPr txBox="1"/>
-          <p:nvPr/>
-        </p:nvSpPr>
-        <p:spPr>
-          <a:xfrm>
-            <a:off x="762000" y="4241800"/>
-            <a:ext cx="4826000" cy="127000"/>
-          </a:xfrm>
-          <a:prstGeom prst="rect">
-            <a:avLst/>
-          </a:prstGeom>
-          <a:noFill/>
-        </p:spPr>
-        <p:txBody>
-          <a:bodyPr wrap="square" lIns="0" rIns="0" tIns="0" bIns="0">
-            <a:spAutoFit/>
-          </a:bodyPr>
-          <a:lstStyle/>
-          <a:p>
-            <a:pPr algn="l">
-              <a:lnSpc>
-                <a:spcPct val="115000"/>
-              </a:lnSpc>
-            </a:pPr>
-            <a:r>
-              <a:rPr sz="950" b="0">
-                <a:solidFill>
-                  <a:srgbClr val="002333"/>
-                </a:solidFill>
-                <a:latin typeface="Inter"/>
-              </a:rPr>
-              <a:t>Notenboom</a:t>
-            </a:r>
-          </a:p>
-        </p:txBody>
-      </p:sp>
-      <p:sp>
-        <p:nvSpPr>
-          <p:cNvPr id="66" name="TextBox 65"/>
-          <p:cNvSpPr txBox="1"/>
-          <p:nvPr/>
-        </p:nvSpPr>
-        <p:spPr>
-          <a:xfrm>
-            <a:off x="5715000" y="4241800"/>
-            <a:ext cx="2540000" cy="127000"/>
-          </a:xfrm>
-          <a:prstGeom prst="rect">
-            <a:avLst/>
-          </a:prstGeom>
-          <a:noFill/>
-        </p:spPr>
-        <p:txBody>
-          <a:bodyPr wrap="square" lIns="0" rIns="0" tIns="0" bIns="0">
-            <a:spAutoFit/>
-          </a:bodyPr>
-          <a:lstStyle/>
-          <a:p>
-            <a:pPr algn="l">
-              <a:lnSpc>
-                <a:spcPct val="115000"/>
-              </a:lnSpc>
-            </a:pPr>
-            <a:r>
-              <a:rPr sz="950" b="0">
-                <a:solidFill>
-                  <a:srgbClr val="002333"/>
-                </a:solidFill>
-                <a:latin typeface="Inter"/>
-              </a:rPr>
-              <a:t>NL, privaat</a:t>
-            </a:r>
-          </a:p>
-        </p:txBody>
-      </p:sp>
-      <p:sp>
-        <p:nvSpPr>
-          <p:cNvPr id="67" name="TextBox 66"/>
-          <p:cNvSpPr txBox="1"/>
-          <p:nvPr/>
-        </p:nvSpPr>
-        <p:spPr>
-          <a:xfrm>
-            <a:off x="8445500" y="4241800"/>
-            <a:ext cx="1587500" cy="127000"/>
-          </a:xfrm>
-          <a:prstGeom prst="rect">
-            <a:avLst/>
-          </a:prstGeom>
-          <a:noFill/>
-        </p:spPr>
-        <p:txBody>
-          <a:bodyPr wrap="square" lIns="0" rIns="0" tIns="0" bIns="0">
-            <a:spAutoFit/>
-          </a:bodyPr>
-          <a:lstStyle/>
-          <a:p>
-            <a:pPr algn="r">
-              <a:lnSpc>
-                <a:spcPct val="115000"/>
-              </a:lnSpc>
-            </a:pPr>
-            <a:r>
-              <a:rPr sz="950" b="0">
-                <a:solidFill>
-                  <a:srgbClr val="002333"/>
-                </a:solidFill>
-                <a:latin typeface="Inter"/>
-              </a:rPr>
-              <a:t>€10.000</a:t>
-            </a:r>
-          </a:p>
-        </p:txBody>
-      </p:sp>
-      <p:sp>
-        <p:nvSpPr>
-          <p:cNvPr id="68" name="TextBox 67"/>
-          <p:cNvSpPr txBox="1"/>
-          <p:nvPr/>
-        </p:nvSpPr>
-        <p:spPr>
-          <a:xfrm>
-            <a:off x="10160000" y="4241800"/>
-            <a:ext cx="1270000" cy="127000"/>
-          </a:xfrm>
-          <a:prstGeom prst="rect">
-            <a:avLst/>
-          </a:prstGeom>
-          <a:noFill/>
-        </p:spPr>
-        <p:txBody>
-          <a:bodyPr wrap="square" lIns="0" rIns="0" tIns="0" bIns="0">
-            <a:spAutoFit/>
-          </a:bodyPr>
-          <a:lstStyle/>
-          <a:p>
-            <a:pPr algn="r">
-              <a:lnSpc>
-                <a:spcPct val="115000"/>
-              </a:lnSpc>
-            </a:pPr>
-            <a:r>
-              <a:rPr sz="950" b="0">
-                <a:solidFill>
-                  <a:srgbClr val="002333"/>
-                </a:solidFill>
-                <a:latin typeface="Inter"/>
-              </a:rPr>
-              <a:t>20%</a:t>
-            </a:r>
-          </a:p>
-        </p:txBody>
-      </p:sp>
-      <p:sp>
-        <p:nvSpPr>
-          <p:cNvPr id="69" name="TextBox 68"/>
-          <p:cNvSpPr txBox="1"/>
-          <p:nvPr/>
-        </p:nvSpPr>
-        <p:spPr>
-          <a:xfrm>
-            <a:off x="762000" y="4406900"/>
-            <a:ext cx="4826000" cy="127000"/>
-          </a:xfrm>
-          <a:prstGeom prst="rect">
-            <a:avLst/>
-          </a:prstGeom>
-          <a:noFill/>
-        </p:spPr>
-        <p:txBody>
-          <a:bodyPr wrap="square" lIns="0" rIns="0" tIns="0" bIns="0">
-            <a:spAutoFit/>
-          </a:bodyPr>
-          <a:lstStyle/>
-          <a:p>
-            <a:pPr algn="l">
-              <a:lnSpc>
-                <a:spcPct val="115000"/>
-              </a:lnSpc>
-            </a:pPr>
-            <a:r>
-              <a:rPr sz="950" b="0">
-                <a:solidFill>
-                  <a:srgbClr val="002333"/>
-                </a:solidFill>
-                <a:latin typeface="Inter"/>
-              </a:rPr>
-              <a:t>CMI</a:t>
-            </a:r>
-          </a:p>
-        </p:txBody>
-      </p:sp>
-      <p:sp>
-        <p:nvSpPr>
-          <p:cNvPr id="70" name="TextBox 69"/>
-          <p:cNvSpPr txBox="1"/>
-          <p:nvPr/>
-        </p:nvSpPr>
-        <p:spPr>
-          <a:xfrm>
-            <a:off x="5715000" y="4406900"/>
-            <a:ext cx="2540000" cy="127000"/>
-          </a:xfrm>
-          <a:prstGeom prst="rect">
-            <a:avLst/>
-          </a:prstGeom>
-          <a:noFill/>
-        </p:spPr>
-        <p:txBody>
-          <a:bodyPr wrap="square" lIns="0" rIns="0" tIns="0" bIns="0">
-            <a:spAutoFit/>
-          </a:bodyPr>
-          <a:lstStyle/>
-          <a:p>
-            <a:pPr algn="l">
-              <a:lnSpc>
-                <a:spcPct val="115000"/>
-              </a:lnSpc>
-            </a:pPr>
-            <a:r>
-              <a:rPr sz="950" b="0">
-                <a:solidFill>
-                  <a:srgbClr val="002333"/>
-                </a:solidFill>
-                <a:latin typeface="Inter"/>
-              </a:rPr>
-              <a:t>IE, privaat</a:t>
-            </a:r>
-          </a:p>
-        </p:txBody>
-      </p:sp>
-      <p:sp>
-        <p:nvSpPr>
-          <p:cNvPr id="71" name="TextBox 70"/>
-          <p:cNvSpPr txBox="1"/>
-          <p:nvPr/>
-        </p:nvSpPr>
-        <p:spPr>
-          <a:xfrm>
-            <a:off x="8445500" y="4406900"/>
-            <a:ext cx="1587500" cy="127000"/>
-          </a:xfrm>
-          <a:prstGeom prst="rect">
-            <a:avLst/>
-          </a:prstGeom>
-          <a:noFill/>
-        </p:spPr>
-        <p:txBody>
-          <a:bodyPr wrap="square" lIns="0" rIns="0" tIns="0" bIns="0">
-            <a:spAutoFit/>
-          </a:bodyPr>
-          <a:lstStyle/>
-          <a:p>
-            <a:pPr algn="r">
-              <a:lnSpc>
-                <a:spcPct val="115000"/>
-              </a:lnSpc>
-            </a:pPr>
-            <a:r>
-              <a:rPr sz="950" b="0">
-                <a:solidFill>
-                  <a:srgbClr val="002333"/>
-                </a:solidFill>
-                <a:latin typeface="Inter"/>
-              </a:rPr>
-              <a:t>€10.000</a:t>
-            </a:r>
-          </a:p>
-        </p:txBody>
-      </p:sp>
-      <p:sp>
-        <p:nvSpPr>
-          <p:cNvPr id="72" name="TextBox 71"/>
-          <p:cNvSpPr txBox="1"/>
-          <p:nvPr/>
-        </p:nvSpPr>
-        <p:spPr>
-          <a:xfrm>
-            <a:off x="10160000" y="4406900"/>
-            <a:ext cx="1270000" cy="127000"/>
-          </a:xfrm>
-          <a:prstGeom prst="rect">
-            <a:avLst/>
-          </a:prstGeom>
-          <a:noFill/>
-        </p:spPr>
-        <p:txBody>
-          <a:bodyPr wrap="square" lIns="0" rIns="0" tIns="0" bIns="0">
-            <a:spAutoFit/>
-          </a:bodyPr>
-          <a:lstStyle/>
-          <a:p>
-            <a:pPr algn="r">
-              <a:lnSpc>
-                <a:spcPct val="115000"/>
-              </a:lnSpc>
-            </a:pPr>
-            <a:r>
-              <a:rPr sz="950" b="0">
-                <a:solidFill>
-                  <a:srgbClr val="002333"/>
-                </a:solidFill>
-                <a:latin typeface="Inter"/>
-              </a:rPr>
-              <a:t>10%</a:t>
-            </a:r>
-          </a:p>
-        </p:txBody>
-      </p:sp>
-      <p:sp>
-        <p:nvSpPr>
-          <p:cNvPr id="73" name="TextBox 72"/>
-          <p:cNvSpPr txBox="1"/>
-          <p:nvPr/>
-        </p:nvSpPr>
-        <p:spPr>
-          <a:xfrm>
-            <a:off x="762000" y="4572000"/>
-            <a:ext cx="4826000" cy="127000"/>
-          </a:xfrm>
-          <a:prstGeom prst="rect">
-            <a:avLst/>
-          </a:prstGeom>
-          <a:noFill/>
-        </p:spPr>
-        <p:txBody>
-          <a:bodyPr wrap="square" lIns="0" rIns="0" tIns="0" bIns="0">
-            <a:spAutoFit/>
-          </a:bodyPr>
-          <a:lstStyle/>
-          <a:p>
-            <a:pPr algn="l">
-              <a:lnSpc>
-                <a:spcPct val="115000"/>
-              </a:lnSpc>
-            </a:pPr>
-            <a:r>
-              <a:rPr sz="950" b="0">
-                <a:solidFill>
-                  <a:srgbClr val="002333"/>
-                </a:solidFill>
-                <a:latin typeface="Inter"/>
-              </a:rPr>
-              <a:t>HBMSU</a:t>
-            </a:r>
-          </a:p>
-        </p:txBody>
-      </p:sp>
-      <p:sp>
-        <p:nvSpPr>
-          <p:cNvPr id="74" name="TextBox 73"/>
-          <p:cNvSpPr txBox="1"/>
-          <p:nvPr/>
-        </p:nvSpPr>
-        <p:spPr>
-          <a:xfrm>
-            <a:off x="5715000" y="4572000"/>
-            <a:ext cx="2540000" cy="127000"/>
-          </a:xfrm>
-          <a:prstGeom prst="rect">
-            <a:avLst/>
-          </a:prstGeom>
-          <a:noFill/>
-        </p:spPr>
-        <p:txBody>
-          <a:bodyPr wrap="square" lIns="0" rIns="0" tIns="0" bIns="0">
-            <a:spAutoFit/>
-          </a:bodyPr>
-          <a:lstStyle/>
-          <a:p>
-            <a:pPr algn="l">
-              <a:lnSpc>
-                <a:spcPct val="115000"/>
-              </a:lnSpc>
-            </a:pPr>
-            <a:r>
-              <a:rPr sz="950" b="0">
-                <a:solidFill>
-                  <a:srgbClr val="002333"/>
-                </a:solidFill>
-                <a:latin typeface="Inter"/>
-              </a:rPr>
-              <a:t>AE, quasi-publiek</a:t>
-            </a:r>
-          </a:p>
-        </p:txBody>
-      </p:sp>
-      <p:sp>
-        <p:nvSpPr>
-          <p:cNvPr id="75" name="TextBox 74"/>
-          <p:cNvSpPr txBox="1"/>
-          <p:nvPr/>
-        </p:nvSpPr>
-        <p:spPr>
-          <a:xfrm>
-            <a:off x="8445500" y="4572000"/>
-            <a:ext cx="1587500" cy="127000"/>
-          </a:xfrm>
-          <a:prstGeom prst="rect">
-            <a:avLst/>
-          </a:prstGeom>
-          <a:noFill/>
-        </p:spPr>
-        <p:txBody>
-          <a:bodyPr wrap="square" lIns="0" rIns="0" tIns="0" bIns="0">
-            <a:spAutoFit/>
-          </a:bodyPr>
-          <a:lstStyle/>
-          <a:p>
-            <a:pPr algn="r">
-              <a:lnSpc>
-                <a:spcPct val="115000"/>
-              </a:lnSpc>
-            </a:pPr>
-            <a:r>
-              <a:rPr sz="950" b="0">
-                <a:solidFill>
-                  <a:srgbClr val="002333"/>
-                </a:solidFill>
-                <a:latin typeface="Inter"/>
-              </a:rPr>
-              <a:t>€10.000</a:t>
-            </a:r>
-          </a:p>
-        </p:txBody>
-      </p:sp>
-      <p:sp>
-        <p:nvSpPr>
-          <p:cNvPr id="76" name="TextBox 75"/>
-          <p:cNvSpPr txBox="1"/>
-          <p:nvPr/>
-        </p:nvSpPr>
-        <p:spPr>
-          <a:xfrm>
-            <a:off x="10160000" y="4572000"/>
-            <a:ext cx="1270000" cy="127000"/>
-          </a:xfrm>
-          <a:prstGeom prst="rect">
-            <a:avLst/>
-          </a:prstGeom>
-          <a:noFill/>
-        </p:spPr>
-        <p:txBody>
-          <a:bodyPr wrap="square" lIns="0" rIns="0" tIns="0" bIns="0">
-            <a:spAutoFit/>
-          </a:bodyPr>
-          <a:lstStyle/>
-          <a:p>
-            <a:pPr algn="r">
-              <a:lnSpc>
-                <a:spcPct val="115000"/>
-              </a:lnSpc>
-            </a:pPr>
-            <a:r>
-              <a:rPr sz="950" b="0">
-                <a:solidFill>
-                  <a:srgbClr val="002333"/>
-                </a:solidFill>
-                <a:latin typeface="Inter"/>
-              </a:rPr>
-              <a:t>10%</a:t>
-            </a:r>
-          </a:p>
-        </p:txBody>
-      </p:sp>
-      <p:sp>
-        <p:nvSpPr>
-          <p:cNvPr id="77" name="TextBox 76"/>
-          <p:cNvSpPr txBox="1"/>
-          <p:nvPr/>
-        </p:nvSpPr>
-        <p:spPr>
-          <a:xfrm>
-            <a:off x="762000" y="4737100"/>
-            <a:ext cx="4826000" cy="127000"/>
-          </a:xfrm>
-          <a:prstGeom prst="rect">
-            <a:avLst/>
-          </a:prstGeom>
-          <a:noFill/>
-        </p:spPr>
-        <p:txBody>
-          <a:bodyPr wrap="square" lIns="0" rIns="0" tIns="0" bIns="0">
-            <a:spAutoFit/>
-          </a:bodyPr>
-          <a:lstStyle/>
-          <a:p>
-            <a:pPr algn="l">
-              <a:lnSpc>
-                <a:spcPct val="115000"/>
-              </a:lnSpc>
-            </a:pPr>
-            <a:r>
-              <a:rPr sz="950" b="0">
-                <a:solidFill>
-                  <a:srgbClr val="002333"/>
-                </a:solidFill>
-                <a:latin typeface="Inter"/>
-              </a:rPr>
-              <a:t>Noordhoff</a:t>
-            </a:r>
-          </a:p>
-        </p:txBody>
-      </p:sp>
-      <p:sp>
-        <p:nvSpPr>
-          <p:cNvPr id="78" name="TextBox 77"/>
-          <p:cNvSpPr txBox="1"/>
-          <p:nvPr/>
-        </p:nvSpPr>
-        <p:spPr>
-          <a:xfrm>
-            <a:off x="5715000" y="4737100"/>
-            <a:ext cx="2540000" cy="127000"/>
-          </a:xfrm>
-          <a:prstGeom prst="rect">
-            <a:avLst/>
-          </a:prstGeom>
-          <a:noFill/>
-        </p:spPr>
-        <p:txBody>
-          <a:bodyPr wrap="square" lIns="0" rIns="0" tIns="0" bIns="0">
-            <a:spAutoFit/>
-          </a:bodyPr>
-          <a:lstStyle/>
-          <a:p>
-            <a:pPr algn="l">
-              <a:lnSpc>
-                <a:spcPct val="115000"/>
-              </a:lnSpc>
-            </a:pPr>
-            <a:r>
-              <a:rPr sz="950" b="0">
-                <a:solidFill>
-                  <a:srgbClr val="002333"/>
-                </a:solidFill>
-                <a:latin typeface="Inter"/>
-              </a:rPr>
-              <a:t>uitgever/OEM</a:t>
-            </a:r>
-          </a:p>
-        </p:txBody>
-      </p:sp>
-      <p:sp>
-        <p:nvSpPr>
-          <p:cNvPr id="79" name="TextBox 78"/>
-          <p:cNvSpPr txBox="1"/>
-          <p:nvPr/>
-        </p:nvSpPr>
-        <p:spPr>
-          <a:xfrm>
-            <a:off x="8445500" y="4737100"/>
-            <a:ext cx="1587500" cy="127000"/>
-          </a:xfrm>
-          <a:prstGeom prst="rect">
-            <a:avLst/>
-          </a:prstGeom>
-          <a:noFill/>
-        </p:spPr>
-        <p:txBody>
-          <a:bodyPr wrap="square" lIns="0" rIns="0" tIns="0" bIns="0">
-            <a:spAutoFit/>
-          </a:bodyPr>
-          <a:lstStyle/>
-          <a:p>
-            <a:pPr algn="r">
-              <a:lnSpc>
-                <a:spcPct val="115000"/>
-              </a:lnSpc>
-            </a:pPr>
-            <a:r>
-              <a:rPr sz="950" b="0">
-                <a:solidFill>
-                  <a:srgbClr val="002333"/>
-                </a:solidFill>
-                <a:latin typeface="Inter"/>
-              </a:rPr>
-              <a:t>€10.000</a:t>
-            </a:r>
-          </a:p>
-        </p:txBody>
-      </p:sp>
-      <p:sp>
-        <p:nvSpPr>
-          <p:cNvPr id="80" name="TextBox 79"/>
-          <p:cNvSpPr txBox="1"/>
-          <p:nvPr/>
-        </p:nvSpPr>
-        <p:spPr>
-          <a:xfrm>
-            <a:off x="10160000" y="4737100"/>
-            <a:ext cx="1270000" cy="127000"/>
-          </a:xfrm>
-          <a:prstGeom prst="rect">
-            <a:avLst/>
-          </a:prstGeom>
-          <a:noFill/>
-        </p:spPr>
-        <p:txBody>
-          <a:bodyPr wrap="square" lIns="0" rIns="0" tIns="0" bIns="0">
-            <a:spAutoFit/>
-          </a:bodyPr>
-          <a:lstStyle/>
-          <a:p>
-            <a:pPr algn="r">
-              <a:lnSpc>
-                <a:spcPct val="115000"/>
-              </a:lnSpc>
-            </a:pPr>
-            <a:r>
-              <a:rPr sz="950" b="0">
-                <a:solidFill>
-                  <a:srgbClr val="002333"/>
-                </a:solidFill>
-                <a:latin typeface="Inter"/>
-              </a:rPr>
-              <a:t>10%</a:t>
-            </a:r>
-          </a:p>
-        </p:txBody>
-      </p:sp>
-      <p:sp>
-        <p:nvSpPr>
-          <p:cNvPr id="81" name="TextBox 80"/>
-          <p:cNvSpPr txBox="1"/>
-          <p:nvPr/>
-        </p:nvSpPr>
-        <p:spPr>
-          <a:xfrm>
-            <a:off x="762000" y="4902200"/>
-            <a:ext cx="4826000" cy="127000"/>
-          </a:xfrm>
-          <a:prstGeom prst="rect">
-            <a:avLst/>
-          </a:prstGeom>
-          <a:noFill/>
-        </p:spPr>
-        <p:txBody>
-          <a:bodyPr wrap="square" lIns="0" rIns="0" tIns="0" bIns="0">
-            <a:spAutoFit/>
-          </a:bodyPr>
-          <a:lstStyle/>
-          <a:p>
-            <a:pPr algn="l">
-              <a:lnSpc>
-                <a:spcPct val="115000"/>
-              </a:lnSpc>
-            </a:pPr>
-            <a:r>
-              <a:rPr sz="950" b="0">
-                <a:solidFill>
-                  <a:srgbClr val="002333"/>
-                </a:solidFill>
-                <a:latin typeface="Inter"/>
-              </a:rPr>
-              <a:t>Academica</a:t>
-            </a:r>
-          </a:p>
-        </p:txBody>
-      </p:sp>
-      <p:sp>
-        <p:nvSpPr>
-          <p:cNvPr id="82" name="TextBox 81"/>
-          <p:cNvSpPr txBox="1"/>
-          <p:nvPr/>
-        </p:nvSpPr>
-        <p:spPr>
-          <a:xfrm>
-            <a:off x="5715000" y="4902200"/>
-            <a:ext cx="2540000" cy="127000"/>
-          </a:xfrm>
-          <a:prstGeom prst="rect">
-            <a:avLst/>
-          </a:prstGeom>
-          <a:noFill/>
-        </p:spPr>
-        <p:txBody>
-          <a:bodyPr wrap="square" lIns="0" rIns="0" tIns="0" bIns="0">
-            <a:spAutoFit/>
-          </a:bodyPr>
-          <a:lstStyle/>
-          <a:p>
-            <a:pPr algn="l">
-              <a:lnSpc>
-                <a:spcPct val="115000"/>
-              </a:lnSpc>
-            </a:pPr>
-            <a:r>
-              <a:rPr sz="950" b="0">
-                <a:solidFill>
-                  <a:srgbClr val="002333"/>
-                </a:solidFill>
-                <a:latin typeface="Inter"/>
-              </a:rPr>
-              <a:t>NL, privaat</a:t>
-            </a:r>
-          </a:p>
-        </p:txBody>
-      </p:sp>
-      <p:sp>
-        <p:nvSpPr>
-          <p:cNvPr id="83" name="TextBox 82"/>
-          <p:cNvSpPr txBox="1"/>
-          <p:nvPr/>
-        </p:nvSpPr>
-        <p:spPr>
-          <a:xfrm>
-            <a:off x="8445500" y="4902200"/>
-            <a:ext cx="1587500" cy="127000"/>
-          </a:xfrm>
-          <a:prstGeom prst="rect">
-            <a:avLst/>
-          </a:prstGeom>
-          <a:noFill/>
-        </p:spPr>
-        <p:txBody>
-          <a:bodyPr wrap="square" lIns="0" rIns="0" tIns="0" bIns="0">
-            <a:spAutoFit/>
-          </a:bodyPr>
-          <a:lstStyle/>
-          <a:p>
-            <a:pPr algn="r">
-              <a:lnSpc>
-                <a:spcPct val="115000"/>
-              </a:lnSpc>
-            </a:pPr>
-            <a:r>
-              <a:rPr sz="950" b="0">
-                <a:solidFill>
-                  <a:srgbClr val="002333"/>
-                </a:solidFill>
-                <a:latin typeface="Inter"/>
-              </a:rPr>
-              <a:t>€7.500</a:t>
-            </a:r>
-          </a:p>
-        </p:txBody>
-      </p:sp>
-      <p:sp>
-        <p:nvSpPr>
-          <p:cNvPr id="84" name="TextBox 83"/>
-          <p:cNvSpPr txBox="1"/>
-          <p:nvPr/>
-        </p:nvSpPr>
-        <p:spPr>
-          <a:xfrm>
-            <a:off x="10160000" y="4902200"/>
-            <a:ext cx="1270000" cy="127000"/>
-          </a:xfrm>
-          <a:prstGeom prst="rect">
-            <a:avLst/>
-          </a:prstGeom>
-          <a:noFill/>
-        </p:spPr>
-        <p:txBody>
-          <a:bodyPr wrap="square" lIns="0" rIns="0" tIns="0" bIns="0">
-            <a:spAutoFit/>
-          </a:bodyPr>
-          <a:lstStyle/>
-          <a:p>
-            <a:pPr algn="r">
-              <a:lnSpc>
-                <a:spcPct val="115000"/>
-              </a:lnSpc>
-            </a:pPr>
-            <a:r>
-              <a:rPr sz="950" b="0">
-                <a:solidFill>
-                  <a:srgbClr val="002333"/>
-                </a:solidFill>
-                <a:latin typeface="Inter"/>
-              </a:rPr>
-              <a:t>10%</a:t>
-            </a:r>
-          </a:p>
-        </p:txBody>
-      </p:sp>
-      <p:sp>
-        <p:nvSpPr>
-          <p:cNvPr id="85" name="Rectangle 84"/>
+          <p:cNvPr id="131" name="Rectangle 130"/>
           <p:cNvSpPr/>
           <p:nvPr/>
         </p:nvSpPr>
         <p:spPr>
           <a:xfrm>
-            <a:off x="762000" y="5029200"/>
+            <a:off x="762000" y="5003800"/>
             <a:ext cx="10668000" cy="12700"/>
           </a:xfrm>
           <a:prstGeom prst="rect">
@@ -12765,14 +14699,14 @@
       </p:sp>
       <p:sp>
         <p:nvSpPr>
-          <p:cNvPr id="86" name="TextBox 85"/>
-          <p:cNvSpPr txBox="1"/>
-          <p:nvPr/>
-        </p:nvSpPr>
-        <p:spPr>
-          <a:xfrm>
-            <a:off x="762000" y="5156200"/>
-            <a:ext cx="4826000" cy="127000"/>
+          <p:cNvPr id="132" name="TextBox 131"/>
+          <p:cNvSpPr txBox="1"/>
+          <p:nvPr/>
+        </p:nvSpPr>
+        <p:spPr>
+          <a:xfrm>
+            <a:off x="762000" y="5105400"/>
+            <a:ext cx="3048000" cy="165100"/>
           </a:xfrm>
           <a:prstGeom prst="rect">
             <a:avLst/>
@@ -12804,27 +14738,27 @@
       </p:sp>
       <p:sp>
         <p:nvSpPr>
-          <p:cNvPr id="87" name="TextBox 86"/>
-          <p:cNvSpPr txBox="1"/>
-          <p:nvPr/>
-        </p:nvSpPr>
-        <p:spPr>
-          <a:xfrm>
-            <a:off x="5715000" y="5156200"/>
-            <a:ext cx="2540000" cy="127000"/>
-          </a:xfrm>
-          <a:prstGeom prst="rect">
-            <a:avLst/>
-          </a:prstGeom>
-          <a:noFill/>
-        </p:spPr>
-        <p:txBody>
-          <a:bodyPr wrap="square" lIns="0" rIns="0" tIns="0" bIns="0">
-            <a:spAutoFit/>
-          </a:bodyPr>
-          <a:lstStyle/>
-          <a:p>
-            <a:pPr algn="l">
+          <p:cNvPr id="133" name="TextBox 132"/>
+          <p:cNvSpPr txBox="1"/>
+          <p:nvPr/>
+        </p:nvSpPr>
+        <p:spPr>
+          <a:xfrm>
+            <a:off x="8572500" y="5105400"/>
+            <a:ext cx="1460500" cy="165100"/>
+          </a:xfrm>
+          <a:prstGeom prst="rect">
+            <a:avLst/>
+          </a:prstGeom>
+          <a:noFill/>
+        </p:spPr>
+        <p:txBody>
+          <a:bodyPr wrap="square" lIns="0" rIns="0" tIns="0" bIns="0">
+            <a:spAutoFit/>
+          </a:bodyPr>
+          <a:lstStyle/>
+          <a:p>
+            <a:pPr algn="r">
               <a:lnSpc>
                 <a:spcPct val="115000"/>
               </a:lnSpc>
@@ -12836,21 +14770,21 @@
                 </a:solidFill>
                 <a:latin typeface="Inter"/>
               </a:rPr>
-              <a:t/>
-            </a:r>
-          </a:p>
-        </p:txBody>
-      </p:sp>
-      <p:sp>
-        <p:nvSpPr>
-          <p:cNvPr id="88" name="TextBox 87"/>
-          <p:cNvSpPr txBox="1"/>
-          <p:nvPr/>
-        </p:nvSpPr>
-        <p:spPr>
-          <a:xfrm>
-            <a:off x="8445500" y="5156200"/>
-            <a:ext cx="1587500" cy="127000"/>
+              <a:t>€2.157.500</a:t>
+            </a:r>
+          </a:p>
+        </p:txBody>
+      </p:sp>
+      <p:sp>
+        <p:nvSpPr>
+          <p:cNvPr id="134" name="TextBox 133"/>
+          <p:cNvSpPr txBox="1"/>
+          <p:nvPr/>
+        </p:nvSpPr>
+        <p:spPr>
+          <a:xfrm>
+            <a:off x="10223500" y="5105400"/>
+            <a:ext cx="1206500" cy="165100"/>
           </a:xfrm>
           <a:prstGeom prst="rect">
             <a:avLst/>
@@ -12869,51 +14803,12 @@
               </a:lnSpc>
             </a:pPr>
             <a:r>
-              <a:rPr sz="950" b="1">
+              <a:rPr sz="800" b="1">
                 <a:solidFill>
                   <a:srgbClr val="002333"/>
                 </a:solidFill>
                 <a:latin typeface="Inter"/>
               </a:rPr>
-              <a:t>€2.157.500</a:t>
-            </a:r>
-          </a:p>
-        </p:txBody>
-      </p:sp>
-      <p:sp>
-        <p:nvSpPr>
-          <p:cNvPr id="89" name="TextBox 88"/>
-          <p:cNvSpPr txBox="1"/>
-          <p:nvPr/>
-        </p:nvSpPr>
-        <p:spPr>
-          <a:xfrm>
-            <a:off x="10160000" y="5156200"/>
-            <a:ext cx="1270000" cy="127000"/>
-          </a:xfrm>
-          <a:prstGeom prst="rect">
-            <a:avLst/>
-          </a:prstGeom>
-          <a:noFill/>
-        </p:spPr>
-        <p:txBody>
-          <a:bodyPr wrap="square" lIns="0" rIns="0" tIns="0" bIns="0">
-            <a:spAutoFit/>
-          </a:bodyPr>
-          <a:lstStyle/>
-          <a:p>
-            <a:pPr algn="r">
-              <a:lnSpc>
-                <a:spcPct val="115000"/>
-              </a:lnSpc>
-            </a:pPr>
-            <a:r>
-              <a:rPr sz="950" b="1">
-                <a:solidFill>
-                  <a:srgbClr val="002333"/>
-                </a:solidFill>
-                <a:latin typeface="Inter"/>
-              </a:rPr>
               <a:t>€489.000 gewogen</a:t>
             </a:r>
           </a:p>
@@ -12921,7 +14816,7 @@
       </p:sp>
       <p:sp>
         <p:nvSpPr>
-          <p:cNvPr id="90" name="Rectangle 89"/>
+          <p:cNvPr id="135" name="Rectangle 134"/>
           <p:cNvSpPr/>
           <p:nvPr/>
         </p:nvSpPr>
@@ -12965,7 +14860,7 @@
       </p:sp>
       <p:sp>
         <p:nvSpPr>
-          <p:cNvPr id="91" name="TextBox 90"/>
+          <p:cNvPr id="136" name="TextBox 135"/>
           <p:cNvSpPr txBox="1"/>
           <p:nvPr/>
         </p:nvSpPr>
@@ -12997,14 +14892,14 @@
                 </a:solidFill>
                 <a:latin typeface="Inter"/>
               </a:rPr>
-              <a:t>Q3 board knowledge doc, sep 2026. Zelfde 19 deals staan in Close, met afwijkende waarden op enkele regels (zie B4, open-vragen.md).</a:t>
+              <a:t>Q3 board knowledge doc, sep 2026. Afwijkende waarden op enkele regels t.o.v. Close (zie B4, open-vragen.md). BPP en Concorde staan niet in Close, aanmaakdatum onbekend. Aanmaakdatum overige regels uit Close, 24-09-2026.</a:t>
             </a:r>
           </a:p>
         </p:txBody>
       </p:sp>
       <p:pic>
         <p:nvPicPr>
-          <p:cNvPr id="92" name="Picture 91" descr="logo_navy.png"/>
+          <p:cNvPr id="137" name="Picture 136" descr="logo_navy.png"/>
           <p:cNvPicPr>
             <a:picLocks noChangeAspect="1"/>
           </p:cNvPicPr>
@@ -13028,7 +14923,7 @@
       </p:pic>
       <p:sp>
         <p:nvSpPr>
-          <p:cNvPr id="93" name="TextBox 92"/>
+          <p:cNvPr id="138" name="TextBox 137"/>
           <p:cNvSpPr txBox="1"/>
           <p:nvPr/>
         </p:nvSpPr>

--- a/GTM/board-meeting-q3-2026/deck/eduface-board-q3-2026-bewerkbaar.pptx
+++ b/GTM/board-meeting-q3-2026/deck/eduface-board-q3-2026-bewerkbaar.pptx
@@ -9667,7 +9667,7 @@
                 </a:solidFill>
                 <a:latin typeface="Inter"/>
               </a:rPr>
-              <a:t>Privé</a:t>
+              <a:t>Privaat</a:t>
             </a:r>
           </a:p>
         </p:txBody>
@@ -9920,7 +9920,7 @@
         <p:spPr>
           <a:xfrm>
             <a:off x="4508500" y="1885950"/>
-            <a:ext cx="495300" cy="139700"/>
+            <a:ext cx="622300" cy="139700"/>
           </a:xfrm>
           <a:prstGeom prst="roundRect">
             <a:avLst>
@@ -9966,7 +9966,7 @@
         <p:spPr>
           <a:xfrm>
             <a:off x="4508500" y="1898650"/>
-            <a:ext cx="495300" cy="114300"/>
+            <a:ext cx="622300" cy="114300"/>
           </a:xfrm>
           <a:prstGeom prst="rect">
             <a:avLst/>
@@ -9991,7 +9991,7 @@
                 </a:solidFill>
                 <a:latin typeface="Inter"/>
               </a:rPr>
-              <a:t>PRIVÉ</a:t>
+              <a:t>PRIVAAT</a:t>
             </a:r>
           </a:p>
         </p:txBody>
@@ -10246,7 +10246,7 @@
         <p:spPr>
           <a:xfrm>
             <a:off x="4508500" y="2051050"/>
-            <a:ext cx="495300" cy="139700"/>
+            <a:ext cx="622300" cy="139700"/>
           </a:xfrm>
           <a:prstGeom prst="roundRect">
             <a:avLst>
@@ -10292,7 +10292,7 @@
         <p:spPr>
           <a:xfrm>
             <a:off x="4508500" y="2063750"/>
-            <a:ext cx="495300" cy="114300"/>
+            <a:ext cx="622300" cy="114300"/>
           </a:xfrm>
           <a:prstGeom prst="rect">
             <a:avLst/>
@@ -10317,215 +10317,20 @@
                 </a:solidFill>
                 <a:latin typeface="Inter"/>
               </a:rPr>
-              <a:t>PRIVÉ</a:t>
-            </a:r>
-          </a:p>
-        </p:txBody>
-      </p:sp>
-      <p:sp>
-        <p:nvSpPr>
-          <p:cNvPr id="23" name="TextBox 22"/>
-          <p:cNvSpPr txBox="1"/>
-          <p:nvPr/>
-        </p:nvSpPr>
-        <p:spPr>
-          <a:xfrm>
-            <a:off x="5461000" y="2057400"/>
-            <a:ext cx="571500" cy="152400"/>
-          </a:xfrm>
-          <a:prstGeom prst="rect">
-            <a:avLst/>
-          </a:prstGeom>
-          <a:noFill/>
-        </p:spPr>
-        <p:txBody>
-          <a:bodyPr wrap="square" lIns="0" rIns="0" tIns="0" bIns="0">
-            <a:spAutoFit/>
-          </a:bodyPr>
-          <a:lstStyle/>
-          <a:p>
-            <a:pPr algn="l">
-              <a:lnSpc>
-                <a:spcPct val="115000"/>
-              </a:lnSpc>
-            </a:pPr>
-            <a:r>
-              <a:rPr sz="800" b="0">
-                <a:solidFill>
-                  <a:srgbClr val="5B7480"/>
-                </a:solidFill>
-                <a:latin typeface="Inter"/>
-              </a:rPr>
-              <a:t>n.b.</a:t>
-            </a:r>
-          </a:p>
-        </p:txBody>
-      </p:sp>
-      <p:sp>
-        <p:nvSpPr>
-          <p:cNvPr id="24" name="TextBox 23"/>
-          <p:cNvSpPr txBox="1"/>
-          <p:nvPr/>
-        </p:nvSpPr>
-        <p:spPr>
-          <a:xfrm>
-            <a:off x="8572500" y="2057400"/>
-            <a:ext cx="1460500" cy="152400"/>
-          </a:xfrm>
-          <a:prstGeom prst="rect">
-            <a:avLst/>
-          </a:prstGeom>
-          <a:noFill/>
-        </p:spPr>
-        <p:txBody>
-          <a:bodyPr wrap="square" lIns="0" rIns="0" tIns="0" bIns="0">
-            <a:spAutoFit/>
-          </a:bodyPr>
-          <a:lstStyle/>
-          <a:p>
-            <a:pPr algn="r">
-              <a:lnSpc>
-                <a:spcPct val="115000"/>
-              </a:lnSpc>
-            </a:pPr>
-            <a:r>
-              <a:rPr sz="950" b="0">
-                <a:solidFill>
-                  <a:srgbClr val="002333"/>
-                </a:solidFill>
-                <a:latin typeface="Inter"/>
-              </a:rPr>
-              <a:t>€400.000</a:t>
-            </a:r>
-          </a:p>
-        </p:txBody>
-      </p:sp>
-      <p:sp>
-        <p:nvSpPr>
-          <p:cNvPr id="25" name="TextBox 24"/>
-          <p:cNvSpPr txBox="1"/>
-          <p:nvPr/>
-        </p:nvSpPr>
-        <p:spPr>
-          <a:xfrm>
-            <a:off x="10223500" y="2057400"/>
-            <a:ext cx="1206500" cy="152400"/>
-          </a:xfrm>
-          <a:prstGeom prst="rect">
-            <a:avLst/>
-          </a:prstGeom>
-          <a:noFill/>
-        </p:spPr>
-        <p:txBody>
-          <a:bodyPr wrap="square" lIns="0" rIns="0" tIns="0" bIns="0">
-            <a:spAutoFit/>
-          </a:bodyPr>
-          <a:lstStyle/>
-          <a:p>
-            <a:pPr algn="r">
-              <a:lnSpc>
-                <a:spcPct val="115000"/>
-              </a:lnSpc>
-            </a:pPr>
-            <a:r>
-              <a:rPr sz="950" b="0">
-                <a:solidFill>
-                  <a:srgbClr val="002333"/>
-                </a:solidFill>
-                <a:latin typeface="Inter"/>
-              </a:rPr>
-              <a:t>10%</a:t>
-            </a:r>
-          </a:p>
-        </p:txBody>
-      </p:sp>
-      <p:sp>
-        <p:nvSpPr>
-          <p:cNvPr id="26" name="TextBox 25"/>
-          <p:cNvSpPr txBox="1"/>
-          <p:nvPr/>
-        </p:nvSpPr>
-        <p:spPr>
-          <a:xfrm>
-            <a:off x="762000" y="2222500"/>
-            <a:ext cx="3048000" cy="152400"/>
-          </a:xfrm>
-          <a:prstGeom prst="rect">
-            <a:avLst/>
-          </a:prstGeom>
-          <a:noFill/>
-        </p:spPr>
-        <p:txBody>
-          <a:bodyPr wrap="square" lIns="0" rIns="0" tIns="0" bIns="0">
-            <a:spAutoFit/>
-          </a:bodyPr>
-          <a:lstStyle/>
-          <a:p>
-            <a:pPr algn="l">
-              <a:lnSpc>
-                <a:spcPct val="115000"/>
-              </a:lnSpc>
-            </a:pPr>
-            <a:r>
-              <a:rPr sz="950" b="0">
-                <a:solidFill>
-                  <a:srgbClr val="002333"/>
-                </a:solidFill>
-                <a:latin typeface="Inter"/>
-              </a:rPr>
-              <a:t>Rijksuniversiteit Groningen</a:t>
-            </a:r>
-          </a:p>
-        </p:txBody>
-      </p:sp>
-      <p:sp>
-        <p:nvSpPr>
-          <p:cNvPr id="27" name="TextBox 26"/>
-          <p:cNvSpPr txBox="1"/>
-          <p:nvPr/>
-        </p:nvSpPr>
-        <p:spPr>
-          <a:xfrm>
-            <a:off x="3937000" y="2222500"/>
-            <a:ext cx="444500" cy="152400"/>
-          </a:xfrm>
-          <a:prstGeom prst="rect">
-            <a:avLst/>
-          </a:prstGeom>
-          <a:noFill/>
-        </p:spPr>
-        <p:txBody>
-          <a:bodyPr wrap="square" lIns="0" rIns="0" tIns="0" bIns="0">
-            <a:spAutoFit/>
-          </a:bodyPr>
-          <a:lstStyle/>
-          <a:p>
-            <a:pPr algn="l">
-              <a:lnSpc>
-                <a:spcPct val="115000"/>
-              </a:lnSpc>
-            </a:pPr>
-            <a:r>
-              <a:rPr sz="950" b="0">
-                <a:solidFill>
-                  <a:srgbClr val="5B7480"/>
-                </a:solidFill>
-                <a:latin typeface="Inter"/>
-              </a:rPr>
-              <a:t>NL</a:t>
-            </a:r>
-          </a:p>
-        </p:txBody>
-      </p:sp>
-      <p:sp>
-        <p:nvSpPr>
-          <p:cNvPr id="28" name="Rounded Rectangle 27"/>
+              <a:t>PRIVAAT</a:t>
+            </a:r>
+          </a:p>
+        </p:txBody>
+      </p:sp>
+      <p:sp>
+        <p:nvSpPr>
+          <p:cNvPr id="23" name="Rounded Rectangle 22"/>
           <p:cNvSpPr/>
           <p:nvPr/>
         </p:nvSpPr>
         <p:spPr>
           <a:xfrm>
-            <a:off x="5461000" y="2216150"/>
+            <a:off x="5461000" y="2051050"/>
             <a:ext cx="330200" cy="139700"/>
           </a:xfrm>
           <a:prstGeom prst="roundRect">
@@ -10565,7 +10370,248 @@
       </p:sp>
       <p:sp>
         <p:nvSpPr>
-          <p:cNvPr id="29" name="TextBox 28"/>
+          <p:cNvPr id="24" name="TextBox 23"/>
+          <p:cNvSpPr txBox="1"/>
+          <p:nvPr/>
+        </p:nvSpPr>
+        <p:spPr>
+          <a:xfrm>
+            <a:off x="5461000" y="2063750"/>
+            <a:ext cx="330200" cy="114300"/>
+          </a:xfrm>
+          <a:prstGeom prst="rect">
+            <a:avLst/>
+          </a:prstGeom>
+          <a:noFill/>
+        </p:spPr>
+        <p:txBody>
+          <a:bodyPr wrap="square" lIns="0" rIns="0" tIns="0" bIns="0">
+            <a:spAutoFit/>
+          </a:bodyPr>
+          <a:lstStyle/>
+          <a:p>
+            <a:pPr algn="ctr">
+              <a:lnSpc>
+                <a:spcPct val="115000"/>
+              </a:lnSpc>
+            </a:pPr>
+            <a:r>
+              <a:rPr sz="650" b="1">
+                <a:solidFill>
+                  <a:srgbClr val="E07B00"/>
+                </a:solidFill>
+                <a:latin typeface="Inter"/>
+              </a:rPr>
+              <a:t>Q3</a:t>
+            </a:r>
+          </a:p>
+        </p:txBody>
+      </p:sp>
+      <p:sp>
+        <p:nvSpPr>
+          <p:cNvPr id="25" name="TextBox 24"/>
+          <p:cNvSpPr txBox="1"/>
+          <p:nvPr/>
+        </p:nvSpPr>
+        <p:spPr>
+          <a:xfrm>
+            <a:off x="8572500" y="2057400"/>
+            <a:ext cx="1460500" cy="152400"/>
+          </a:xfrm>
+          <a:prstGeom prst="rect">
+            <a:avLst/>
+          </a:prstGeom>
+          <a:noFill/>
+        </p:spPr>
+        <p:txBody>
+          <a:bodyPr wrap="square" lIns="0" rIns="0" tIns="0" bIns="0">
+            <a:spAutoFit/>
+          </a:bodyPr>
+          <a:lstStyle/>
+          <a:p>
+            <a:pPr algn="r">
+              <a:lnSpc>
+                <a:spcPct val="115000"/>
+              </a:lnSpc>
+            </a:pPr>
+            <a:r>
+              <a:rPr sz="950" b="0">
+                <a:solidFill>
+                  <a:srgbClr val="002333"/>
+                </a:solidFill>
+                <a:latin typeface="Inter"/>
+              </a:rPr>
+              <a:t>€400.000</a:t>
+            </a:r>
+          </a:p>
+        </p:txBody>
+      </p:sp>
+      <p:sp>
+        <p:nvSpPr>
+          <p:cNvPr id="26" name="TextBox 25"/>
+          <p:cNvSpPr txBox="1"/>
+          <p:nvPr/>
+        </p:nvSpPr>
+        <p:spPr>
+          <a:xfrm>
+            <a:off x="10223500" y="2057400"/>
+            <a:ext cx="1206500" cy="152400"/>
+          </a:xfrm>
+          <a:prstGeom prst="rect">
+            <a:avLst/>
+          </a:prstGeom>
+          <a:noFill/>
+        </p:spPr>
+        <p:txBody>
+          <a:bodyPr wrap="square" lIns="0" rIns="0" tIns="0" bIns="0">
+            <a:spAutoFit/>
+          </a:bodyPr>
+          <a:lstStyle/>
+          <a:p>
+            <a:pPr algn="r">
+              <a:lnSpc>
+                <a:spcPct val="115000"/>
+              </a:lnSpc>
+            </a:pPr>
+            <a:r>
+              <a:rPr sz="950" b="0">
+                <a:solidFill>
+                  <a:srgbClr val="002333"/>
+                </a:solidFill>
+                <a:latin typeface="Inter"/>
+              </a:rPr>
+              <a:t>10%</a:t>
+            </a:r>
+          </a:p>
+        </p:txBody>
+      </p:sp>
+      <p:sp>
+        <p:nvSpPr>
+          <p:cNvPr id="27" name="TextBox 26"/>
+          <p:cNvSpPr txBox="1"/>
+          <p:nvPr/>
+        </p:nvSpPr>
+        <p:spPr>
+          <a:xfrm>
+            <a:off x="762000" y="2222500"/>
+            <a:ext cx="3048000" cy="152400"/>
+          </a:xfrm>
+          <a:prstGeom prst="rect">
+            <a:avLst/>
+          </a:prstGeom>
+          <a:noFill/>
+        </p:spPr>
+        <p:txBody>
+          <a:bodyPr wrap="square" lIns="0" rIns="0" tIns="0" bIns="0">
+            <a:spAutoFit/>
+          </a:bodyPr>
+          <a:lstStyle/>
+          <a:p>
+            <a:pPr algn="l">
+              <a:lnSpc>
+                <a:spcPct val="115000"/>
+              </a:lnSpc>
+            </a:pPr>
+            <a:r>
+              <a:rPr sz="950" b="0">
+                <a:solidFill>
+                  <a:srgbClr val="002333"/>
+                </a:solidFill>
+                <a:latin typeface="Inter"/>
+              </a:rPr>
+              <a:t>Rijksuniversiteit Groningen</a:t>
+            </a:r>
+          </a:p>
+        </p:txBody>
+      </p:sp>
+      <p:sp>
+        <p:nvSpPr>
+          <p:cNvPr id="28" name="TextBox 27"/>
+          <p:cNvSpPr txBox="1"/>
+          <p:nvPr/>
+        </p:nvSpPr>
+        <p:spPr>
+          <a:xfrm>
+            <a:off x="3937000" y="2222500"/>
+            <a:ext cx="444500" cy="152400"/>
+          </a:xfrm>
+          <a:prstGeom prst="rect">
+            <a:avLst/>
+          </a:prstGeom>
+          <a:noFill/>
+        </p:spPr>
+        <p:txBody>
+          <a:bodyPr wrap="square" lIns="0" rIns="0" tIns="0" bIns="0">
+            <a:spAutoFit/>
+          </a:bodyPr>
+          <a:lstStyle/>
+          <a:p>
+            <a:pPr algn="l">
+              <a:lnSpc>
+                <a:spcPct val="115000"/>
+              </a:lnSpc>
+            </a:pPr>
+            <a:r>
+              <a:rPr sz="950" b="0">
+                <a:solidFill>
+                  <a:srgbClr val="5B7480"/>
+                </a:solidFill>
+                <a:latin typeface="Inter"/>
+              </a:rPr>
+              <a:t>NL</a:t>
+            </a:r>
+          </a:p>
+        </p:txBody>
+      </p:sp>
+      <p:sp>
+        <p:nvSpPr>
+          <p:cNvPr id="29" name="Rounded Rectangle 28"/>
+          <p:cNvSpPr/>
+          <p:nvPr/>
+        </p:nvSpPr>
+        <p:spPr>
+          <a:xfrm>
+            <a:off x="5461000" y="2216150"/>
+            <a:ext cx="330200" cy="139700"/>
+          </a:xfrm>
+          <a:prstGeom prst="roundRect">
+            <a:avLst>
+              <a:gd name="adj" fmla="val 27272"/>
+            </a:avLst>
+          </a:prstGeom>
+          <a:solidFill>
+            <a:srgbClr val="FDF0DF"/>
+          </a:solidFill>
+          <a:ln>
+            <a:noFill/>
+          </a:ln>
+          <a:effectLst/>
+        </p:spPr>
+        <p:style>
+          <a:lnRef idx="1">
+            <a:schemeClr val="accent1"/>
+          </a:lnRef>
+          <a:fillRef idx="3">
+            <a:schemeClr val="accent1"/>
+          </a:fillRef>
+          <a:effectRef idx="2">
+            <a:schemeClr val="accent1"/>
+          </a:effectRef>
+          <a:fontRef idx="minor">
+            <a:schemeClr val="lt1"/>
+          </a:fontRef>
+        </p:style>
+        <p:txBody>
+          <a:bodyPr rtlCol="0" anchor="ctr"/>
+          <a:lstStyle/>
+          <a:p>
+            <a:pPr algn="ctr"/>
+          </a:p>
+        </p:txBody>
+      </p:sp>
+      <p:sp>
+        <p:nvSpPr>
+          <p:cNvPr id="30" name="TextBox 29"/>
           <p:cNvSpPr txBox="1"/>
           <p:nvPr/>
         </p:nvSpPr>
@@ -10604,7 +10650,7 @@
       </p:sp>
       <p:sp>
         <p:nvSpPr>
-          <p:cNvPr id="30" name="TextBox 29"/>
+          <p:cNvPr id="31" name="TextBox 30"/>
           <p:cNvSpPr txBox="1"/>
           <p:nvPr/>
         </p:nvSpPr>
@@ -10643,7 +10689,7 @@
       </p:sp>
       <p:sp>
         <p:nvSpPr>
-          <p:cNvPr id="31" name="TextBox 30"/>
+          <p:cNvPr id="32" name="TextBox 31"/>
           <p:cNvSpPr txBox="1"/>
           <p:nvPr/>
         </p:nvSpPr>
@@ -10682,7 +10728,7 @@
       </p:sp>
       <p:sp>
         <p:nvSpPr>
-          <p:cNvPr id="32" name="TextBox 31"/>
+          <p:cNvPr id="33" name="TextBox 32"/>
           <p:cNvSpPr txBox="1"/>
           <p:nvPr/>
         </p:nvSpPr>
@@ -10721,7 +10767,7 @@
       </p:sp>
       <p:sp>
         <p:nvSpPr>
-          <p:cNvPr id="33" name="TextBox 32"/>
+          <p:cNvPr id="34" name="TextBox 33"/>
           <p:cNvSpPr txBox="1"/>
           <p:nvPr/>
         </p:nvSpPr>
@@ -10760,14 +10806,14 @@
       </p:sp>
       <p:sp>
         <p:nvSpPr>
-          <p:cNvPr id="34" name="Rounded Rectangle 33"/>
+          <p:cNvPr id="35" name="Rounded Rectangle 34"/>
           <p:cNvSpPr/>
           <p:nvPr/>
         </p:nvSpPr>
         <p:spPr>
           <a:xfrm>
             <a:off x="4508500" y="2381250"/>
-            <a:ext cx="495300" cy="139700"/>
+            <a:ext cx="622300" cy="139700"/>
           </a:xfrm>
           <a:prstGeom prst="roundRect">
             <a:avLst>
@@ -10806,14 +10852,14 @@
       </p:sp>
       <p:sp>
         <p:nvSpPr>
-          <p:cNvPr id="35" name="TextBox 34"/>
+          <p:cNvPr id="36" name="TextBox 35"/>
           <p:cNvSpPr txBox="1"/>
           <p:nvPr/>
         </p:nvSpPr>
         <p:spPr>
           <a:xfrm>
             <a:off x="4508500" y="2393950"/>
-            <a:ext cx="495300" cy="114300"/>
+            <a:ext cx="622300" cy="114300"/>
           </a:xfrm>
           <a:prstGeom prst="rect">
             <a:avLst/>
@@ -10838,14 +10884,14 @@
                 </a:solidFill>
                 <a:latin typeface="Inter"/>
               </a:rPr>
-              <a:t>PRIVÉ</a:t>
-            </a:r>
-          </a:p>
-        </p:txBody>
-      </p:sp>
-      <p:sp>
-        <p:nvSpPr>
-          <p:cNvPr id="36" name="Rounded Rectangle 35"/>
+              <a:t>PRIVAAT</a:t>
+            </a:r>
+          </a:p>
+        </p:txBody>
+      </p:sp>
+      <p:sp>
+        <p:nvSpPr>
+          <p:cNvPr id="37" name="Rounded Rectangle 36"/>
           <p:cNvSpPr/>
           <p:nvPr/>
         </p:nvSpPr>
@@ -10891,7 +10937,7 @@
       </p:sp>
       <p:sp>
         <p:nvSpPr>
-          <p:cNvPr id="37" name="TextBox 36"/>
+          <p:cNvPr id="38" name="TextBox 37"/>
           <p:cNvSpPr txBox="1"/>
           <p:nvPr/>
         </p:nvSpPr>
@@ -10930,7 +10976,7 @@
       </p:sp>
       <p:sp>
         <p:nvSpPr>
-          <p:cNvPr id="38" name="TextBox 37"/>
+          <p:cNvPr id="39" name="TextBox 38"/>
           <p:cNvSpPr txBox="1"/>
           <p:nvPr/>
         </p:nvSpPr>
@@ -10969,7 +11015,7 @@
       </p:sp>
       <p:sp>
         <p:nvSpPr>
-          <p:cNvPr id="39" name="TextBox 38"/>
+          <p:cNvPr id="40" name="TextBox 39"/>
           <p:cNvSpPr txBox="1"/>
           <p:nvPr/>
         </p:nvSpPr>
@@ -11008,7 +11054,7 @@
       </p:sp>
       <p:sp>
         <p:nvSpPr>
-          <p:cNvPr id="40" name="TextBox 39"/>
+          <p:cNvPr id="41" name="TextBox 40"/>
           <p:cNvSpPr txBox="1"/>
           <p:nvPr/>
         </p:nvSpPr>
@@ -11047,7 +11093,7 @@
       </p:sp>
       <p:sp>
         <p:nvSpPr>
-          <p:cNvPr id="41" name="TextBox 40"/>
+          <p:cNvPr id="42" name="TextBox 41"/>
           <p:cNvSpPr txBox="1"/>
           <p:nvPr/>
         </p:nvSpPr>
@@ -11086,7 +11132,7 @@
       </p:sp>
       <p:sp>
         <p:nvSpPr>
-          <p:cNvPr id="42" name="Rounded Rectangle 41"/>
+          <p:cNvPr id="43" name="Rounded Rectangle 42"/>
           <p:cNvSpPr/>
           <p:nvPr/>
         </p:nvSpPr>
@@ -11132,7 +11178,7 @@
       </p:sp>
       <p:sp>
         <p:nvSpPr>
-          <p:cNvPr id="43" name="TextBox 42"/>
+          <p:cNvPr id="44" name="TextBox 43"/>
           <p:cNvSpPr txBox="1"/>
           <p:nvPr/>
         </p:nvSpPr>
@@ -11171,7 +11217,7 @@
       </p:sp>
       <p:sp>
         <p:nvSpPr>
-          <p:cNvPr id="44" name="TextBox 43"/>
+          <p:cNvPr id="45" name="TextBox 44"/>
           <p:cNvSpPr txBox="1"/>
           <p:nvPr/>
         </p:nvSpPr>
@@ -11210,7 +11256,7 @@
       </p:sp>
       <p:sp>
         <p:nvSpPr>
-          <p:cNvPr id="45" name="TextBox 44"/>
+          <p:cNvPr id="46" name="TextBox 45"/>
           <p:cNvSpPr txBox="1"/>
           <p:nvPr/>
         </p:nvSpPr>
@@ -11249,7 +11295,7 @@
       </p:sp>
       <p:sp>
         <p:nvSpPr>
-          <p:cNvPr id="46" name="TextBox 45"/>
+          <p:cNvPr id="47" name="TextBox 46"/>
           <p:cNvSpPr txBox="1"/>
           <p:nvPr/>
         </p:nvSpPr>
@@ -11288,7 +11334,7 @@
       </p:sp>
       <p:sp>
         <p:nvSpPr>
-          <p:cNvPr id="47" name="TextBox 46"/>
+          <p:cNvPr id="48" name="TextBox 47"/>
           <p:cNvSpPr txBox="1"/>
           <p:nvPr/>
         </p:nvSpPr>
@@ -11327,7 +11373,7 @@
       </p:sp>
       <p:sp>
         <p:nvSpPr>
-          <p:cNvPr id="48" name="Rounded Rectangle 47"/>
+          <p:cNvPr id="49" name="Rounded Rectangle 48"/>
           <p:cNvSpPr/>
           <p:nvPr/>
         </p:nvSpPr>
@@ -11373,7 +11419,7 @@
       </p:sp>
       <p:sp>
         <p:nvSpPr>
-          <p:cNvPr id="49" name="TextBox 48"/>
+          <p:cNvPr id="50" name="TextBox 49"/>
           <p:cNvSpPr txBox="1"/>
           <p:nvPr/>
         </p:nvSpPr>
@@ -11412,7 +11458,7 @@
       </p:sp>
       <p:sp>
         <p:nvSpPr>
-          <p:cNvPr id="50" name="TextBox 49"/>
+          <p:cNvPr id="51" name="TextBox 50"/>
           <p:cNvSpPr txBox="1"/>
           <p:nvPr/>
         </p:nvSpPr>
@@ -11451,7 +11497,7 @@
       </p:sp>
       <p:sp>
         <p:nvSpPr>
-          <p:cNvPr id="51" name="TextBox 50"/>
+          <p:cNvPr id="52" name="TextBox 51"/>
           <p:cNvSpPr txBox="1"/>
           <p:nvPr/>
         </p:nvSpPr>
@@ -11490,7 +11536,7 @@
       </p:sp>
       <p:sp>
         <p:nvSpPr>
-          <p:cNvPr id="52" name="TextBox 51"/>
+          <p:cNvPr id="53" name="TextBox 52"/>
           <p:cNvSpPr txBox="1"/>
           <p:nvPr/>
         </p:nvSpPr>
@@ -11529,7 +11575,7 @@
       </p:sp>
       <p:sp>
         <p:nvSpPr>
-          <p:cNvPr id="53" name="TextBox 52"/>
+          <p:cNvPr id="54" name="TextBox 53"/>
           <p:cNvSpPr txBox="1"/>
           <p:nvPr/>
         </p:nvSpPr>
@@ -11568,14 +11614,14 @@
       </p:sp>
       <p:sp>
         <p:nvSpPr>
-          <p:cNvPr id="54" name="Rounded Rectangle 53"/>
+          <p:cNvPr id="55" name="Rounded Rectangle 54"/>
           <p:cNvSpPr/>
           <p:nvPr/>
         </p:nvSpPr>
         <p:spPr>
           <a:xfrm>
             <a:off x="4508500" y="2876550"/>
-            <a:ext cx="495300" cy="139700"/>
+            <a:ext cx="622300" cy="139700"/>
           </a:xfrm>
           <a:prstGeom prst="roundRect">
             <a:avLst>
@@ -11614,14 +11660,14 @@
       </p:sp>
       <p:sp>
         <p:nvSpPr>
-          <p:cNvPr id="55" name="TextBox 54"/>
+          <p:cNvPr id="56" name="TextBox 55"/>
           <p:cNvSpPr txBox="1"/>
           <p:nvPr/>
         </p:nvSpPr>
         <p:spPr>
           <a:xfrm>
             <a:off x="4508500" y="2889250"/>
-            <a:ext cx="495300" cy="114300"/>
+            <a:ext cx="622300" cy="114300"/>
           </a:xfrm>
           <a:prstGeom prst="rect">
             <a:avLst/>
@@ -11646,215 +11692,20 @@
                 </a:solidFill>
                 <a:latin typeface="Inter"/>
               </a:rPr>
-              <a:t>PRIVÉ</a:t>
-            </a:r>
-          </a:p>
-        </p:txBody>
-      </p:sp>
-      <p:sp>
-        <p:nvSpPr>
-          <p:cNvPr id="56" name="TextBox 55"/>
-          <p:cNvSpPr txBox="1"/>
-          <p:nvPr/>
-        </p:nvSpPr>
-        <p:spPr>
-          <a:xfrm>
-            <a:off x="5461000" y="2882900"/>
-            <a:ext cx="571500" cy="152400"/>
-          </a:xfrm>
-          <a:prstGeom prst="rect">
-            <a:avLst/>
-          </a:prstGeom>
-          <a:noFill/>
-        </p:spPr>
-        <p:txBody>
-          <a:bodyPr wrap="square" lIns="0" rIns="0" tIns="0" bIns="0">
-            <a:spAutoFit/>
-          </a:bodyPr>
-          <a:lstStyle/>
-          <a:p>
-            <a:pPr algn="l">
-              <a:lnSpc>
-                <a:spcPct val="115000"/>
-              </a:lnSpc>
-            </a:pPr>
-            <a:r>
-              <a:rPr sz="800" b="0">
-                <a:solidFill>
-                  <a:srgbClr val="5B7480"/>
-                </a:solidFill>
-                <a:latin typeface="Inter"/>
-              </a:rPr>
-              <a:t>n.b.</a:t>
-            </a:r>
-          </a:p>
-        </p:txBody>
-      </p:sp>
-      <p:sp>
-        <p:nvSpPr>
-          <p:cNvPr id="57" name="TextBox 56"/>
-          <p:cNvSpPr txBox="1"/>
-          <p:nvPr/>
-        </p:nvSpPr>
-        <p:spPr>
-          <a:xfrm>
-            <a:off x="8572500" y="2882900"/>
-            <a:ext cx="1460500" cy="152400"/>
-          </a:xfrm>
-          <a:prstGeom prst="rect">
-            <a:avLst/>
-          </a:prstGeom>
-          <a:noFill/>
-        </p:spPr>
-        <p:txBody>
-          <a:bodyPr wrap="square" lIns="0" rIns="0" tIns="0" bIns="0">
-            <a:spAutoFit/>
-          </a:bodyPr>
-          <a:lstStyle/>
-          <a:p>
-            <a:pPr algn="r">
-              <a:lnSpc>
-                <a:spcPct val="115000"/>
-              </a:lnSpc>
-            </a:pPr>
-            <a:r>
-              <a:rPr sz="950" b="0">
-                <a:solidFill>
-                  <a:srgbClr val="002333"/>
-                </a:solidFill>
-                <a:latin typeface="Inter"/>
-              </a:rPr>
-              <a:t>€200.000</a:t>
-            </a:r>
-          </a:p>
-        </p:txBody>
-      </p:sp>
-      <p:sp>
-        <p:nvSpPr>
-          <p:cNvPr id="58" name="TextBox 57"/>
-          <p:cNvSpPr txBox="1"/>
-          <p:nvPr/>
-        </p:nvSpPr>
-        <p:spPr>
-          <a:xfrm>
-            <a:off x="10223500" y="2882900"/>
-            <a:ext cx="1206500" cy="152400"/>
-          </a:xfrm>
-          <a:prstGeom prst="rect">
-            <a:avLst/>
-          </a:prstGeom>
-          <a:noFill/>
-        </p:spPr>
-        <p:txBody>
-          <a:bodyPr wrap="square" lIns="0" rIns="0" tIns="0" bIns="0">
-            <a:spAutoFit/>
-          </a:bodyPr>
-          <a:lstStyle/>
-          <a:p>
-            <a:pPr algn="r">
-              <a:lnSpc>
-                <a:spcPct val="115000"/>
-              </a:lnSpc>
-            </a:pPr>
-            <a:r>
-              <a:rPr sz="950" b="0">
-                <a:solidFill>
-                  <a:srgbClr val="002333"/>
-                </a:solidFill>
-                <a:latin typeface="Inter"/>
-              </a:rPr>
-              <a:t>15%</a:t>
-            </a:r>
-          </a:p>
-        </p:txBody>
-      </p:sp>
-      <p:sp>
-        <p:nvSpPr>
-          <p:cNvPr id="59" name="TextBox 58"/>
-          <p:cNvSpPr txBox="1"/>
-          <p:nvPr/>
-        </p:nvSpPr>
-        <p:spPr>
-          <a:xfrm>
-            <a:off x="762000" y="3048000"/>
-            <a:ext cx="3048000" cy="152400"/>
-          </a:xfrm>
-          <a:prstGeom prst="rect">
-            <a:avLst/>
-          </a:prstGeom>
-          <a:noFill/>
-        </p:spPr>
-        <p:txBody>
-          <a:bodyPr wrap="square" lIns="0" rIns="0" tIns="0" bIns="0">
-            <a:spAutoFit/>
-          </a:bodyPr>
-          <a:lstStyle/>
-          <a:p>
-            <a:pPr algn="l">
-              <a:lnSpc>
-                <a:spcPct val="115000"/>
-              </a:lnSpc>
-            </a:pPr>
-            <a:r>
-              <a:rPr sz="950" b="0">
-                <a:solidFill>
-                  <a:srgbClr val="002333"/>
-                </a:solidFill>
-                <a:latin typeface="Inter"/>
-              </a:rPr>
-              <a:t>Goldsmiths</a:t>
-            </a:r>
-          </a:p>
-        </p:txBody>
-      </p:sp>
-      <p:sp>
-        <p:nvSpPr>
-          <p:cNvPr id="60" name="TextBox 59"/>
-          <p:cNvSpPr txBox="1"/>
-          <p:nvPr/>
-        </p:nvSpPr>
-        <p:spPr>
-          <a:xfrm>
-            <a:off x="3937000" y="3048000"/>
-            <a:ext cx="444500" cy="152400"/>
-          </a:xfrm>
-          <a:prstGeom prst="rect">
-            <a:avLst/>
-          </a:prstGeom>
-          <a:noFill/>
-        </p:spPr>
-        <p:txBody>
-          <a:bodyPr wrap="square" lIns="0" rIns="0" tIns="0" bIns="0">
-            <a:spAutoFit/>
-          </a:bodyPr>
-          <a:lstStyle/>
-          <a:p>
-            <a:pPr algn="l">
-              <a:lnSpc>
-                <a:spcPct val="115000"/>
-              </a:lnSpc>
-            </a:pPr>
-            <a:r>
-              <a:rPr sz="950" b="0">
-                <a:solidFill>
-                  <a:srgbClr val="5B7480"/>
-                </a:solidFill>
-                <a:latin typeface="Inter"/>
-              </a:rPr>
-              <a:t>UK</a:t>
-            </a:r>
-          </a:p>
-        </p:txBody>
-      </p:sp>
-      <p:sp>
-        <p:nvSpPr>
-          <p:cNvPr id="61" name="Rounded Rectangle 60"/>
+              <a:t>PRIVAAT</a:t>
+            </a:r>
+          </a:p>
+        </p:txBody>
+      </p:sp>
+      <p:sp>
+        <p:nvSpPr>
+          <p:cNvPr id="57" name="Rounded Rectangle 56"/>
           <p:cNvSpPr/>
           <p:nvPr/>
         </p:nvSpPr>
         <p:spPr>
           <a:xfrm>
-            <a:off x="5461000" y="3041650"/>
+            <a:off x="5461000" y="2876550"/>
             <a:ext cx="330200" cy="139700"/>
           </a:xfrm>
           <a:prstGeom prst="roundRect">
@@ -11894,7 +11745,248 @@
       </p:sp>
       <p:sp>
         <p:nvSpPr>
+          <p:cNvPr id="58" name="TextBox 57"/>
+          <p:cNvSpPr txBox="1"/>
+          <p:nvPr/>
+        </p:nvSpPr>
+        <p:spPr>
+          <a:xfrm>
+            <a:off x="5461000" y="2889250"/>
+            <a:ext cx="330200" cy="114300"/>
+          </a:xfrm>
+          <a:prstGeom prst="rect">
+            <a:avLst/>
+          </a:prstGeom>
+          <a:noFill/>
+        </p:spPr>
+        <p:txBody>
+          <a:bodyPr wrap="square" lIns="0" rIns="0" tIns="0" bIns="0">
+            <a:spAutoFit/>
+          </a:bodyPr>
+          <a:lstStyle/>
+          <a:p>
+            <a:pPr algn="ctr">
+              <a:lnSpc>
+                <a:spcPct val="115000"/>
+              </a:lnSpc>
+            </a:pPr>
+            <a:r>
+              <a:rPr sz="650" b="1">
+                <a:solidFill>
+                  <a:srgbClr val="E07B00"/>
+                </a:solidFill>
+                <a:latin typeface="Inter"/>
+              </a:rPr>
+              <a:t>Q3</a:t>
+            </a:r>
+          </a:p>
+        </p:txBody>
+      </p:sp>
+      <p:sp>
+        <p:nvSpPr>
+          <p:cNvPr id="59" name="TextBox 58"/>
+          <p:cNvSpPr txBox="1"/>
+          <p:nvPr/>
+        </p:nvSpPr>
+        <p:spPr>
+          <a:xfrm>
+            <a:off x="8572500" y="2882900"/>
+            <a:ext cx="1460500" cy="152400"/>
+          </a:xfrm>
+          <a:prstGeom prst="rect">
+            <a:avLst/>
+          </a:prstGeom>
+          <a:noFill/>
+        </p:spPr>
+        <p:txBody>
+          <a:bodyPr wrap="square" lIns="0" rIns="0" tIns="0" bIns="0">
+            <a:spAutoFit/>
+          </a:bodyPr>
+          <a:lstStyle/>
+          <a:p>
+            <a:pPr algn="r">
+              <a:lnSpc>
+                <a:spcPct val="115000"/>
+              </a:lnSpc>
+            </a:pPr>
+            <a:r>
+              <a:rPr sz="950" b="0">
+                <a:solidFill>
+                  <a:srgbClr val="002333"/>
+                </a:solidFill>
+                <a:latin typeface="Inter"/>
+              </a:rPr>
+              <a:t>€200.000</a:t>
+            </a:r>
+          </a:p>
+        </p:txBody>
+      </p:sp>
+      <p:sp>
+        <p:nvSpPr>
+          <p:cNvPr id="60" name="TextBox 59"/>
+          <p:cNvSpPr txBox="1"/>
+          <p:nvPr/>
+        </p:nvSpPr>
+        <p:spPr>
+          <a:xfrm>
+            <a:off x="10223500" y="2882900"/>
+            <a:ext cx="1206500" cy="152400"/>
+          </a:xfrm>
+          <a:prstGeom prst="rect">
+            <a:avLst/>
+          </a:prstGeom>
+          <a:noFill/>
+        </p:spPr>
+        <p:txBody>
+          <a:bodyPr wrap="square" lIns="0" rIns="0" tIns="0" bIns="0">
+            <a:spAutoFit/>
+          </a:bodyPr>
+          <a:lstStyle/>
+          <a:p>
+            <a:pPr algn="r">
+              <a:lnSpc>
+                <a:spcPct val="115000"/>
+              </a:lnSpc>
+            </a:pPr>
+            <a:r>
+              <a:rPr sz="950" b="0">
+                <a:solidFill>
+                  <a:srgbClr val="002333"/>
+                </a:solidFill>
+                <a:latin typeface="Inter"/>
+              </a:rPr>
+              <a:t>15%</a:t>
+            </a:r>
+          </a:p>
+        </p:txBody>
+      </p:sp>
+      <p:sp>
+        <p:nvSpPr>
+          <p:cNvPr id="61" name="TextBox 60"/>
+          <p:cNvSpPr txBox="1"/>
+          <p:nvPr/>
+        </p:nvSpPr>
+        <p:spPr>
+          <a:xfrm>
+            <a:off x="762000" y="3048000"/>
+            <a:ext cx="3048000" cy="152400"/>
+          </a:xfrm>
+          <a:prstGeom prst="rect">
+            <a:avLst/>
+          </a:prstGeom>
+          <a:noFill/>
+        </p:spPr>
+        <p:txBody>
+          <a:bodyPr wrap="square" lIns="0" rIns="0" tIns="0" bIns="0">
+            <a:spAutoFit/>
+          </a:bodyPr>
+          <a:lstStyle/>
+          <a:p>
+            <a:pPr algn="l">
+              <a:lnSpc>
+                <a:spcPct val="115000"/>
+              </a:lnSpc>
+            </a:pPr>
+            <a:r>
+              <a:rPr sz="950" b="0">
+                <a:solidFill>
+                  <a:srgbClr val="002333"/>
+                </a:solidFill>
+                <a:latin typeface="Inter"/>
+              </a:rPr>
+              <a:t>Goldsmiths</a:t>
+            </a:r>
+          </a:p>
+        </p:txBody>
+      </p:sp>
+      <p:sp>
+        <p:nvSpPr>
           <p:cNvPr id="62" name="TextBox 61"/>
+          <p:cNvSpPr txBox="1"/>
+          <p:nvPr/>
+        </p:nvSpPr>
+        <p:spPr>
+          <a:xfrm>
+            <a:off x="3937000" y="3048000"/>
+            <a:ext cx="444500" cy="152400"/>
+          </a:xfrm>
+          <a:prstGeom prst="rect">
+            <a:avLst/>
+          </a:prstGeom>
+          <a:noFill/>
+        </p:spPr>
+        <p:txBody>
+          <a:bodyPr wrap="square" lIns="0" rIns="0" tIns="0" bIns="0">
+            <a:spAutoFit/>
+          </a:bodyPr>
+          <a:lstStyle/>
+          <a:p>
+            <a:pPr algn="l">
+              <a:lnSpc>
+                <a:spcPct val="115000"/>
+              </a:lnSpc>
+            </a:pPr>
+            <a:r>
+              <a:rPr sz="950" b="0">
+                <a:solidFill>
+                  <a:srgbClr val="5B7480"/>
+                </a:solidFill>
+                <a:latin typeface="Inter"/>
+              </a:rPr>
+              <a:t>UK</a:t>
+            </a:r>
+          </a:p>
+        </p:txBody>
+      </p:sp>
+      <p:sp>
+        <p:nvSpPr>
+          <p:cNvPr id="63" name="Rounded Rectangle 62"/>
+          <p:cNvSpPr/>
+          <p:nvPr/>
+        </p:nvSpPr>
+        <p:spPr>
+          <a:xfrm>
+            <a:off x="5461000" y="3041650"/>
+            <a:ext cx="330200" cy="139700"/>
+          </a:xfrm>
+          <a:prstGeom prst="roundRect">
+            <a:avLst>
+              <a:gd name="adj" fmla="val 27272"/>
+            </a:avLst>
+          </a:prstGeom>
+          <a:solidFill>
+            <a:srgbClr val="FDF0DF"/>
+          </a:solidFill>
+          <a:ln>
+            <a:noFill/>
+          </a:ln>
+          <a:effectLst/>
+        </p:spPr>
+        <p:style>
+          <a:lnRef idx="1">
+            <a:schemeClr val="accent1"/>
+          </a:lnRef>
+          <a:fillRef idx="3">
+            <a:schemeClr val="accent1"/>
+          </a:fillRef>
+          <a:effectRef idx="2">
+            <a:schemeClr val="accent1"/>
+          </a:effectRef>
+          <a:fontRef idx="minor">
+            <a:schemeClr val="lt1"/>
+          </a:fontRef>
+        </p:style>
+        <p:txBody>
+          <a:bodyPr rtlCol="0" anchor="ctr"/>
+          <a:lstStyle/>
+          <a:p>
+            <a:pPr algn="ctr"/>
+          </a:p>
+        </p:txBody>
+      </p:sp>
+      <p:sp>
+        <p:nvSpPr>
+          <p:cNvPr id="64" name="TextBox 63"/>
           <p:cNvSpPr txBox="1"/>
           <p:nvPr/>
         </p:nvSpPr>
@@ -11933,7 +12025,7 @@
       </p:sp>
       <p:sp>
         <p:nvSpPr>
-          <p:cNvPr id="63" name="TextBox 62"/>
+          <p:cNvPr id="65" name="TextBox 64"/>
           <p:cNvSpPr txBox="1"/>
           <p:nvPr/>
         </p:nvSpPr>
@@ -11972,7 +12064,7 @@
       </p:sp>
       <p:sp>
         <p:nvSpPr>
-          <p:cNvPr id="64" name="TextBox 63"/>
+          <p:cNvPr id="66" name="TextBox 65"/>
           <p:cNvSpPr txBox="1"/>
           <p:nvPr/>
         </p:nvSpPr>
@@ -12011,7 +12103,7 @@
       </p:sp>
       <p:sp>
         <p:nvSpPr>
-          <p:cNvPr id="65" name="TextBox 64"/>
+          <p:cNvPr id="67" name="TextBox 66"/>
           <p:cNvSpPr txBox="1"/>
           <p:nvPr/>
         </p:nvSpPr>
@@ -12050,7 +12142,7 @@
       </p:sp>
       <p:sp>
         <p:nvSpPr>
-          <p:cNvPr id="66" name="TextBox 65"/>
+          <p:cNvPr id="68" name="TextBox 67"/>
           <p:cNvSpPr txBox="1"/>
           <p:nvPr/>
         </p:nvSpPr>
@@ -12089,7 +12181,7 @@
       </p:sp>
       <p:sp>
         <p:nvSpPr>
-          <p:cNvPr id="67" name="TextBox 66"/>
+          <p:cNvPr id="69" name="TextBox 68"/>
           <p:cNvSpPr txBox="1"/>
           <p:nvPr/>
         </p:nvSpPr>
@@ -12128,7 +12220,7 @@
       </p:sp>
       <p:sp>
         <p:nvSpPr>
-          <p:cNvPr id="68" name="TextBox 67"/>
+          <p:cNvPr id="70" name="TextBox 69"/>
           <p:cNvSpPr txBox="1"/>
           <p:nvPr/>
         </p:nvSpPr>
@@ -12167,7 +12259,7 @@
       </p:sp>
       <p:sp>
         <p:nvSpPr>
-          <p:cNvPr id="69" name="TextBox 68"/>
+          <p:cNvPr id="71" name="TextBox 70"/>
           <p:cNvSpPr txBox="1"/>
           <p:nvPr/>
         </p:nvSpPr>
@@ -12206,7 +12298,7 @@
       </p:sp>
       <p:sp>
         <p:nvSpPr>
-          <p:cNvPr id="70" name="TextBox 69"/>
+          <p:cNvPr id="72" name="TextBox 71"/>
           <p:cNvSpPr txBox="1"/>
           <p:nvPr/>
         </p:nvSpPr>
@@ -12245,14 +12337,14 @@
       </p:sp>
       <p:sp>
         <p:nvSpPr>
-          <p:cNvPr id="71" name="Rounded Rectangle 70"/>
+          <p:cNvPr id="73" name="Rounded Rectangle 72"/>
           <p:cNvSpPr/>
           <p:nvPr/>
         </p:nvSpPr>
         <p:spPr>
           <a:xfrm>
             <a:off x="4508500" y="3371850"/>
-            <a:ext cx="495300" cy="139700"/>
+            <a:ext cx="622300" cy="139700"/>
           </a:xfrm>
           <a:prstGeom prst="roundRect">
             <a:avLst>
@@ -12291,14 +12383,14 @@
       </p:sp>
       <p:sp>
         <p:nvSpPr>
-          <p:cNvPr id="72" name="TextBox 71"/>
+          <p:cNvPr id="74" name="TextBox 73"/>
           <p:cNvSpPr txBox="1"/>
           <p:nvPr/>
         </p:nvSpPr>
         <p:spPr>
           <a:xfrm>
             <a:off x="4508500" y="3384550"/>
-            <a:ext cx="495300" cy="114300"/>
+            <a:ext cx="622300" cy="114300"/>
           </a:xfrm>
           <a:prstGeom prst="rect">
             <a:avLst/>
@@ -12323,14 +12415,14 @@
                 </a:solidFill>
                 <a:latin typeface="Inter"/>
               </a:rPr>
-              <a:t>PRIVÉ</a:t>
-            </a:r>
-          </a:p>
-        </p:txBody>
-      </p:sp>
-      <p:sp>
-        <p:nvSpPr>
-          <p:cNvPr id="73" name="Rounded Rectangle 72"/>
+              <a:t>PRIVAAT</a:t>
+            </a:r>
+          </a:p>
+        </p:txBody>
+      </p:sp>
+      <p:sp>
+        <p:nvSpPr>
+          <p:cNvPr id="75" name="Rounded Rectangle 74"/>
           <p:cNvSpPr/>
           <p:nvPr/>
         </p:nvSpPr>
@@ -12376,7 +12468,7 @@
       </p:sp>
       <p:sp>
         <p:nvSpPr>
-          <p:cNvPr id="74" name="TextBox 73"/>
+          <p:cNvPr id="76" name="TextBox 75"/>
           <p:cNvSpPr txBox="1"/>
           <p:nvPr/>
         </p:nvSpPr>
@@ -12415,7 +12507,7 @@
       </p:sp>
       <p:sp>
         <p:nvSpPr>
-          <p:cNvPr id="75" name="TextBox 74"/>
+          <p:cNvPr id="77" name="TextBox 76"/>
           <p:cNvSpPr txBox="1"/>
           <p:nvPr/>
         </p:nvSpPr>
@@ -12454,7 +12546,7 @@
       </p:sp>
       <p:sp>
         <p:nvSpPr>
-          <p:cNvPr id="76" name="TextBox 75"/>
+          <p:cNvPr id="78" name="TextBox 77"/>
           <p:cNvSpPr txBox="1"/>
           <p:nvPr/>
         </p:nvSpPr>
@@ -12493,7 +12585,7 @@
       </p:sp>
       <p:sp>
         <p:nvSpPr>
-          <p:cNvPr id="77" name="TextBox 76"/>
+          <p:cNvPr id="79" name="TextBox 78"/>
           <p:cNvSpPr txBox="1"/>
           <p:nvPr/>
         </p:nvSpPr>
@@ -12532,7 +12624,7 @@
       </p:sp>
       <p:sp>
         <p:nvSpPr>
-          <p:cNvPr id="78" name="TextBox 77"/>
+          <p:cNvPr id="80" name="TextBox 79"/>
           <p:cNvSpPr txBox="1"/>
           <p:nvPr/>
         </p:nvSpPr>
@@ -12571,7 +12663,7 @@
       </p:sp>
       <p:sp>
         <p:nvSpPr>
-          <p:cNvPr id="79" name="TextBox 78"/>
+          <p:cNvPr id="81" name="TextBox 80"/>
           <p:cNvSpPr txBox="1"/>
           <p:nvPr/>
         </p:nvSpPr>
@@ -12610,7 +12702,7 @@
       </p:sp>
       <p:sp>
         <p:nvSpPr>
-          <p:cNvPr id="80" name="TextBox 79"/>
+          <p:cNvPr id="82" name="TextBox 81"/>
           <p:cNvSpPr txBox="1"/>
           <p:nvPr/>
         </p:nvSpPr>
@@ -12649,7 +12741,7 @@
       </p:sp>
       <p:sp>
         <p:nvSpPr>
-          <p:cNvPr id="81" name="TextBox 80"/>
+          <p:cNvPr id="83" name="TextBox 82"/>
           <p:cNvSpPr txBox="1"/>
           <p:nvPr/>
         </p:nvSpPr>
@@ -12688,7 +12780,7 @@
       </p:sp>
       <p:sp>
         <p:nvSpPr>
-          <p:cNvPr id="82" name="TextBox 81"/>
+          <p:cNvPr id="84" name="TextBox 83"/>
           <p:cNvSpPr txBox="1"/>
           <p:nvPr/>
         </p:nvSpPr>
@@ -12727,7 +12819,7 @@
       </p:sp>
       <p:sp>
         <p:nvSpPr>
-          <p:cNvPr id="83" name="TextBox 82"/>
+          <p:cNvPr id="85" name="TextBox 84"/>
           <p:cNvSpPr txBox="1"/>
           <p:nvPr/>
         </p:nvSpPr>
@@ -12766,7 +12858,7 @@
       </p:sp>
       <p:sp>
         <p:nvSpPr>
-          <p:cNvPr id="84" name="TextBox 83"/>
+          <p:cNvPr id="86" name="TextBox 85"/>
           <p:cNvSpPr txBox="1"/>
           <p:nvPr/>
         </p:nvSpPr>
@@ -12805,7 +12897,7 @@
       </p:sp>
       <p:sp>
         <p:nvSpPr>
-          <p:cNvPr id="85" name="TextBox 84"/>
+          <p:cNvPr id="87" name="TextBox 86"/>
           <p:cNvSpPr txBox="1"/>
           <p:nvPr/>
         </p:nvSpPr>
@@ -12844,7 +12936,7 @@
       </p:sp>
       <p:sp>
         <p:nvSpPr>
-          <p:cNvPr id="86" name="TextBox 85"/>
+          <p:cNvPr id="88" name="TextBox 87"/>
           <p:cNvSpPr txBox="1"/>
           <p:nvPr/>
         </p:nvSpPr>
@@ -12883,7 +12975,7 @@
       </p:sp>
       <p:sp>
         <p:nvSpPr>
-          <p:cNvPr id="87" name="TextBox 86"/>
+          <p:cNvPr id="89" name="TextBox 88"/>
           <p:cNvSpPr txBox="1"/>
           <p:nvPr/>
         </p:nvSpPr>
@@ -12922,7 +13014,7 @@
       </p:sp>
       <p:sp>
         <p:nvSpPr>
-          <p:cNvPr id="88" name="TextBox 87"/>
+          <p:cNvPr id="90" name="TextBox 89"/>
           <p:cNvSpPr txBox="1"/>
           <p:nvPr/>
         </p:nvSpPr>
@@ -12961,7 +13053,7 @@
       </p:sp>
       <p:sp>
         <p:nvSpPr>
-          <p:cNvPr id="89" name="TextBox 88"/>
+          <p:cNvPr id="91" name="TextBox 90"/>
           <p:cNvSpPr txBox="1"/>
           <p:nvPr/>
         </p:nvSpPr>
@@ -13000,7 +13092,7 @@
       </p:sp>
       <p:sp>
         <p:nvSpPr>
-          <p:cNvPr id="90" name="TextBox 89"/>
+          <p:cNvPr id="92" name="TextBox 91"/>
           <p:cNvSpPr txBox="1"/>
           <p:nvPr/>
         </p:nvSpPr>
@@ -13039,7 +13131,7 @@
       </p:sp>
       <p:sp>
         <p:nvSpPr>
-          <p:cNvPr id="91" name="TextBox 90"/>
+          <p:cNvPr id="93" name="TextBox 92"/>
           <p:cNvSpPr txBox="1"/>
           <p:nvPr/>
         </p:nvSpPr>
@@ -13078,7 +13170,7 @@
       </p:sp>
       <p:sp>
         <p:nvSpPr>
-          <p:cNvPr id="92" name="TextBox 91"/>
+          <p:cNvPr id="94" name="TextBox 93"/>
           <p:cNvSpPr txBox="1"/>
           <p:nvPr/>
         </p:nvSpPr>
@@ -13117,7 +13209,7 @@
       </p:sp>
       <p:sp>
         <p:nvSpPr>
-          <p:cNvPr id="93" name="TextBox 92"/>
+          <p:cNvPr id="95" name="TextBox 94"/>
           <p:cNvSpPr txBox="1"/>
           <p:nvPr/>
         </p:nvSpPr>
@@ -13156,7 +13248,7 @@
       </p:sp>
       <p:sp>
         <p:nvSpPr>
-          <p:cNvPr id="94" name="TextBox 93"/>
+          <p:cNvPr id="96" name="TextBox 95"/>
           <p:cNvSpPr txBox="1"/>
           <p:nvPr/>
         </p:nvSpPr>
@@ -13195,14 +13287,14 @@
       </p:sp>
       <p:sp>
         <p:nvSpPr>
-          <p:cNvPr id="95" name="Rounded Rectangle 94"/>
+          <p:cNvPr id="97" name="Rounded Rectangle 96"/>
           <p:cNvSpPr/>
           <p:nvPr/>
         </p:nvSpPr>
         <p:spPr>
           <a:xfrm>
             <a:off x="4508500" y="4197350"/>
-            <a:ext cx="495300" cy="139700"/>
+            <a:ext cx="622300" cy="139700"/>
           </a:xfrm>
           <a:prstGeom prst="roundRect">
             <a:avLst>
@@ -13241,14 +13333,14 @@
       </p:sp>
       <p:sp>
         <p:nvSpPr>
-          <p:cNvPr id="96" name="TextBox 95"/>
+          <p:cNvPr id="98" name="TextBox 97"/>
           <p:cNvSpPr txBox="1"/>
           <p:nvPr/>
         </p:nvSpPr>
         <p:spPr>
           <a:xfrm>
             <a:off x="4508500" y="4210050"/>
-            <a:ext cx="495300" cy="114300"/>
+            <a:ext cx="622300" cy="114300"/>
           </a:xfrm>
           <a:prstGeom prst="rect">
             <a:avLst/>
@@ -13273,14 +13365,14 @@
                 </a:solidFill>
                 <a:latin typeface="Inter"/>
               </a:rPr>
-              <a:t>PRIVÉ</a:t>
-            </a:r>
-          </a:p>
-        </p:txBody>
-      </p:sp>
-      <p:sp>
-        <p:nvSpPr>
-          <p:cNvPr id="97" name="Rounded Rectangle 96"/>
+              <a:t>PRIVAAT</a:t>
+            </a:r>
+          </a:p>
+        </p:txBody>
+      </p:sp>
+      <p:sp>
+        <p:nvSpPr>
+          <p:cNvPr id="99" name="Rounded Rectangle 98"/>
           <p:cNvSpPr/>
           <p:nvPr/>
         </p:nvSpPr>
@@ -13326,7 +13418,7 @@
       </p:sp>
       <p:sp>
         <p:nvSpPr>
-          <p:cNvPr id="98" name="TextBox 97"/>
+          <p:cNvPr id="100" name="TextBox 99"/>
           <p:cNvSpPr txBox="1"/>
           <p:nvPr/>
         </p:nvSpPr>
@@ -13365,7 +13457,7 @@
       </p:sp>
       <p:sp>
         <p:nvSpPr>
-          <p:cNvPr id="99" name="TextBox 98"/>
+          <p:cNvPr id="101" name="TextBox 100"/>
           <p:cNvSpPr txBox="1"/>
           <p:nvPr/>
         </p:nvSpPr>
@@ -13404,7 +13496,7 @@
       </p:sp>
       <p:sp>
         <p:nvSpPr>
-          <p:cNvPr id="100" name="TextBox 99"/>
+          <p:cNvPr id="102" name="TextBox 101"/>
           <p:cNvSpPr txBox="1"/>
           <p:nvPr/>
         </p:nvSpPr>
@@ -13443,7 +13535,7 @@
       </p:sp>
       <p:sp>
         <p:nvSpPr>
-          <p:cNvPr id="101" name="TextBox 100"/>
+          <p:cNvPr id="103" name="TextBox 102"/>
           <p:cNvSpPr txBox="1"/>
           <p:nvPr/>
         </p:nvSpPr>
@@ -13482,7 +13574,7 @@
       </p:sp>
       <p:sp>
         <p:nvSpPr>
-          <p:cNvPr id="102" name="TextBox 101"/>
+          <p:cNvPr id="104" name="TextBox 103"/>
           <p:cNvSpPr txBox="1"/>
           <p:nvPr/>
         </p:nvSpPr>
@@ -13521,14 +13613,14 @@
       </p:sp>
       <p:sp>
         <p:nvSpPr>
-          <p:cNvPr id="103" name="Rounded Rectangle 102"/>
+          <p:cNvPr id="105" name="Rounded Rectangle 104"/>
           <p:cNvSpPr/>
           <p:nvPr/>
         </p:nvSpPr>
         <p:spPr>
           <a:xfrm>
             <a:off x="4508500" y="4362450"/>
-            <a:ext cx="495300" cy="139700"/>
+            <a:ext cx="622300" cy="139700"/>
           </a:xfrm>
           <a:prstGeom prst="roundRect">
             <a:avLst>
@@ -13567,14 +13659,14 @@
       </p:sp>
       <p:sp>
         <p:nvSpPr>
-          <p:cNvPr id="104" name="TextBox 103"/>
+          <p:cNvPr id="106" name="TextBox 105"/>
           <p:cNvSpPr txBox="1"/>
           <p:nvPr/>
         </p:nvSpPr>
         <p:spPr>
           <a:xfrm>
             <a:off x="4508500" y="4375150"/>
-            <a:ext cx="495300" cy="114300"/>
+            <a:ext cx="622300" cy="114300"/>
           </a:xfrm>
           <a:prstGeom prst="rect">
             <a:avLst/>
@@ -13599,14 +13691,14 @@
                 </a:solidFill>
                 <a:latin typeface="Inter"/>
               </a:rPr>
-              <a:t>PRIVÉ</a:t>
-            </a:r>
-          </a:p>
-        </p:txBody>
-      </p:sp>
-      <p:sp>
-        <p:nvSpPr>
-          <p:cNvPr id="105" name="Rounded Rectangle 104"/>
+              <a:t>PRIVAAT</a:t>
+            </a:r>
+          </a:p>
+        </p:txBody>
+      </p:sp>
+      <p:sp>
+        <p:nvSpPr>
+          <p:cNvPr id="107" name="Rounded Rectangle 106"/>
           <p:cNvSpPr/>
           <p:nvPr/>
         </p:nvSpPr>
@@ -13652,7 +13744,7 @@
       </p:sp>
       <p:sp>
         <p:nvSpPr>
-          <p:cNvPr id="106" name="TextBox 105"/>
+          <p:cNvPr id="108" name="TextBox 107"/>
           <p:cNvSpPr txBox="1"/>
           <p:nvPr/>
         </p:nvSpPr>
@@ -13691,7 +13783,7 @@
       </p:sp>
       <p:sp>
         <p:nvSpPr>
-          <p:cNvPr id="107" name="TextBox 106"/>
+          <p:cNvPr id="109" name="TextBox 108"/>
           <p:cNvSpPr txBox="1"/>
           <p:nvPr/>
         </p:nvSpPr>
@@ -13730,7 +13822,7 @@
       </p:sp>
       <p:sp>
         <p:nvSpPr>
-          <p:cNvPr id="108" name="TextBox 107"/>
+          <p:cNvPr id="110" name="TextBox 109"/>
           <p:cNvSpPr txBox="1"/>
           <p:nvPr/>
         </p:nvSpPr>
@@ -13769,7 +13861,7 @@
       </p:sp>
       <p:sp>
         <p:nvSpPr>
-          <p:cNvPr id="109" name="TextBox 108"/>
+          <p:cNvPr id="111" name="TextBox 110"/>
           <p:cNvSpPr txBox="1"/>
           <p:nvPr/>
         </p:nvSpPr>
@@ -13808,7 +13900,7 @@
       </p:sp>
       <p:sp>
         <p:nvSpPr>
-          <p:cNvPr id="110" name="TextBox 109"/>
+          <p:cNvPr id="112" name="TextBox 111"/>
           <p:cNvSpPr txBox="1"/>
           <p:nvPr/>
         </p:nvSpPr>
@@ -13847,7 +13939,7 @@
       </p:sp>
       <p:sp>
         <p:nvSpPr>
-          <p:cNvPr id="111" name="TextBox 110"/>
+          <p:cNvPr id="113" name="TextBox 112"/>
           <p:cNvSpPr txBox="1"/>
           <p:nvPr/>
         </p:nvSpPr>
@@ -13886,7 +13978,7 @@
       </p:sp>
       <p:sp>
         <p:nvSpPr>
-          <p:cNvPr id="112" name="Rounded Rectangle 111"/>
+          <p:cNvPr id="114" name="Rounded Rectangle 113"/>
           <p:cNvSpPr/>
           <p:nvPr/>
         </p:nvSpPr>
@@ -13932,7 +14024,7 @@
       </p:sp>
       <p:sp>
         <p:nvSpPr>
-          <p:cNvPr id="113" name="TextBox 112"/>
+          <p:cNvPr id="115" name="TextBox 114"/>
           <p:cNvSpPr txBox="1"/>
           <p:nvPr/>
         </p:nvSpPr>
@@ -13971,7 +14063,7 @@
       </p:sp>
       <p:sp>
         <p:nvSpPr>
-          <p:cNvPr id="114" name="TextBox 113"/>
+          <p:cNvPr id="116" name="TextBox 115"/>
           <p:cNvSpPr txBox="1"/>
           <p:nvPr/>
         </p:nvSpPr>
@@ -14010,7 +14102,7 @@
       </p:sp>
       <p:sp>
         <p:nvSpPr>
-          <p:cNvPr id="115" name="TextBox 114"/>
+          <p:cNvPr id="117" name="TextBox 116"/>
           <p:cNvSpPr txBox="1"/>
           <p:nvPr/>
         </p:nvSpPr>
@@ -14049,7 +14141,7 @@
       </p:sp>
       <p:sp>
         <p:nvSpPr>
-          <p:cNvPr id="116" name="TextBox 115"/>
+          <p:cNvPr id="118" name="TextBox 117"/>
           <p:cNvSpPr txBox="1"/>
           <p:nvPr/>
         </p:nvSpPr>
@@ -14088,7 +14180,7 @@
       </p:sp>
       <p:sp>
         <p:nvSpPr>
-          <p:cNvPr id="117" name="TextBox 116"/>
+          <p:cNvPr id="119" name="TextBox 118"/>
           <p:cNvSpPr txBox="1"/>
           <p:nvPr/>
         </p:nvSpPr>
@@ -14127,7 +14219,7 @@
       </p:sp>
       <p:sp>
         <p:nvSpPr>
-          <p:cNvPr id="118" name="TextBox 117"/>
+          <p:cNvPr id="120" name="TextBox 119"/>
           <p:cNvSpPr txBox="1"/>
           <p:nvPr/>
         </p:nvSpPr>
@@ -14166,7 +14258,7 @@
       </p:sp>
       <p:sp>
         <p:nvSpPr>
-          <p:cNvPr id="119" name="Rounded Rectangle 118"/>
+          <p:cNvPr id="121" name="Rounded Rectangle 120"/>
           <p:cNvSpPr/>
           <p:nvPr/>
         </p:nvSpPr>
@@ -14212,7 +14304,7 @@
       </p:sp>
       <p:sp>
         <p:nvSpPr>
-          <p:cNvPr id="120" name="TextBox 119"/>
+          <p:cNvPr id="122" name="TextBox 121"/>
           <p:cNvSpPr txBox="1"/>
           <p:nvPr/>
         </p:nvSpPr>
@@ -14251,7 +14343,7 @@
       </p:sp>
       <p:sp>
         <p:nvSpPr>
-          <p:cNvPr id="121" name="TextBox 120"/>
+          <p:cNvPr id="123" name="TextBox 122"/>
           <p:cNvSpPr txBox="1"/>
           <p:nvPr/>
         </p:nvSpPr>
@@ -14290,7 +14382,7 @@
       </p:sp>
       <p:sp>
         <p:nvSpPr>
-          <p:cNvPr id="122" name="TextBox 121"/>
+          <p:cNvPr id="124" name="TextBox 123"/>
           <p:cNvSpPr txBox="1"/>
           <p:nvPr/>
         </p:nvSpPr>
@@ -14329,7 +14421,7 @@
       </p:sp>
       <p:sp>
         <p:nvSpPr>
-          <p:cNvPr id="123" name="TextBox 122"/>
+          <p:cNvPr id="125" name="TextBox 124"/>
           <p:cNvSpPr txBox="1"/>
           <p:nvPr/>
         </p:nvSpPr>
@@ -14368,7 +14460,7 @@
       </p:sp>
       <p:sp>
         <p:nvSpPr>
-          <p:cNvPr id="124" name="TextBox 123"/>
+          <p:cNvPr id="126" name="TextBox 125"/>
           <p:cNvSpPr txBox="1"/>
           <p:nvPr/>
         </p:nvSpPr>
@@ -14407,14 +14499,14 @@
       </p:sp>
       <p:sp>
         <p:nvSpPr>
-          <p:cNvPr id="125" name="Rounded Rectangle 124"/>
+          <p:cNvPr id="127" name="Rounded Rectangle 126"/>
           <p:cNvSpPr/>
           <p:nvPr/>
         </p:nvSpPr>
         <p:spPr>
           <a:xfrm>
             <a:off x="4508500" y="4857750"/>
-            <a:ext cx="495300" cy="139700"/>
+            <a:ext cx="622300" cy="139700"/>
           </a:xfrm>
           <a:prstGeom prst="roundRect">
             <a:avLst>
@@ -14453,14 +14545,14 @@
       </p:sp>
       <p:sp>
         <p:nvSpPr>
-          <p:cNvPr id="126" name="TextBox 125"/>
+          <p:cNvPr id="128" name="TextBox 127"/>
           <p:cNvSpPr txBox="1"/>
           <p:nvPr/>
         </p:nvSpPr>
         <p:spPr>
           <a:xfrm>
             <a:off x="4508500" y="4870450"/>
-            <a:ext cx="495300" cy="114300"/>
+            <a:ext cx="622300" cy="114300"/>
           </a:xfrm>
           <a:prstGeom prst="rect">
             <a:avLst/>
@@ -14485,14 +14577,14 @@
                 </a:solidFill>
                 <a:latin typeface="Inter"/>
               </a:rPr>
-              <a:t>PRIVÉ</a:t>
-            </a:r>
-          </a:p>
-        </p:txBody>
-      </p:sp>
-      <p:sp>
-        <p:nvSpPr>
-          <p:cNvPr id="127" name="Rounded Rectangle 126"/>
+              <a:t>PRIVAAT</a:t>
+            </a:r>
+          </a:p>
+        </p:txBody>
+      </p:sp>
+      <p:sp>
+        <p:nvSpPr>
+          <p:cNvPr id="129" name="Rounded Rectangle 128"/>
           <p:cNvSpPr/>
           <p:nvPr/>
         </p:nvSpPr>
@@ -14538,7 +14630,7 @@
       </p:sp>
       <p:sp>
         <p:nvSpPr>
-          <p:cNvPr id="128" name="TextBox 127"/>
+          <p:cNvPr id="130" name="TextBox 129"/>
           <p:cNvSpPr txBox="1"/>
           <p:nvPr/>
         </p:nvSpPr>
@@ -14577,7 +14669,7 @@
       </p:sp>
       <p:sp>
         <p:nvSpPr>
-          <p:cNvPr id="129" name="TextBox 128"/>
+          <p:cNvPr id="131" name="TextBox 130"/>
           <p:cNvSpPr txBox="1"/>
           <p:nvPr/>
         </p:nvSpPr>
@@ -14616,7 +14708,7 @@
       </p:sp>
       <p:sp>
         <p:nvSpPr>
-          <p:cNvPr id="130" name="TextBox 129"/>
+          <p:cNvPr id="132" name="TextBox 131"/>
           <p:cNvSpPr txBox="1"/>
           <p:nvPr/>
         </p:nvSpPr>
@@ -14655,7 +14747,7 @@
       </p:sp>
       <p:sp>
         <p:nvSpPr>
-          <p:cNvPr id="131" name="Rectangle 130"/>
+          <p:cNvPr id="133" name="Rectangle 132"/>
           <p:cNvSpPr/>
           <p:nvPr/>
         </p:nvSpPr>
@@ -14699,7 +14791,7 @@
       </p:sp>
       <p:sp>
         <p:nvSpPr>
-          <p:cNvPr id="132" name="TextBox 131"/>
+          <p:cNvPr id="134" name="TextBox 133"/>
           <p:cNvSpPr txBox="1"/>
           <p:nvPr/>
         </p:nvSpPr>
@@ -14738,7 +14830,7 @@
       </p:sp>
       <p:sp>
         <p:nvSpPr>
-          <p:cNvPr id="133" name="TextBox 132"/>
+          <p:cNvPr id="135" name="TextBox 134"/>
           <p:cNvSpPr txBox="1"/>
           <p:nvPr/>
         </p:nvSpPr>
@@ -14777,7 +14869,7 @@
       </p:sp>
       <p:sp>
         <p:nvSpPr>
-          <p:cNvPr id="134" name="TextBox 133"/>
+          <p:cNvPr id="136" name="TextBox 135"/>
           <p:cNvSpPr txBox="1"/>
           <p:nvPr/>
         </p:nvSpPr>
@@ -14816,7 +14908,7 @@
       </p:sp>
       <p:sp>
         <p:nvSpPr>
-          <p:cNvPr id="135" name="Rectangle 134"/>
+          <p:cNvPr id="137" name="Rectangle 136"/>
           <p:cNvSpPr/>
           <p:nvPr/>
         </p:nvSpPr>
@@ -14860,7 +14952,7 @@
       </p:sp>
       <p:sp>
         <p:nvSpPr>
-          <p:cNvPr id="136" name="TextBox 135"/>
+          <p:cNvPr id="138" name="TextBox 137"/>
           <p:cNvSpPr txBox="1"/>
           <p:nvPr/>
         </p:nvSpPr>
@@ -14892,14 +14984,14 @@
                 </a:solidFill>
                 <a:latin typeface="Inter"/>
               </a:rPr>
-              <a:t>Q3 board knowledge doc, sep 2026. Afwijkende waarden op enkele regels t.o.v. Close (zie B4, open-vragen.md). BPP en Concorde staan niet in Close, aanmaakdatum onbekend. Aanmaakdatum overige regels uit Close, 24-09-2026.</a:t>
+              <a:t>Q3 board knowledge doc, sep 2026. Afwijkende waarden op enkele regels t.o.v. Close (zie B4, open-vragen.md). BPP en Concorde staan niet in Close, Q3-aanmaak bevestigd door Jeroen. Aanmaakdatum overige regels uit Close, 24-09-2026.</a:t>
             </a:r>
           </a:p>
         </p:txBody>
       </p:sp>
       <p:pic>
         <p:nvPicPr>
-          <p:cNvPr id="137" name="Picture 136" descr="logo_navy.png"/>
+          <p:cNvPr id="139" name="Picture 138" descr="logo_navy.png"/>
           <p:cNvPicPr>
             <a:picLocks noChangeAspect="1"/>
           </p:cNvPicPr>
@@ -14923,7 +15015,7 @@
       </p:pic>
       <p:sp>
         <p:nvSpPr>
-          <p:cNvPr id="138" name="TextBox 137"/>
+          <p:cNvPr id="140" name="TextBox 139"/>
           <p:cNvSpPr txBox="1"/>
           <p:nvPr/>
         </p:nvSpPr>

--- a/GTM/board-meeting-q3-2026/deck/eduface-board-q3-2026-bewerkbaar.pptx
+++ b/GTM/board-meeting-q3-2026/deck/eduface-board-q3-2026-bewerkbaar.pptx
@@ -18332,7 +18332,7 @@
         <p:spPr>
           <a:xfrm>
             <a:off x="762000" y="2755900"/>
-            <a:ext cx="3556000" cy="266700"/>
+            <a:ext cx="3556000" cy="228600"/>
           </a:xfrm>
           <a:prstGeom prst="rect">
             <a:avLst/>
@@ -18357,7 +18357,7 @@
                 </a:solidFill>
                 <a:latin typeface="Inter"/>
               </a:rPr>
-              <a:t>Nederland</a:t>
+              <a:t>Nederland, hoger onderwijs</a:t>
             </a:r>
           </a:p>
         </p:txBody>
@@ -18371,7 +18371,7 @@
         <p:spPr>
           <a:xfrm>
             <a:off x="4445000" y="2755900"/>
-            <a:ext cx="4318000" cy="266700"/>
+            <a:ext cx="4318000" cy="228600"/>
           </a:xfrm>
           <a:prstGeom prst="rect">
             <a:avLst/>
@@ -18396,7 +18396,7 @@
                 </a:solidFill>
                 <a:latin typeface="Inter"/>
               </a:rPr>
-              <a:t>127.024 particuliere studenten</a:t>
+              <a:t>46.000-80.000</a:t>
             </a:r>
           </a:p>
         </p:txBody>
@@ -18410,7 +18410,7 @@
         <p:spPr>
           <a:xfrm>
             <a:off x="8890000" y="2755900"/>
-            <a:ext cx="2540000" cy="266700"/>
+            <a:ext cx="2540000" cy="228600"/>
           </a:xfrm>
           <a:prstGeom prst="rect">
             <a:avLst/>
@@ -18435,7 +18435,7 @@
                 </a:solidFill>
                 <a:latin typeface="Inter"/>
               </a:rPr>
-              <a:t>€1,0 mln</a:t>
+              <a:t>€1,7-2,9 mln</a:t>
             </a:r>
           </a:p>
         </p:txBody>
@@ -18448,8 +18448,8 @@
         </p:nvSpPr>
         <p:spPr>
           <a:xfrm>
-            <a:off x="762000" y="3060700"/>
-            <a:ext cx="3556000" cy="266700"/>
+            <a:off x="762000" y="3022600"/>
+            <a:ext cx="3556000" cy="228600"/>
           </a:xfrm>
           <a:prstGeom prst="rect">
             <a:avLst/>
@@ -18474,7 +18474,7 @@
                 </a:solidFill>
                 <a:latin typeface="Inter"/>
               </a:rPr>
-              <a:t>VK, hoger onderwijs</a:t>
+              <a:t>VK, hoger onderwijs (AP)</a:t>
             </a:r>
           </a:p>
         </p:txBody>
@@ -18487,8 +18487,8 @@
         </p:nvSpPr>
         <p:spPr>
           <a:xfrm>
-            <a:off x="4445000" y="3060700"/>
-            <a:ext cx="4318000" cy="266700"/>
+            <a:off x="4445000" y="3022600"/>
+            <a:ext cx="4318000" cy="228600"/>
           </a:xfrm>
           <a:prstGeom prst="rect">
             <a:avLst/>
@@ -18513,7 +18513,7 @@
                 </a:solidFill>
                 <a:latin typeface="Inter"/>
               </a:rPr>
-              <a:t>~275.000 studenten</a:t>
+              <a:t>≥71.050</a:t>
             </a:r>
           </a:p>
         </p:txBody>
@@ -18526,8 +18526,8 @@
         </p:nvSpPr>
         <p:spPr>
           <a:xfrm>
-            <a:off x="8890000" y="3060700"/>
-            <a:ext cx="2540000" cy="266700"/>
+            <a:off x="8890000" y="3022600"/>
+            <a:ext cx="2540000" cy="228600"/>
           </a:xfrm>
           <a:prstGeom prst="rect">
             <a:avLst/>
@@ -18552,7 +18552,7 @@
                 </a:solidFill>
                 <a:latin typeface="Inter"/>
               </a:rPr>
-              <a:t>€2,17 mln (2,2x NL)</a:t>
+              <a:t>≥£2,6 mln</a:t>
             </a:r>
           </a:p>
         </p:txBody>
@@ -18565,8 +18565,8 @@
         </p:nvSpPr>
         <p:spPr>
           <a:xfrm>
-            <a:off x="762000" y="3365500"/>
-            <a:ext cx="3556000" cy="266700"/>
+            <a:off x="762000" y="3289300"/>
+            <a:ext cx="3556000" cy="228600"/>
           </a:xfrm>
           <a:prstGeom prst="rect">
             <a:avLst/>
@@ -18591,7 +18591,7 @@
                 </a:solidFill>
                 <a:latin typeface="Inter"/>
               </a:rPr>
-              <a:t>VK, apprenticeships</a:t>
+              <a:t>VK, apprenticeships (ITP)</a:t>
             </a:r>
           </a:p>
         </p:txBody>
@@ -18604,8 +18604,8 @@
         </p:nvSpPr>
         <p:spPr>
           <a:xfrm>
-            <a:off x="4445000" y="3365500"/>
-            <a:ext cx="4318000" cy="266700"/>
+            <a:off x="4445000" y="3289300"/>
+            <a:ext cx="4318000" cy="228600"/>
           </a:xfrm>
           <a:prstGeom prst="rect">
             <a:avLst/>
@@ -18630,7 +18630,7 @@
                 </a:solidFill>
                 <a:latin typeface="Inter"/>
               </a:rPr>
-              <a:t>761.480 lerenden, 1.305 providers</a:t>
+              <a:t>~520.000</a:t>
             </a:r>
           </a:p>
         </p:txBody>
@@ -18643,8 +18643,8 @@
         </p:nvSpPr>
         <p:spPr>
           <a:xfrm>
-            <a:off x="8890000" y="3365500"/>
-            <a:ext cx="2540000" cy="266700"/>
+            <a:off x="8890000" y="3289300"/>
+            <a:ext cx="2540000" cy="228600"/>
           </a:xfrm>
           <a:prstGeom prst="rect">
             <a:avLst/>
@@ -18669,7 +18669,7 @@
                 </a:solidFill>
                 <a:latin typeface="Inter"/>
               </a:rPr>
-              <a:t>nog niet becijferd</a:t>
+              <a:t>~£18,7 mln</a:t>
             </a:r>
           </a:p>
         </p:txBody>
@@ -18682,8 +18682,8 @@
         </p:nvSpPr>
         <p:spPr>
           <a:xfrm>
-            <a:off x="762000" y="3670300"/>
-            <a:ext cx="3556000" cy="266700"/>
+            <a:off x="762000" y="3556000"/>
+            <a:ext cx="3556000" cy="228600"/>
           </a:xfrm>
           <a:prstGeom prst="rect">
             <a:avLst/>
@@ -18708,7 +18708,7 @@
                 </a:solidFill>
                 <a:latin typeface="Inter"/>
               </a:rPr>
-              <a:t>Europa, excl. Turkije</a:t>
+              <a:t>VK, franchise-laag</a:t>
             </a:r>
           </a:p>
         </p:txBody>
@@ -18721,8 +18721,8 @@
         </p:nvSpPr>
         <p:spPr>
           <a:xfrm>
-            <a:off x="4445000" y="3670300"/>
-            <a:ext cx="4318000" cy="266700"/>
+            <a:off x="4445000" y="3556000"/>
+            <a:ext cx="4318000" cy="228600"/>
           </a:xfrm>
           <a:prstGeom prst="rect">
             <a:avLst/>
@@ -18747,7 +18747,7 @@
                 </a:solidFill>
                 <a:latin typeface="Inter"/>
               </a:rPr>
-              <a:t>3,6 mln particuliere studenten</a:t>
+              <a:t>167.440</a:t>
             </a:r>
           </a:p>
         </p:txBody>
@@ -18760,8 +18760,8 @@
         </p:nvSpPr>
         <p:spPr>
           <a:xfrm>
-            <a:off x="8890000" y="3670300"/>
-            <a:ext cx="2540000" cy="266700"/>
+            <a:off x="8890000" y="3556000"/>
+            <a:ext cx="2540000" cy="228600"/>
           </a:xfrm>
           <a:prstGeom prst="rect">
             <a:avLst/>
@@ -18786,7 +18786,7 @@
                 </a:solidFill>
                 <a:latin typeface="Inter"/>
               </a:rPr>
-              <a:t>~€28 mln</a:t>
+              <a:t>~£6,0 mln</a:t>
             </a:r>
           </a:p>
         </p:txBody>
@@ -18799,7 +18799,241 @@
         </p:nvSpPr>
         <p:spPr>
           <a:xfrm>
-            <a:off x="762000" y="4013200"/>
+            <a:off x="762000" y="3822700"/>
+            <a:ext cx="3556000" cy="228600"/>
+          </a:xfrm>
+          <a:prstGeom prst="rect">
+            <a:avLst/>
+          </a:prstGeom>
+          <a:noFill/>
+        </p:spPr>
+        <p:txBody>
+          <a:bodyPr wrap="square" lIns="0" rIns="0" tIns="0" bIns="0">
+            <a:spAutoFit/>
+          </a:bodyPr>
+          <a:lstStyle/>
+          <a:p>
+            <a:pPr algn="l">
+              <a:lnSpc>
+                <a:spcPct val="115000"/>
+              </a:lnSpc>
+            </a:pPr>
+            <a:r>
+              <a:rPr sz="1250" b="0">
+                <a:solidFill>
+                  <a:srgbClr val="002333"/>
+                </a:solidFill>
+                <a:latin typeface="Inter"/>
+              </a:rPr>
+              <a:t>Verenigde Staten, particulier</a:t>
+            </a:r>
+          </a:p>
+        </p:txBody>
+      </p:sp>
+      <p:sp>
+        <p:nvSpPr>
+          <p:cNvPr id="25" name="TextBox 24"/>
+          <p:cNvSpPr txBox="1"/>
+          <p:nvPr/>
+        </p:nvSpPr>
+        <p:spPr>
+          <a:xfrm>
+            <a:off x="4445000" y="3822700"/>
+            <a:ext cx="4318000" cy="228600"/>
+          </a:xfrm>
+          <a:prstGeom prst="rect">
+            <a:avLst/>
+          </a:prstGeom>
+          <a:noFill/>
+        </p:spPr>
+        <p:txBody>
+          <a:bodyPr wrap="square" lIns="0" rIns="0" tIns="0" bIns="0">
+            <a:spAutoFit/>
+          </a:bodyPr>
+          <a:lstStyle/>
+          <a:p>
+            <a:pPr algn="l">
+              <a:lnSpc>
+                <a:spcPct val="115000"/>
+              </a:lnSpc>
+            </a:pPr>
+            <a:r>
+              <a:rPr sz="1250" b="0">
+                <a:solidFill>
+                  <a:srgbClr val="002333"/>
+                </a:solidFill>
+                <a:latin typeface="Inter"/>
+              </a:rPr>
+              <a:t>~4,2 mln</a:t>
+            </a:r>
+          </a:p>
+        </p:txBody>
+      </p:sp>
+      <p:sp>
+        <p:nvSpPr>
+          <p:cNvPr id="26" name="TextBox 25"/>
+          <p:cNvSpPr txBox="1"/>
+          <p:nvPr/>
+        </p:nvSpPr>
+        <p:spPr>
+          <a:xfrm>
+            <a:off x="8890000" y="3822700"/>
+            <a:ext cx="2540000" cy="228600"/>
+          </a:xfrm>
+          <a:prstGeom prst="rect">
+            <a:avLst/>
+          </a:prstGeom>
+          <a:noFill/>
+        </p:spPr>
+        <p:txBody>
+          <a:bodyPr wrap="square" lIns="0" rIns="0" tIns="0" bIns="0">
+            <a:spAutoFit/>
+          </a:bodyPr>
+          <a:lstStyle/>
+          <a:p>
+            <a:pPr algn="r">
+              <a:lnSpc>
+                <a:spcPct val="115000"/>
+              </a:lnSpc>
+            </a:pPr>
+            <a:r>
+              <a:rPr sz="1250" b="0">
+                <a:solidFill>
+                  <a:srgbClr val="002333"/>
+                </a:solidFill>
+                <a:latin typeface="Inter"/>
+              </a:rPr>
+              <a:t>~$150,8 mln</a:t>
+            </a:r>
+          </a:p>
+        </p:txBody>
+      </p:sp>
+      <p:sp>
+        <p:nvSpPr>
+          <p:cNvPr id="27" name="TextBox 26"/>
+          <p:cNvSpPr txBox="1"/>
+          <p:nvPr/>
+        </p:nvSpPr>
+        <p:spPr>
+          <a:xfrm>
+            <a:off x="762000" y="4089400"/>
+            <a:ext cx="3556000" cy="228600"/>
+          </a:xfrm>
+          <a:prstGeom prst="rect">
+            <a:avLst/>
+          </a:prstGeom>
+          <a:noFill/>
+        </p:spPr>
+        <p:txBody>
+          <a:bodyPr wrap="square" lIns="0" rIns="0" tIns="0" bIns="0">
+            <a:spAutoFit/>
+          </a:bodyPr>
+          <a:lstStyle/>
+          <a:p>
+            <a:pPr algn="l">
+              <a:lnSpc>
+                <a:spcPct val="115000"/>
+              </a:lnSpc>
+            </a:pPr>
+            <a:r>
+              <a:rPr sz="1250" b="0">
+                <a:solidFill>
+                  <a:srgbClr val="002333"/>
+                </a:solidFill>
+                <a:latin typeface="Inter"/>
+              </a:rPr>
+              <a:t>Europa, overig (niet herzien)</a:t>
+            </a:r>
+          </a:p>
+        </p:txBody>
+      </p:sp>
+      <p:sp>
+        <p:nvSpPr>
+          <p:cNvPr id="28" name="TextBox 27"/>
+          <p:cNvSpPr txBox="1"/>
+          <p:nvPr/>
+        </p:nvSpPr>
+        <p:spPr>
+          <a:xfrm>
+            <a:off x="4445000" y="4089400"/>
+            <a:ext cx="4318000" cy="228600"/>
+          </a:xfrm>
+          <a:prstGeom prst="rect">
+            <a:avLst/>
+          </a:prstGeom>
+          <a:noFill/>
+        </p:spPr>
+        <p:txBody>
+          <a:bodyPr wrap="square" lIns="0" rIns="0" tIns="0" bIns="0">
+            <a:spAutoFit/>
+          </a:bodyPr>
+          <a:lstStyle/>
+          <a:p>
+            <a:pPr algn="l">
+              <a:lnSpc>
+                <a:spcPct val="115000"/>
+              </a:lnSpc>
+            </a:pPr>
+            <a:r>
+              <a:rPr sz="1250" b="0">
+                <a:solidFill>
+                  <a:srgbClr val="002333"/>
+                </a:solidFill>
+                <a:latin typeface="Inter"/>
+              </a:rPr>
+              <a:t>3,6 mln</a:t>
+            </a:r>
+          </a:p>
+        </p:txBody>
+      </p:sp>
+      <p:sp>
+        <p:nvSpPr>
+          <p:cNvPr id="29" name="TextBox 28"/>
+          <p:cNvSpPr txBox="1"/>
+          <p:nvPr/>
+        </p:nvSpPr>
+        <p:spPr>
+          <a:xfrm>
+            <a:off x="8890000" y="4089400"/>
+            <a:ext cx="2540000" cy="228600"/>
+          </a:xfrm>
+          <a:prstGeom prst="rect">
+            <a:avLst/>
+          </a:prstGeom>
+          <a:noFill/>
+        </p:spPr>
+        <p:txBody>
+          <a:bodyPr wrap="square" lIns="0" rIns="0" tIns="0" bIns="0">
+            <a:spAutoFit/>
+          </a:bodyPr>
+          <a:lstStyle/>
+          <a:p>
+            <a:pPr algn="r">
+              <a:lnSpc>
+                <a:spcPct val="115000"/>
+              </a:lnSpc>
+            </a:pPr>
+            <a:r>
+              <a:rPr sz="1250" b="0">
+                <a:solidFill>
+                  <a:srgbClr val="002333"/>
+                </a:solidFill>
+                <a:latin typeface="Inter"/>
+              </a:rPr>
+              <a:t>~€129,6 mln</a:t>
+            </a:r>
+          </a:p>
+        </p:txBody>
+      </p:sp>
+      <p:sp>
+        <p:nvSpPr>
+          <p:cNvPr id="30" name="TextBox 29"/>
+          <p:cNvSpPr txBox="1"/>
+          <p:nvPr/>
+        </p:nvSpPr>
+        <p:spPr>
+          <a:xfrm>
+            <a:off x="762000" y="4394200"/>
             <a:ext cx="10668000" cy="381000"/>
           </a:xfrm>
           <a:prstGeom prst="rect">
@@ -18815,7 +19049,7 @@
           <a:p>
             <a:pPr algn="l">
               <a:lnSpc>
-                <a:spcPct val="115000"/>
+                <a:spcPct val="130000"/>
               </a:lnSpc>
             </a:pPr>
             <a:r>
@@ -18825,14 +19059,14 @@
                 </a:solidFill>
                 <a:latin typeface="Inter"/>
               </a:rPr>
-              <a:t>Interne eerste inschatting o.b.v. Eurostat 2023, niet extern gevalideerd.</a:t>
-            </a:r>
-          </a:p>
-        </p:txBody>
-      </p:sp>
-      <p:sp>
-        <p:nvSpPr>
-          <p:cNvPr id="25" name="Rectangle 24"/>
+              <a:t>Hoger door het juiste prijsmodel (36/jaar, niet 7,88), niet door een grotere markt: NL en VK hoger onderwijs kwamen bij hercontrole juist lager uit. 0 particuliere deals gewonnen tot nu toe (Tio, ICM, CMS Vocational alle Lost); dit is TAM, geen omzet.</a:t>
+            </a:r>
+          </a:p>
+        </p:txBody>
+      </p:sp>
+      <p:sp>
+        <p:nvSpPr>
+          <p:cNvPr id="31" name="Rectangle 30"/>
           <p:cNvSpPr/>
           <p:nvPr/>
         </p:nvSpPr>
@@ -18876,7 +19110,7 @@
       </p:sp>
       <p:sp>
         <p:nvSpPr>
-          <p:cNvPr id="26" name="TextBox 25"/>
+          <p:cNvPr id="32" name="TextBox 31"/>
           <p:cNvSpPr txBox="1"/>
           <p:nvPr/>
         </p:nvSpPr>
@@ -18908,14 +19142,14 @@
                 </a:solidFill>
                 <a:latin typeface="Inter"/>
               </a:rPr>
-              <a:t>Q3 board knowledge doc + marktomvang-particulier-onderwijs.md, sep 2026.</a:t>
+              <a:t>Marktomvang herzien 24-09-2026: DUO/NRTO, HESA, NCES, eigen pijplijn. HESA/NCES/Eurostat/DUO waren geblokkeerd in de sessie, cijfers zijn kruislings gezocht, niet uit brontabellen.</a:t>
             </a:r>
           </a:p>
         </p:txBody>
       </p:sp>
       <p:pic>
         <p:nvPicPr>
-          <p:cNvPr id="27" name="Picture 26" descr="logo_navy.png"/>
+          <p:cNvPr id="33" name="Picture 32" descr="logo_navy.png"/>
           <p:cNvPicPr>
             <a:picLocks noChangeAspect="1"/>
           </p:cNvPicPr>
@@ -18939,7 +19173,7 @@
       </p:pic>
       <p:sp>
         <p:nvSpPr>
-          <p:cNvPr id="28" name="TextBox 27"/>
+          <p:cNvPr id="34" name="TextBox 33"/>
           <p:cNvSpPr txBox="1"/>
           <p:nvPr/>
         </p:nvSpPr>

--- a/GTM/board-meeting-q3-2026/deck/eduface-board-q3-2026-bewerkbaar.pptx
+++ b/GTM/board-meeting-q3-2026/deck/eduface-board-q3-2026-bewerkbaar.pptx
@@ -18396,7 +18396,7 @@
                 </a:solidFill>
                 <a:latin typeface="Inter"/>
               </a:rPr>
-              <a:t>46.000-80.000</a:t>
+              <a:t>127.024</a:t>
             </a:r>
           </a:p>
         </p:txBody>
@@ -18435,7 +18435,7 @@
                 </a:solidFill>
                 <a:latin typeface="Inter"/>
               </a:rPr>
-              <a:t>€1,7-2,9 mln</a:t>
+              <a:t>€4,6 mln</a:t>
             </a:r>
           </a:p>
         </p:txBody>
@@ -18474,7 +18474,7 @@
                 </a:solidFill>
                 <a:latin typeface="Inter"/>
               </a:rPr>
-              <a:t>VK, hoger onderwijs (AP)</a:t>
+              <a:t>VK, hoger onderwijs (particulier)</a:t>
             </a:r>
           </a:p>
         </p:txBody>
@@ -18513,7 +18513,7 @@
                 </a:solidFill>
                 <a:latin typeface="Inter"/>
               </a:rPr>
-              <a:t>≥71.050</a:t>
+              <a:t>250.000-300.000</a:t>
             </a:r>
           </a:p>
         </p:txBody>
@@ -18552,7 +18552,7 @@
                 </a:solidFill>
                 <a:latin typeface="Inter"/>
               </a:rPr>
-              <a:t>≥£2,6 mln</a:t>
+              <a:t>£9,0-10,8 mln</a:t>
             </a:r>
           </a:p>
         </p:txBody>
@@ -19059,7 +19059,7 @@
                 </a:solidFill>
                 <a:latin typeface="Inter"/>
               </a:rPr>
-              <a:t>Hoger door het juiste prijsmodel (36/jaar, niet 7,88), niet door een grotere markt: NL en VK hoger onderwijs kwamen bij hercontrole juist lager uit. 0 particuliere deals gewonnen tot nu toe (Tio, ICM, CMS Vocational alle Lost); dit is TAM, geen omzet.</a:t>
+              <a:t>Officiele registraties (DUO, HESA) tellen alleen wie zich laat erkennen/designeren en missen grote merken (BPP+ULaw+Arden al 90.000+ VK): NL/VK gebruiken daarom de bredere schatting. 0 particuliere deals gewonnen tot nu toe (Tio, ICM, CMS Vocational alle Lost); dit is TAM, geen omzet.</a:t>
             </a:r>
           </a:p>
         </p:txBody>
@@ -19142,7 +19142,7 @@
                 </a:solidFill>
                 <a:latin typeface="Inter"/>
               </a:rPr>
-              <a:t>Marktomvang herzien 24-09-2026: DUO/NRTO, HESA, NCES, eigen pijplijn. HESA/NCES/Eurostat/DUO waren geblokkeerd in de sessie, cijfers zijn kruislings gezocht, niet uit brontabellen.</a:t>
+              <a:t>Marktomvang tweemaal herzien op 24-09-2026: officiele DUO/HESA-registraties bleken de markt te ondertellen t.o.v. bekende merken (BPP, ULaw, Arden, GBS, NCOI). HESA/NCES/Eurostat grotendeels geblokkeerd in de sessie.</a:t>
             </a:r>
           </a:p>
         </p:txBody>

--- a/GTM/board-meeting-q3-2026/deck/eduface-board-q3-2026-bewerkbaar.pptx
+++ b/GTM/board-meeting-q3-2026/deck/eduface-board-q3-2026-bewerkbaar.pptx
@@ -18171,26 +18171,26 @@
         <p:spPr>
           <a:xfrm>
             <a:off x="762000" y="2476500"/>
-            <a:ext cx="3556000" cy="190500"/>
-          </a:xfrm>
-          <a:prstGeom prst="rect">
-            <a:avLst/>
-          </a:prstGeom>
-          <a:noFill/>
-        </p:spPr>
-        <p:txBody>
-          <a:bodyPr wrap="square" lIns="0" rIns="0" tIns="0" bIns="0">
-            <a:spAutoFit/>
-          </a:bodyPr>
-          <a:lstStyle/>
-          <a:p>
-            <a:pPr algn="l">
-              <a:lnSpc>
-                <a:spcPct val="115000"/>
-              </a:lnSpc>
-            </a:pPr>
-            <a:r>
-              <a:rPr sz="950" b="1">
+            <a:ext cx="2032000" cy="190500"/>
+          </a:xfrm>
+          <a:prstGeom prst="rect">
+            <a:avLst/>
+          </a:prstGeom>
+          <a:noFill/>
+        </p:spPr>
+        <p:txBody>
+          <a:bodyPr wrap="square" lIns="0" rIns="0" tIns="0" bIns="0">
+            <a:spAutoFit/>
+          </a:bodyPr>
+          <a:lstStyle/>
+          <a:p>
+            <a:pPr algn="l">
+              <a:lnSpc>
+                <a:spcPct val="115000"/>
+              </a:lnSpc>
+            </a:pPr>
+            <a:r>
+              <a:rPr sz="1000" b="1">
                 <a:solidFill>
                   <a:srgbClr val="5B7480"/>
                 </a:solidFill>
@@ -18209,32 +18209,71 @@
         </p:nvSpPr>
         <p:spPr>
           <a:xfrm>
-            <a:off x="4445000" y="2476500"/>
-            <a:ext cx="4318000" cy="190500"/>
-          </a:xfrm>
-          <a:prstGeom prst="rect">
-            <a:avLst/>
-          </a:prstGeom>
-          <a:noFill/>
-        </p:spPr>
-        <p:txBody>
-          <a:bodyPr wrap="square" lIns="0" rIns="0" tIns="0" bIns="0">
-            <a:spAutoFit/>
-          </a:bodyPr>
-          <a:lstStyle/>
-          <a:p>
-            <a:pPr algn="l">
-              <a:lnSpc>
-                <a:spcPct val="115000"/>
-              </a:lnSpc>
-            </a:pPr>
-            <a:r>
-              <a:rPr sz="950" b="1">
+            <a:off x="2921000" y="2476500"/>
+            <a:ext cx="4826000" cy="190500"/>
+          </a:xfrm>
+          <a:prstGeom prst="rect">
+            <a:avLst/>
+          </a:prstGeom>
+          <a:noFill/>
+        </p:spPr>
+        <p:txBody>
+          <a:bodyPr wrap="square" lIns="0" rIns="0" tIns="0" bIns="0">
+            <a:spAutoFit/>
+          </a:bodyPr>
+          <a:lstStyle/>
+          <a:p>
+            <a:pPr algn="l">
+              <a:lnSpc>
+                <a:spcPct val="115000"/>
+              </a:lnSpc>
+            </a:pPr>
+            <a:r>
+              <a:rPr sz="1000" b="1">
                 <a:solidFill>
                   <a:srgbClr val="5B7480"/>
                 </a:solidFill>
                 <a:latin typeface="Inter"/>
               </a:rPr>
+              <a:t>Wat hoort hierbij</a:t>
+            </a:r>
+          </a:p>
+        </p:txBody>
+      </p:sp>
+      <p:sp>
+        <p:nvSpPr>
+          <p:cNvPr id="10" name="TextBox 9"/>
+          <p:cNvSpPr txBox="1"/>
+          <p:nvPr/>
+        </p:nvSpPr>
+        <p:spPr>
+          <a:xfrm>
+            <a:off x="8001000" y="2476500"/>
+            <a:ext cx="1460500" cy="190500"/>
+          </a:xfrm>
+          <a:prstGeom prst="rect">
+            <a:avLst/>
+          </a:prstGeom>
+          <a:noFill/>
+        </p:spPr>
+        <p:txBody>
+          <a:bodyPr wrap="square" lIns="0" rIns="0" tIns="0" bIns="0">
+            <a:spAutoFit/>
+          </a:bodyPr>
+          <a:lstStyle/>
+          <a:p>
+            <a:pPr algn="r">
+              <a:lnSpc>
+                <a:spcPct val="115000"/>
+              </a:lnSpc>
+            </a:pPr>
+            <a:r>
+              <a:rPr sz="1000" b="1">
+                <a:solidFill>
+                  <a:srgbClr val="5B7480"/>
+                </a:solidFill>
+                <a:latin typeface="Inter"/>
+              </a:rPr>
               <a:t>Omvang</a:t>
             </a:r>
           </a:p>
@@ -18242,14 +18281,14 @@
       </p:sp>
       <p:sp>
         <p:nvSpPr>
-          <p:cNvPr id="10" name="TextBox 9"/>
-          <p:cNvSpPr txBox="1"/>
-          <p:nvPr/>
-        </p:nvSpPr>
-        <p:spPr>
-          <a:xfrm>
-            <a:off x="8890000" y="2476500"/>
-            <a:ext cx="2540000" cy="190500"/>
+          <p:cNvPr id="11" name="TextBox 10"/>
+          <p:cNvSpPr txBox="1"/>
+          <p:nvPr/>
+        </p:nvSpPr>
+        <p:spPr>
+          <a:xfrm>
+            <a:off x="9652000" y="2476500"/>
+            <a:ext cx="1778000" cy="190500"/>
           </a:xfrm>
           <a:prstGeom prst="rect">
             <a:avLst/>
@@ -18268,7 +18307,7 @@
               </a:lnSpc>
             </a:pPr>
             <a:r>
-              <a:rPr sz="950" b="1">
+              <a:rPr sz="1000" b="1">
                 <a:solidFill>
                   <a:srgbClr val="5B7480"/>
                 </a:solidFill>
@@ -18281,7 +18320,7 @@
       </p:sp>
       <p:sp>
         <p:nvSpPr>
-          <p:cNvPr id="11" name="Rectangle 10"/>
+          <p:cNvPr id="12" name="Rectangle 11"/>
           <p:cNvSpPr/>
           <p:nvPr/>
         </p:nvSpPr>
@@ -18325,77 +18364,116 @@
       </p:sp>
       <p:sp>
         <p:nvSpPr>
-          <p:cNvPr id="12" name="TextBox 11"/>
+          <p:cNvPr id="13" name="TextBox 12"/>
           <p:cNvSpPr txBox="1"/>
           <p:nvPr/>
         </p:nvSpPr>
         <p:spPr>
           <a:xfrm>
             <a:off x="762000" y="2755900"/>
-            <a:ext cx="3556000" cy="228600"/>
-          </a:xfrm>
-          <a:prstGeom prst="rect">
-            <a:avLst/>
-          </a:prstGeom>
-          <a:noFill/>
-        </p:spPr>
-        <p:txBody>
-          <a:bodyPr wrap="square" lIns="0" rIns="0" tIns="0" bIns="0">
-            <a:spAutoFit/>
-          </a:bodyPr>
-          <a:lstStyle/>
-          <a:p>
-            <a:pPr algn="l">
-              <a:lnSpc>
-                <a:spcPct val="115000"/>
-              </a:lnSpc>
-            </a:pPr>
-            <a:r>
-              <a:rPr sz="1250" b="0">
+            <a:ext cx="2032000" cy="279400"/>
+          </a:xfrm>
+          <a:prstGeom prst="rect">
+            <a:avLst/>
+          </a:prstGeom>
+          <a:noFill/>
+        </p:spPr>
+        <p:txBody>
+          <a:bodyPr wrap="square" lIns="0" rIns="0" tIns="0" bIns="0">
+            <a:spAutoFit/>
+          </a:bodyPr>
+          <a:lstStyle/>
+          <a:p>
+            <a:pPr algn="l">
+              <a:lnSpc>
+                <a:spcPct val="115000"/>
+              </a:lnSpc>
+            </a:pPr>
+            <a:r>
+              <a:rPr sz="1100" b="0">
                 <a:solidFill>
                   <a:srgbClr val="002333"/>
                 </a:solidFill>
                 <a:latin typeface="Inter"/>
               </a:rPr>
-              <a:t>Nederland, hoger onderwijs</a:t>
-            </a:r>
-          </a:p>
-        </p:txBody>
-      </p:sp>
-      <p:sp>
-        <p:nvSpPr>
-          <p:cNvPr id="13" name="TextBox 12"/>
-          <p:cNvSpPr txBox="1"/>
-          <p:nvPr/>
-        </p:nvSpPr>
-        <p:spPr>
-          <a:xfrm>
-            <a:off x="4445000" y="2755900"/>
-            <a:ext cx="4318000" cy="228600"/>
-          </a:xfrm>
-          <a:prstGeom prst="rect">
-            <a:avLst/>
-          </a:prstGeom>
-          <a:noFill/>
-        </p:spPr>
-        <p:txBody>
-          <a:bodyPr wrap="square" lIns="0" rIns="0" tIns="0" bIns="0">
-            <a:spAutoFit/>
-          </a:bodyPr>
-          <a:lstStyle/>
-          <a:p>
-            <a:pPr algn="l">
-              <a:lnSpc>
-                <a:spcPct val="115000"/>
-              </a:lnSpc>
-            </a:pPr>
-            <a:r>
-              <a:rPr sz="1250" b="0">
+              <a:t>Nederland</a:t>
+            </a:r>
+          </a:p>
+        </p:txBody>
+      </p:sp>
+      <p:sp>
+        <p:nvSpPr>
+          <p:cNvPr id="14" name="TextBox 13"/>
+          <p:cNvSpPr txBox="1"/>
+          <p:nvPr/>
+        </p:nvSpPr>
+        <p:spPr>
+          <a:xfrm>
+            <a:off x="2921000" y="2755900"/>
+            <a:ext cx="4826000" cy="279400"/>
+          </a:xfrm>
+          <a:prstGeom prst="rect">
+            <a:avLst/>
+          </a:prstGeom>
+          <a:noFill/>
+        </p:spPr>
+        <p:txBody>
+          <a:bodyPr wrap="square" lIns="0" rIns="0" tIns="0" bIns="0">
+            <a:spAutoFit/>
+          </a:bodyPr>
+          <a:lstStyle/>
+          <a:p>
+            <a:pPr algn="l">
+              <a:lnSpc>
+                <a:spcPct val="115000"/>
+              </a:lnSpc>
+            </a:pPr>
+            <a:r>
+              <a:rPr sz="1100" b="0">
                 <a:solidFill>
                   <a:srgbClr val="002333"/>
                 </a:solidFill>
                 <a:latin typeface="Inter"/>
               </a:rPr>
+              <a:t>Particuliere hogescholen (NCOI, LOI, Nyenrode e.a.)</a:t>
+            </a:r>
+          </a:p>
+        </p:txBody>
+      </p:sp>
+      <p:sp>
+        <p:nvSpPr>
+          <p:cNvPr id="15" name="TextBox 14"/>
+          <p:cNvSpPr txBox="1"/>
+          <p:nvPr/>
+        </p:nvSpPr>
+        <p:spPr>
+          <a:xfrm>
+            <a:off x="8001000" y="2755900"/>
+            <a:ext cx="1460500" cy="279400"/>
+          </a:xfrm>
+          <a:prstGeom prst="rect">
+            <a:avLst/>
+          </a:prstGeom>
+          <a:noFill/>
+        </p:spPr>
+        <p:txBody>
+          <a:bodyPr wrap="square" lIns="0" rIns="0" tIns="0" bIns="0">
+            <a:spAutoFit/>
+          </a:bodyPr>
+          <a:lstStyle/>
+          <a:p>
+            <a:pPr algn="r">
+              <a:lnSpc>
+                <a:spcPct val="115000"/>
+              </a:lnSpc>
+            </a:pPr>
+            <a:r>
+              <a:rPr sz="1100" b="0">
+                <a:solidFill>
+                  <a:srgbClr val="002333"/>
+                </a:solidFill>
+                <a:latin typeface="Inter"/>
+              </a:rPr>
               <a:t>127.024</a:t>
             </a:r>
           </a:p>
@@ -18403,14 +18481,14 @@
       </p:sp>
       <p:sp>
         <p:nvSpPr>
-          <p:cNvPr id="14" name="TextBox 13"/>
-          <p:cNvSpPr txBox="1"/>
-          <p:nvPr/>
-        </p:nvSpPr>
-        <p:spPr>
-          <a:xfrm>
-            <a:off x="8890000" y="2755900"/>
-            <a:ext cx="2540000" cy="228600"/>
+          <p:cNvPr id="16" name="TextBox 15"/>
+          <p:cNvSpPr txBox="1"/>
+          <p:nvPr/>
+        </p:nvSpPr>
+        <p:spPr>
+          <a:xfrm>
+            <a:off x="9652000" y="2755900"/>
+            <a:ext cx="1778000" cy="279400"/>
           </a:xfrm>
           <a:prstGeom prst="rect">
             <a:avLst/>
@@ -18429,7 +18507,7 @@
               </a:lnSpc>
             </a:pPr>
             <a:r>
-              <a:rPr sz="1250" b="0">
+              <a:rPr sz="1100" b="0">
                 <a:solidFill>
                   <a:srgbClr val="002333"/>
                 </a:solidFill>
@@ -18442,77 +18520,116 @@
       </p:sp>
       <p:sp>
         <p:nvSpPr>
-          <p:cNvPr id="15" name="TextBox 14"/>
-          <p:cNvSpPr txBox="1"/>
-          <p:nvPr/>
-        </p:nvSpPr>
-        <p:spPr>
-          <a:xfrm>
-            <a:off x="762000" y="3022600"/>
-            <a:ext cx="3556000" cy="228600"/>
-          </a:xfrm>
-          <a:prstGeom prst="rect">
-            <a:avLst/>
-          </a:prstGeom>
-          <a:noFill/>
-        </p:spPr>
-        <p:txBody>
-          <a:bodyPr wrap="square" lIns="0" rIns="0" tIns="0" bIns="0">
-            <a:spAutoFit/>
-          </a:bodyPr>
-          <a:lstStyle/>
-          <a:p>
-            <a:pPr algn="l">
-              <a:lnSpc>
-                <a:spcPct val="115000"/>
-              </a:lnSpc>
-            </a:pPr>
-            <a:r>
-              <a:rPr sz="1250" b="0">
+          <p:cNvPr id="17" name="TextBox 16"/>
+          <p:cNvSpPr txBox="1"/>
+          <p:nvPr/>
+        </p:nvSpPr>
+        <p:spPr>
+          <a:xfrm>
+            <a:off x="762000" y="3073400"/>
+            <a:ext cx="2032000" cy="279400"/>
+          </a:xfrm>
+          <a:prstGeom prst="rect">
+            <a:avLst/>
+          </a:prstGeom>
+          <a:noFill/>
+        </p:spPr>
+        <p:txBody>
+          <a:bodyPr wrap="square" lIns="0" rIns="0" tIns="0" bIns="0">
+            <a:spAutoFit/>
+          </a:bodyPr>
+          <a:lstStyle/>
+          <a:p>
+            <a:pPr algn="l">
+              <a:lnSpc>
+                <a:spcPct val="115000"/>
+              </a:lnSpc>
+            </a:pPr>
+            <a:r>
+              <a:rPr sz="1100" b="0">
                 <a:solidFill>
                   <a:srgbClr val="002333"/>
                 </a:solidFill>
                 <a:latin typeface="Inter"/>
               </a:rPr>
-              <a:t>VK, hoger onderwijs (particulier)</a:t>
-            </a:r>
-          </a:p>
-        </p:txBody>
-      </p:sp>
-      <p:sp>
-        <p:nvSpPr>
-          <p:cNvPr id="16" name="TextBox 15"/>
-          <p:cNvSpPr txBox="1"/>
-          <p:nvPr/>
-        </p:nvSpPr>
-        <p:spPr>
-          <a:xfrm>
-            <a:off x="4445000" y="3022600"/>
-            <a:ext cx="4318000" cy="228600"/>
-          </a:xfrm>
-          <a:prstGeom prst="rect">
-            <a:avLst/>
-          </a:prstGeom>
-          <a:noFill/>
-        </p:spPr>
-        <p:txBody>
-          <a:bodyPr wrap="square" lIns="0" rIns="0" tIns="0" bIns="0">
-            <a:spAutoFit/>
-          </a:bodyPr>
-          <a:lstStyle/>
-          <a:p>
-            <a:pPr algn="l">
-              <a:lnSpc>
-                <a:spcPct val="115000"/>
-              </a:lnSpc>
-            </a:pPr>
-            <a:r>
-              <a:rPr sz="1250" b="0">
+              <a:t>VK, hoger onderwijs</a:t>
+            </a:r>
+          </a:p>
+        </p:txBody>
+      </p:sp>
+      <p:sp>
+        <p:nvSpPr>
+          <p:cNvPr id="18" name="TextBox 17"/>
+          <p:cNvSpPr txBox="1"/>
+          <p:nvPr/>
+        </p:nvSpPr>
+        <p:spPr>
+          <a:xfrm>
+            <a:off x="2921000" y="3073400"/>
+            <a:ext cx="4826000" cy="279400"/>
+          </a:xfrm>
+          <a:prstGeom prst="rect">
+            <a:avLst/>
+          </a:prstGeom>
+          <a:noFill/>
+        </p:spPr>
+        <p:txBody>
+          <a:bodyPr wrap="square" lIns="0" rIns="0" tIns="0" bIns="0">
+            <a:spAutoFit/>
+          </a:bodyPr>
+          <a:lstStyle/>
+          <a:p>
+            <a:pPr algn="l">
+              <a:lnSpc>
+                <a:spcPct val="115000"/>
+              </a:lnSpc>
+            </a:pPr>
+            <a:r>
+              <a:rPr sz="1100" b="0">
                 <a:solidFill>
                   <a:srgbClr val="002333"/>
                 </a:solidFill>
                 <a:latin typeface="Inter"/>
               </a:rPr>
+              <a:t>Particuliere universiteiten (BPP, ULaw, Arden e.a.)</a:t>
+            </a:r>
+          </a:p>
+        </p:txBody>
+      </p:sp>
+      <p:sp>
+        <p:nvSpPr>
+          <p:cNvPr id="19" name="TextBox 18"/>
+          <p:cNvSpPr txBox="1"/>
+          <p:nvPr/>
+        </p:nvSpPr>
+        <p:spPr>
+          <a:xfrm>
+            <a:off x="8001000" y="3073400"/>
+            <a:ext cx="1460500" cy="279400"/>
+          </a:xfrm>
+          <a:prstGeom prst="rect">
+            <a:avLst/>
+          </a:prstGeom>
+          <a:noFill/>
+        </p:spPr>
+        <p:txBody>
+          <a:bodyPr wrap="square" lIns="0" rIns="0" tIns="0" bIns="0">
+            <a:spAutoFit/>
+          </a:bodyPr>
+          <a:lstStyle/>
+          <a:p>
+            <a:pPr algn="r">
+              <a:lnSpc>
+                <a:spcPct val="115000"/>
+              </a:lnSpc>
+            </a:pPr>
+            <a:r>
+              <a:rPr sz="1100" b="0">
+                <a:solidFill>
+                  <a:srgbClr val="002333"/>
+                </a:solidFill>
+                <a:latin typeface="Inter"/>
+              </a:rPr>
               <a:t>250.000-300.000</a:t>
             </a:r>
           </a:p>
@@ -18520,14 +18637,14 @@
       </p:sp>
       <p:sp>
         <p:nvSpPr>
-          <p:cNvPr id="17" name="TextBox 16"/>
-          <p:cNvSpPr txBox="1"/>
-          <p:nvPr/>
-        </p:nvSpPr>
-        <p:spPr>
-          <a:xfrm>
-            <a:off x="8890000" y="3022600"/>
-            <a:ext cx="2540000" cy="228600"/>
+          <p:cNvPr id="20" name="TextBox 19"/>
+          <p:cNvSpPr txBox="1"/>
+          <p:nvPr/>
+        </p:nvSpPr>
+        <p:spPr>
+          <a:xfrm>
+            <a:off x="9652000" y="3073400"/>
+            <a:ext cx="1778000" cy="279400"/>
           </a:xfrm>
           <a:prstGeom prst="rect">
             <a:avLst/>
@@ -18546,7 +18663,7 @@
               </a:lnSpc>
             </a:pPr>
             <a:r>
-              <a:rPr sz="1250" b="0">
+              <a:rPr sz="1100" b="0">
                 <a:solidFill>
                   <a:srgbClr val="002333"/>
                 </a:solidFill>
@@ -18559,77 +18676,116 @@
       </p:sp>
       <p:sp>
         <p:nvSpPr>
-          <p:cNvPr id="18" name="TextBox 17"/>
-          <p:cNvSpPr txBox="1"/>
-          <p:nvPr/>
-        </p:nvSpPr>
-        <p:spPr>
-          <a:xfrm>
-            <a:off x="762000" y="3289300"/>
-            <a:ext cx="3556000" cy="228600"/>
-          </a:xfrm>
-          <a:prstGeom prst="rect">
-            <a:avLst/>
-          </a:prstGeom>
-          <a:noFill/>
-        </p:spPr>
-        <p:txBody>
-          <a:bodyPr wrap="square" lIns="0" rIns="0" tIns="0" bIns="0">
-            <a:spAutoFit/>
-          </a:bodyPr>
-          <a:lstStyle/>
-          <a:p>
-            <a:pPr algn="l">
-              <a:lnSpc>
-                <a:spcPct val="115000"/>
-              </a:lnSpc>
-            </a:pPr>
-            <a:r>
-              <a:rPr sz="1250" b="0">
+          <p:cNvPr id="21" name="TextBox 20"/>
+          <p:cNvSpPr txBox="1"/>
+          <p:nvPr/>
+        </p:nvSpPr>
+        <p:spPr>
+          <a:xfrm>
+            <a:off x="762000" y="3390900"/>
+            <a:ext cx="2032000" cy="279400"/>
+          </a:xfrm>
+          <a:prstGeom prst="rect">
+            <a:avLst/>
+          </a:prstGeom>
+          <a:noFill/>
+        </p:spPr>
+        <p:txBody>
+          <a:bodyPr wrap="square" lIns="0" rIns="0" tIns="0" bIns="0">
+            <a:spAutoFit/>
+          </a:bodyPr>
+          <a:lstStyle/>
+          <a:p>
+            <a:pPr algn="l">
+              <a:lnSpc>
+                <a:spcPct val="115000"/>
+              </a:lnSpc>
+            </a:pPr>
+            <a:r>
+              <a:rPr sz="1100" b="0">
                 <a:solidFill>
                   <a:srgbClr val="002333"/>
                 </a:solidFill>
                 <a:latin typeface="Inter"/>
               </a:rPr>
-              <a:t>VK, apprenticeships (ITP)</a:t>
-            </a:r>
-          </a:p>
-        </p:txBody>
-      </p:sp>
-      <p:sp>
-        <p:nvSpPr>
-          <p:cNvPr id="19" name="TextBox 18"/>
-          <p:cNvSpPr txBox="1"/>
-          <p:nvPr/>
-        </p:nvSpPr>
-        <p:spPr>
-          <a:xfrm>
-            <a:off x="4445000" y="3289300"/>
-            <a:ext cx="4318000" cy="228600"/>
-          </a:xfrm>
-          <a:prstGeom prst="rect">
-            <a:avLst/>
-          </a:prstGeom>
-          <a:noFill/>
-        </p:spPr>
-        <p:txBody>
-          <a:bodyPr wrap="square" lIns="0" rIns="0" tIns="0" bIns="0">
-            <a:spAutoFit/>
-          </a:bodyPr>
-          <a:lstStyle/>
-          <a:p>
-            <a:pPr algn="l">
-              <a:lnSpc>
-                <a:spcPct val="115000"/>
-              </a:lnSpc>
-            </a:pPr>
-            <a:r>
-              <a:rPr sz="1250" b="0">
+              <a:t>VK, apprenticeships</a:t>
+            </a:r>
+          </a:p>
+        </p:txBody>
+      </p:sp>
+      <p:sp>
+        <p:nvSpPr>
+          <p:cNvPr id="22" name="TextBox 21"/>
+          <p:cNvSpPr txBox="1"/>
+          <p:nvPr/>
+        </p:nvSpPr>
+        <p:spPr>
+          <a:xfrm>
+            <a:off x="2921000" y="3390900"/>
+            <a:ext cx="4826000" cy="279400"/>
+          </a:xfrm>
+          <a:prstGeom prst="rect">
+            <a:avLst/>
+          </a:prstGeom>
+          <a:noFill/>
+        </p:spPr>
+        <p:txBody>
+          <a:bodyPr wrap="square" lIns="0" rIns="0" tIns="0" bIns="0">
+            <a:spAutoFit/>
+          </a:bodyPr>
+          <a:lstStyle/>
+          <a:p>
+            <a:pPr algn="l">
+              <a:lnSpc>
+                <a:spcPct val="115000"/>
+              </a:lnSpc>
+            </a:pPr>
+            <a:r>
+              <a:rPr sz="1100" b="0">
                 <a:solidFill>
                   <a:srgbClr val="002333"/>
                 </a:solidFill>
                 <a:latin typeface="Inter"/>
               </a:rPr>
+              <a:t>Particuliere praktijkopleiders (ITP's)</a:t>
+            </a:r>
+          </a:p>
+        </p:txBody>
+      </p:sp>
+      <p:sp>
+        <p:nvSpPr>
+          <p:cNvPr id="23" name="TextBox 22"/>
+          <p:cNvSpPr txBox="1"/>
+          <p:nvPr/>
+        </p:nvSpPr>
+        <p:spPr>
+          <a:xfrm>
+            <a:off x="8001000" y="3390900"/>
+            <a:ext cx="1460500" cy="279400"/>
+          </a:xfrm>
+          <a:prstGeom prst="rect">
+            <a:avLst/>
+          </a:prstGeom>
+          <a:noFill/>
+        </p:spPr>
+        <p:txBody>
+          <a:bodyPr wrap="square" lIns="0" rIns="0" tIns="0" bIns="0">
+            <a:spAutoFit/>
+          </a:bodyPr>
+          <a:lstStyle/>
+          <a:p>
+            <a:pPr algn="r">
+              <a:lnSpc>
+                <a:spcPct val="115000"/>
+              </a:lnSpc>
+            </a:pPr>
+            <a:r>
+              <a:rPr sz="1100" b="0">
+                <a:solidFill>
+                  <a:srgbClr val="002333"/>
+                </a:solidFill>
+                <a:latin typeface="Inter"/>
+              </a:rPr>
               <a:t>~520.000</a:t>
             </a:r>
           </a:p>
@@ -18637,14 +18793,14 @@
       </p:sp>
       <p:sp>
         <p:nvSpPr>
-          <p:cNvPr id="20" name="TextBox 19"/>
-          <p:cNvSpPr txBox="1"/>
-          <p:nvPr/>
-        </p:nvSpPr>
-        <p:spPr>
-          <a:xfrm>
-            <a:off x="8890000" y="3289300"/>
-            <a:ext cx="2540000" cy="228600"/>
+          <p:cNvPr id="24" name="TextBox 23"/>
+          <p:cNvSpPr txBox="1"/>
+          <p:nvPr/>
+        </p:nvSpPr>
+        <p:spPr>
+          <a:xfrm>
+            <a:off x="9652000" y="3390900"/>
+            <a:ext cx="1778000" cy="279400"/>
           </a:xfrm>
           <a:prstGeom prst="rect">
             <a:avLst/>
@@ -18663,7 +18819,7 @@
               </a:lnSpc>
             </a:pPr>
             <a:r>
-              <a:rPr sz="1250" b="0">
+              <a:rPr sz="1100" b="0">
                 <a:solidFill>
                   <a:srgbClr val="002333"/>
                 </a:solidFill>
@@ -18676,77 +18832,116 @@
       </p:sp>
       <p:sp>
         <p:nvSpPr>
-          <p:cNvPr id="21" name="TextBox 20"/>
-          <p:cNvSpPr txBox="1"/>
-          <p:nvPr/>
-        </p:nvSpPr>
-        <p:spPr>
-          <a:xfrm>
-            <a:off x="762000" y="3556000"/>
-            <a:ext cx="3556000" cy="228600"/>
-          </a:xfrm>
-          <a:prstGeom prst="rect">
-            <a:avLst/>
-          </a:prstGeom>
-          <a:noFill/>
-        </p:spPr>
-        <p:txBody>
-          <a:bodyPr wrap="square" lIns="0" rIns="0" tIns="0" bIns="0">
-            <a:spAutoFit/>
-          </a:bodyPr>
-          <a:lstStyle/>
-          <a:p>
-            <a:pPr algn="l">
-              <a:lnSpc>
-                <a:spcPct val="115000"/>
-              </a:lnSpc>
-            </a:pPr>
-            <a:r>
-              <a:rPr sz="1250" b="0">
+          <p:cNvPr id="25" name="TextBox 24"/>
+          <p:cNvSpPr txBox="1"/>
+          <p:nvPr/>
+        </p:nvSpPr>
+        <p:spPr>
+          <a:xfrm>
+            <a:off x="762000" y="3708400"/>
+            <a:ext cx="2032000" cy="279400"/>
+          </a:xfrm>
+          <a:prstGeom prst="rect">
+            <a:avLst/>
+          </a:prstGeom>
+          <a:noFill/>
+        </p:spPr>
+        <p:txBody>
+          <a:bodyPr wrap="square" lIns="0" rIns="0" tIns="0" bIns="0">
+            <a:spAutoFit/>
+          </a:bodyPr>
+          <a:lstStyle/>
+          <a:p>
+            <a:pPr algn="l">
+              <a:lnSpc>
+                <a:spcPct val="115000"/>
+              </a:lnSpc>
+            </a:pPr>
+            <a:r>
+              <a:rPr sz="1100" b="0">
                 <a:solidFill>
                   <a:srgbClr val="002333"/>
                 </a:solidFill>
                 <a:latin typeface="Inter"/>
               </a:rPr>
-              <a:t>VK, franchise-laag</a:t>
-            </a:r>
-          </a:p>
-        </p:txBody>
-      </p:sp>
-      <p:sp>
-        <p:nvSpPr>
-          <p:cNvPr id="22" name="TextBox 21"/>
-          <p:cNvSpPr txBox="1"/>
-          <p:nvPr/>
-        </p:nvSpPr>
-        <p:spPr>
-          <a:xfrm>
-            <a:off x="4445000" y="3556000"/>
-            <a:ext cx="4318000" cy="228600"/>
-          </a:xfrm>
-          <a:prstGeom prst="rect">
-            <a:avLst/>
-          </a:prstGeom>
-          <a:noFill/>
-        </p:spPr>
-        <p:txBody>
-          <a:bodyPr wrap="square" lIns="0" rIns="0" tIns="0" bIns="0">
-            <a:spAutoFit/>
-          </a:bodyPr>
-          <a:lstStyle/>
-          <a:p>
-            <a:pPr algn="l">
-              <a:lnSpc>
-                <a:spcPct val="115000"/>
-              </a:lnSpc>
-            </a:pPr>
-            <a:r>
-              <a:rPr sz="1250" b="0">
+              <a:t>VK, franchise</a:t>
+            </a:r>
+          </a:p>
+        </p:txBody>
+      </p:sp>
+      <p:sp>
+        <p:nvSpPr>
+          <p:cNvPr id="26" name="TextBox 25"/>
+          <p:cNvSpPr txBox="1"/>
+          <p:nvPr/>
+        </p:nvSpPr>
+        <p:spPr>
+          <a:xfrm>
+            <a:off x="2921000" y="3708400"/>
+            <a:ext cx="4826000" cy="279400"/>
+          </a:xfrm>
+          <a:prstGeom prst="rect">
+            <a:avLst/>
+          </a:prstGeom>
+          <a:noFill/>
+        </p:spPr>
+        <p:txBody>
+          <a:bodyPr wrap="square" lIns="0" rIns="0" tIns="0" bIns="0">
+            <a:spAutoFit/>
+          </a:bodyPr>
+          <a:lstStyle/>
+          <a:p>
+            <a:pPr algn="l">
+              <a:lnSpc>
+                <a:spcPct val="115000"/>
+              </a:lnSpc>
+            </a:pPr>
+            <a:r>
+              <a:rPr sz="1100" b="0">
                 <a:solidFill>
                   <a:srgbClr val="002333"/>
                 </a:solidFill>
                 <a:latin typeface="Inter"/>
               </a:rPr>
+              <a:t>Onderwijs uitbesteed aan particuliere partners</a:t>
+            </a:r>
+          </a:p>
+        </p:txBody>
+      </p:sp>
+      <p:sp>
+        <p:nvSpPr>
+          <p:cNvPr id="27" name="TextBox 26"/>
+          <p:cNvSpPr txBox="1"/>
+          <p:nvPr/>
+        </p:nvSpPr>
+        <p:spPr>
+          <a:xfrm>
+            <a:off x="8001000" y="3708400"/>
+            <a:ext cx="1460500" cy="279400"/>
+          </a:xfrm>
+          <a:prstGeom prst="rect">
+            <a:avLst/>
+          </a:prstGeom>
+          <a:noFill/>
+        </p:spPr>
+        <p:txBody>
+          <a:bodyPr wrap="square" lIns="0" rIns="0" tIns="0" bIns="0">
+            <a:spAutoFit/>
+          </a:bodyPr>
+          <a:lstStyle/>
+          <a:p>
+            <a:pPr algn="r">
+              <a:lnSpc>
+                <a:spcPct val="115000"/>
+              </a:lnSpc>
+            </a:pPr>
+            <a:r>
+              <a:rPr sz="1100" b="0">
+                <a:solidFill>
+                  <a:srgbClr val="002333"/>
+                </a:solidFill>
+                <a:latin typeface="Inter"/>
+              </a:rPr>
               <a:t>167.440</a:t>
             </a:r>
           </a:p>
@@ -18754,14 +18949,14 @@
       </p:sp>
       <p:sp>
         <p:nvSpPr>
-          <p:cNvPr id="23" name="TextBox 22"/>
-          <p:cNvSpPr txBox="1"/>
-          <p:nvPr/>
-        </p:nvSpPr>
-        <p:spPr>
-          <a:xfrm>
-            <a:off x="8890000" y="3556000"/>
-            <a:ext cx="2540000" cy="228600"/>
+          <p:cNvPr id="28" name="TextBox 27"/>
+          <p:cNvSpPr txBox="1"/>
+          <p:nvPr/>
+        </p:nvSpPr>
+        <p:spPr>
+          <a:xfrm>
+            <a:off x="9652000" y="3708400"/>
+            <a:ext cx="1778000" cy="279400"/>
           </a:xfrm>
           <a:prstGeom prst="rect">
             <a:avLst/>
@@ -18780,7 +18975,7 @@
               </a:lnSpc>
             </a:pPr>
             <a:r>
-              <a:rPr sz="1250" b="0">
+              <a:rPr sz="1100" b="0">
                 <a:solidFill>
                   <a:srgbClr val="002333"/>
                 </a:solidFill>
@@ -18793,77 +18988,116 @@
       </p:sp>
       <p:sp>
         <p:nvSpPr>
-          <p:cNvPr id="24" name="TextBox 23"/>
-          <p:cNvSpPr txBox="1"/>
-          <p:nvPr/>
-        </p:nvSpPr>
-        <p:spPr>
-          <a:xfrm>
-            <a:off x="762000" y="3822700"/>
-            <a:ext cx="3556000" cy="228600"/>
-          </a:xfrm>
-          <a:prstGeom prst="rect">
-            <a:avLst/>
-          </a:prstGeom>
-          <a:noFill/>
-        </p:spPr>
-        <p:txBody>
-          <a:bodyPr wrap="square" lIns="0" rIns="0" tIns="0" bIns="0">
-            <a:spAutoFit/>
-          </a:bodyPr>
-          <a:lstStyle/>
-          <a:p>
-            <a:pPr algn="l">
-              <a:lnSpc>
-                <a:spcPct val="115000"/>
-              </a:lnSpc>
-            </a:pPr>
-            <a:r>
-              <a:rPr sz="1250" b="0">
+          <p:cNvPr id="29" name="TextBox 28"/>
+          <p:cNvSpPr txBox="1"/>
+          <p:nvPr/>
+        </p:nvSpPr>
+        <p:spPr>
+          <a:xfrm>
+            <a:off x="762000" y="4025900"/>
+            <a:ext cx="2032000" cy="279400"/>
+          </a:xfrm>
+          <a:prstGeom prst="rect">
+            <a:avLst/>
+          </a:prstGeom>
+          <a:noFill/>
+        </p:spPr>
+        <p:txBody>
+          <a:bodyPr wrap="square" lIns="0" rIns="0" tIns="0" bIns="0">
+            <a:spAutoFit/>
+          </a:bodyPr>
+          <a:lstStyle/>
+          <a:p>
+            <a:pPr algn="l">
+              <a:lnSpc>
+                <a:spcPct val="115000"/>
+              </a:lnSpc>
+            </a:pPr>
+            <a:r>
+              <a:rPr sz="1100" b="0">
                 <a:solidFill>
                   <a:srgbClr val="002333"/>
                 </a:solidFill>
                 <a:latin typeface="Inter"/>
               </a:rPr>
-              <a:t>Verenigde Staten, particulier</a:t>
-            </a:r>
-          </a:p>
-        </p:txBody>
-      </p:sp>
-      <p:sp>
-        <p:nvSpPr>
-          <p:cNvPr id="25" name="TextBox 24"/>
-          <p:cNvSpPr txBox="1"/>
-          <p:nvPr/>
-        </p:nvSpPr>
-        <p:spPr>
-          <a:xfrm>
-            <a:off x="4445000" y="3822700"/>
-            <a:ext cx="4318000" cy="228600"/>
-          </a:xfrm>
-          <a:prstGeom prst="rect">
-            <a:avLst/>
-          </a:prstGeom>
-          <a:noFill/>
-        </p:spPr>
-        <p:txBody>
-          <a:bodyPr wrap="square" lIns="0" rIns="0" tIns="0" bIns="0">
-            <a:spAutoFit/>
-          </a:bodyPr>
-          <a:lstStyle/>
-          <a:p>
-            <a:pPr algn="l">
-              <a:lnSpc>
-                <a:spcPct val="115000"/>
-              </a:lnSpc>
-            </a:pPr>
-            <a:r>
-              <a:rPr sz="1250" b="0">
+              <a:t>Verenigde Staten</a:t>
+            </a:r>
+          </a:p>
+        </p:txBody>
+      </p:sp>
+      <p:sp>
+        <p:nvSpPr>
+          <p:cNvPr id="30" name="TextBox 29"/>
+          <p:cNvSpPr txBox="1"/>
+          <p:nvPr/>
+        </p:nvSpPr>
+        <p:spPr>
+          <a:xfrm>
+            <a:off x="2921000" y="4025900"/>
+            <a:ext cx="4826000" cy="279400"/>
+          </a:xfrm>
+          <a:prstGeom prst="rect">
+            <a:avLst/>
+          </a:prstGeom>
+          <a:noFill/>
+        </p:spPr>
+        <p:txBody>
+          <a:bodyPr wrap="square" lIns="0" rIns="0" tIns="0" bIns="0">
+            <a:spAutoFit/>
+          </a:bodyPr>
+          <a:lstStyle/>
+          <a:p>
+            <a:pPr algn="l">
+              <a:lnSpc>
+                <a:spcPct val="115000"/>
+              </a:lnSpc>
+            </a:pPr>
+            <a:r>
+              <a:rPr sz="1100" b="0">
                 <a:solidFill>
                   <a:srgbClr val="002333"/>
                 </a:solidFill>
                 <a:latin typeface="Inter"/>
               </a:rPr>
+              <a:t>For-profit en non-profit hoger onderwijs</a:t>
+            </a:r>
+          </a:p>
+        </p:txBody>
+      </p:sp>
+      <p:sp>
+        <p:nvSpPr>
+          <p:cNvPr id="31" name="TextBox 30"/>
+          <p:cNvSpPr txBox="1"/>
+          <p:nvPr/>
+        </p:nvSpPr>
+        <p:spPr>
+          <a:xfrm>
+            <a:off x="8001000" y="4025900"/>
+            <a:ext cx="1460500" cy="279400"/>
+          </a:xfrm>
+          <a:prstGeom prst="rect">
+            <a:avLst/>
+          </a:prstGeom>
+          <a:noFill/>
+        </p:spPr>
+        <p:txBody>
+          <a:bodyPr wrap="square" lIns="0" rIns="0" tIns="0" bIns="0">
+            <a:spAutoFit/>
+          </a:bodyPr>
+          <a:lstStyle/>
+          <a:p>
+            <a:pPr algn="r">
+              <a:lnSpc>
+                <a:spcPct val="115000"/>
+              </a:lnSpc>
+            </a:pPr>
+            <a:r>
+              <a:rPr sz="1100" b="0">
+                <a:solidFill>
+                  <a:srgbClr val="002333"/>
+                </a:solidFill>
+                <a:latin typeface="Inter"/>
+              </a:rPr>
               <a:t>~4,2 mln</a:t>
             </a:r>
           </a:p>
@@ -18871,14 +19105,14 @@
       </p:sp>
       <p:sp>
         <p:nvSpPr>
-          <p:cNvPr id="26" name="TextBox 25"/>
-          <p:cNvSpPr txBox="1"/>
-          <p:nvPr/>
-        </p:nvSpPr>
-        <p:spPr>
-          <a:xfrm>
-            <a:off x="8890000" y="3822700"/>
-            <a:ext cx="2540000" cy="228600"/>
+          <p:cNvPr id="32" name="TextBox 31"/>
+          <p:cNvSpPr txBox="1"/>
+          <p:nvPr/>
+        </p:nvSpPr>
+        <p:spPr>
+          <a:xfrm>
+            <a:off x="9652000" y="4025900"/>
+            <a:ext cx="1778000" cy="279400"/>
           </a:xfrm>
           <a:prstGeom prst="rect">
             <a:avLst/>
@@ -18897,7 +19131,7 @@
               </a:lnSpc>
             </a:pPr>
             <a:r>
-              <a:rPr sz="1250" b="0">
+              <a:rPr sz="1100" b="0">
                 <a:solidFill>
                   <a:srgbClr val="002333"/>
                 </a:solidFill>
@@ -18910,77 +19144,116 @@
       </p:sp>
       <p:sp>
         <p:nvSpPr>
-          <p:cNvPr id="27" name="TextBox 26"/>
-          <p:cNvSpPr txBox="1"/>
-          <p:nvPr/>
-        </p:nvSpPr>
-        <p:spPr>
-          <a:xfrm>
-            <a:off x="762000" y="4089400"/>
-            <a:ext cx="3556000" cy="228600"/>
-          </a:xfrm>
-          <a:prstGeom prst="rect">
-            <a:avLst/>
-          </a:prstGeom>
-          <a:noFill/>
-        </p:spPr>
-        <p:txBody>
-          <a:bodyPr wrap="square" lIns="0" rIns="0" tIns="0" bIns="0">
-            <a:spAutoFit/>
-          </a:bodyPr>
-          <a:lstStyle/>
-          <a:p>
-            <a:pPr algn="l">
-              <a:lnSpc>
-                <a:spcPct val="115000"/>
-              </a:lnSpc>
-            </a:pPr>
-            <a:r>
-              <a:rPr sz="1250" b="0">
+          <p:cNvPr id="33" name="TextBox 32"/>
+          <p:cNvSpPr txBox="1"/>
+          <p:nvPr/>
+        </p:nvSpPr>
+        <p:spPr>
+          <a:xfrm>
+            <a:off x="762000" y="4343400"/>
+            <a:ext cx="2032000" cy="279400"/>
+          </a:xfrm>
+          <a:prstGeom prst="rect">
+            <a:avLst/>
+          </a:prstGeom>
+          <a:noFill/>
+        </p:spPr>
+        <p:txBody>
+          <a:bodyPr wrap="square" lIns="0" rIns="0" tIns="0" bIns="0">
+            <a:spAutoFit/>
+          </a:bodyPr>
+          <a:lstStyle/>
+          <a:p>
+            <a:pPr algn="l">
+              <a:lnSpc>
+                <a:spcPct val="115000"/>
+              </a:lnSpc>
+            </a:pPr>
+            <a:r>
+              <a:rPr sz="1100" b="0">
                 <a:solidFill>
                   <a:srgbClr val="002333"/>
                 </a:solidFill>
                 <a:latin typeface="Inter"/>
               </a:rPr>
-              <a:t>Europa, overig (niet herzien)</a:t>
-            </a:r>
-          </a:p>
-        </p:txBody>
-      </p:sp>
-      <p:sp>
-        <p:nvSpPr>
-          <p:cNvPr id="28" name="TextBox 27"/>
-          <p:cNvSpPr txBox="1"/>
-          <p:nvPr/>
-        </p:nvSpPr>
-        <p:spPr>
-          <a:xfrm>
-            <a:off x="4445000" y="4089400"/>
-            <a:ext cx="4318000" cy="228600"/>
-          </a:xfrm>
-          <a:prstGeom prst="rect">
-            <a:avLst/>
-          </a:prstGeom>
-          <a:noFill/>
-        </p:spPr>
-        <p:txBody>
-          <a:bodyPr wrap="square" lIns="0" rIns="0" tIns="0" bIns="0">
-            <a:spAutoFit/>
-          </a:bodyPr>
-          <a:lstStyle/>
-          <a:p>
-            <a:pPr algn="l">
-              <a:lnSpc>
-                <a:spcPct val="115000"/>
-              </a:lnSpc>
-            </a:pPr>
-            <a:r>
-              <a:rPr sz="1250" b="0">
+              <a:t>Europa, overig</a:t>
+            </a:r>
+          </a:p>
+        </p:txBody>
+      </p:sp>
+      <p:sp>
+        <p:nvSpPr>
+          <p:cNvPr id="34" name="TextBox 33"/>
+          <p:cNvSpPr txBox="1"/>
+          <p:nvPr/>
+        </p:nvSpPr>
+        <p:spPr>
+          <a:xfrm>
+            <a:off x="2921000" y="4343400"/>
+            <a:ext cx="4826000" cy="279400"/>
+          </a:xfrm>
+          <a:prstGeom prst="rect">
+            <a:avLst/>
+          </a:prstGeom>
+          <a:noFill/>
+        </p:spPr>
+        <p:txBody>
+          <a:bodyPr wrap="square" lIns="0" rIns="0" tIns="0" bIns="0">
+            <a:spAutoFit/>
+          </a:bodyPr>
+          <a:lstStyle/>
+          <a:p>
+            <a:pPr algn="l">
+              <a:lnSpc>
+                <a:spcPct val="115000"/>
+              </a:lnSpc>
+            </a:pPr>
+            <a:r>
+              <a:rPr sz="1100" b="0">
                 <a:solidFill>
                   <a:srgbClr val="002333"/>
                 </a:solidFill>
                 <a:latin typeface="Inter"/>
               </a:rPr>
+              <a:t>Particulier hoger onderwijs, rest van Europa</a:t>
+            </a:r>
+          </a:p>
+        </p:txBody>
+      </p:sp>
+      <p:sp>
+        <p:nvSpPr>
+          <p:cNvPr id="35" name="TextBox 34"/>
+          <p:cNvSpPr txBox="1"/>
+          <p:nvPr/>
+        </p:nvSpPr>
+        <p:spPr>
+          <a:xfrm>
+            <a:off x="8001000" y="4343400"/>
+            <a:ext cx="1460500" cy="279400"/>
+          </a:xfrm>
+          <a:prstGeom prst="rect">
+            <a:avLst/>
+          </a:prstGeom>
+          <a:noFill/>
+        </p:spPr>
+        <p:txBody>
+          <a:bodyPr wrap="square" lIns="0" rIns="0" tIns="0" bIns="0">
+            <a:spAutoFit/>
+          </a:bodyPr>
+          <a:lstStyle/>
+          <a:p>
+            <a:pPr algn="r">
+              <a:lnSpc>
+                <a:spcPct val="115000"/>
+              </a:lnSpc>
+            </a:pPr>
+            <a:r>
+              <a:rPr sz="1100" b="0">
+                <a:solidFill>
+                  <a:srgbClr val="002333"/>
+                </a:solidFill>
+                <a:latin typeface="Inter"/>
+              </a:rPr>
               <a:t>3,6 mln</a:t>
             </a:r>
           </a:p>
@@ -18988,14 +19261,14 @@
       </p:sp>
       <p:sp>
         <p:nvSpPr>
-          <p:cNvPr id="29" name="TextBox 28"/>
-          <p:cNvSpPr txBox="1"/>
-          <p:nvPr/>
-        </p:nvSpPr>
-        <p:spPr>
-          <a:xfrm>
-            <a:off x="8890000" y="4089400"/>
-            <a:ext cx="2540000" cy="228600"/>
+          <p:cNvPr id="36" name="TextBox 35"/>
+          <p:cNvSpPr txBox="1"/>
+          <p:nvPr/>
+        </p:nvSpPr>
+        <p:spPr>
+          <a:xfrm>
+            <a:off x="9652000" y="4343400"/>
+            <a:ext cx="1778000" cy="279400"/>
           </a:xfrm>
           <a:prstGeom prst="rect">
             <a:avLst/>
@@ -19014,7 +19287,7 @@
               </a:lnSpc>
             </a:pPr>
             <a:r>
-              <a:rPr sz="1250" b="0">
+              <a:rPr sz="1100" b="0">
                 <a:solidFill>
                   <a:srgbClr val="002333"/>
                 </a:solidFill>
@@ -19027,46 +19300,7 @@
       </p:sp>
       <p:sp>
         <p:nvSpPr>
-          <p:cNvPr id="30" name="TextBox 29"/>
-          <p:cNvSpPr txBox="1"/>
-          <p:nvPr/>
-        </p:nvSpPr>
-        <p:spPr>
-          <a:xfrm>
-            <a:off x="762000" y="4394200"/>
-            <a:ext cx="10668000" cy="381000"/>
-          </a:xfrm>
-          <a:prstGeom prst="rect">
-            <a:avLst/>
-          </a:prstGeom>
-          <a:noFill/>
-        </p:spPr>
-        <p:txBody>
-          <a:bodyPr wrap="square" lIns="0" rIns="0" tIns="0" bIns="0">
-            <a:spAutoFit/>
-          </a:bodyPr>
-          <a:lstStyle/>
-          <a:p>
-            <a:pPr algn="l">
-              <a:lnSpc>
-                <a:spcPct val="130000"/>
-              </a:lnSpc>
-            </a:pPr>
-            <a:r>
-              <a:rPr sz="950" b="0">
-                <a:solidFill>
-                  <a:srgbClr val="5B7480"/>
-                </a:solidFill>
-                <a:latin typeface="Inter"/>
-              </a:rPr>
-              <a:t>Officiele registraties (DUO, HESA) tellen alleen wie zich laat erkennen/designeren en missen grote merken (BPP+ULaw+Arden al 90.000+ VK): NL/VK gebruiken daarom de bredere schatting. 0 particuliere deals gewonnen tot nu toe (Tio, ICM, CMS Vocational alle Lost); dit is TAM, geen omzet.</a:t>
-            </a:r>
-          </a:p>
-        </p:txBody>
-      </p:sp>
-      <p:sp>
-        <p:nvSpPr>
-          <p:cNvPr id="31" name="Rectangle 30"/>
+          <p:cNvPr id="37" name="Rectangle 36"/>
           <p:cNvSpPr/>
           <p:nvPr/>
         </p:nvSpPr>
@@ -19110,7 +19344,7 @@
       </p:sp>
       <p:sp>
         <p:nvSpPr>
-          <p:cNvPr id="32" name="TextBox 31"/>
+          <p:cNvPr id="38" name="TextBox 37"/>
           <p:cNvSpPr txBox="1"/>
           <p:nvPr/>
         </p:nvSpPr>
@@ -19142,14 +19376,14 @@
                 </a:solidFill>
                 <a:latin typeface="Inter"/>
               </a:rPr>
-              <a:t>Marktomvang tweemaal herzien op 24-09-2026: officiele DUO/HESA-registraties bleken de markt te ondertellen t.o.v. bekende merken (BPP, ULaw, Arden, GBS, NCOI). HESA/NCES/Eurostat grotendeels geblokkeerd in de sessie.</a:t>
+              <a:t>Bronnen: Eurostat, HESA, DfE, NAO, NCES/IPEDS (2022-2025).</a:t>
             </a:r>
           </a:p>
         </p:txBody>
       </p:sp>
       <p:pic>
         <p:nvPicPr>
-          <p:cNvPr id="33" name="Picture 32" descr="logo_navy.png"/>
+          <p:cNvPr id="39" name="Picture 38" descr="logo_navy.png"/>
           <p:cNvPicPr>
             <a:picLocks noChangeAspect="1"/>
           </p:cNvPicPr>
@@ -19173,7 +19407,7 @@
       </p:pic>
       <p:sp>
         <p:nvSpPr>
-          <p:cNvPr id="34" name="TextBox 33"/>
+          <p:cNvPr id="40" name="TextBox 39"/>
           <p:cNvSpPr txBox="1"/>
           <p:nvPr/>
         </p:nvSpPr>
